--- a/RealWorldEF.pptx
+++ b/RealWorldEF.pptx
@@ -5,48 +5,49 @@
     <p:sldMasterId id="2147483648" r:id="rId1"/>
   </p:sldMasterIdLst>
   <p:notesMasterIdLst>
-    <p:notesMasterId r:id="rId41"/>
+    <p:notesMasterId r:id="rId42"/>
   </p:notesMasterIdLst>
   <p:sldIdLst>
     <p:sldId id="263" r:id="rId2"/>
     <p:sldId id="264" r:id="rId3"/>
-    <p:sldId id="265" r:id="rId4"/>
-    <p:sldId id="266" r:id="rId5"/>
-    <p:sldId id="262" r:id="rId6"/>
-    <p:sldId id="257" r:id="rId7"/>
-    <p:sldId id="267" r:id="rId8"/>
-    <p:sldId id="268" r:id="rId9"/>
-    <p:sldId id="269" r:id="rId10"/>
-    <p:sldId id="272" r:id="rId11"/>
-    <p:sldId id="281" r:id="rId12"/>
-    <p:sldId id="282" r:id="rId13"/>
-    <p:sldId id="270" r:id="rId14"/>
-    <p:sldId id="273" r:id="rId15"/>
-    <p:sldId id="287" r:id="rId16"/>
-    <p:sldId id="288" r:id="rId17"/>
-    <p:sldId id="283" r:id="rId18"/>
-    <p:sldId id="271" r:id="rId19"/>
-    <p:sldId id="274" r:id="rId20"/>
-    <p:sldId id="289" r:id="rId21"/>
-    <p:sldId id="290" r:id="rId22"/>
-    <p:sldId id="284" r:id="rId23"/>
-    <p:sldId id="275" r:id="rId24"/>
-    <p:sldId id="276" r:id="rId25"/>
-    <p:sldId id="285" r:id="rId26"/>
-    <p:sldId id="286" r:id="rId27"/>
-    <p:sldId id="296" r:id="rId28"/>
-    <p:sldId id="277" r:id="rId29"/>
-    <p:sldId id="278" r:id="rId30"/>
-    <p:sldId id="291" r:id="rId31"/>
-    <p:sldId id="297" r:id="rId32"/>
-    <p:sldId id="292" r:id="rId33"/>
-    <p:sldId id="293" r:id="rId34"/>
-    <p:sldId id="298" r:id="rId35"/>
-    <p:sldId id="294" r:id="rId36"/>
-    <p:sldId id="295" r:id="rId37"/>
-    <p:sldId id="299" r:id="rId38"/>
-    <p:sldId id="279" r:id="rId39"/>
-    <p:sldId id="300" r:id="rId40"/>
+    <p:sldId id="301" r:id="rId4"/>
+    <p:sldId id="302" r:id="rId5"/>
+    <p:sldId id="303" r:id="rId6"/>
+    <p:sldId id="262" r:id="rId7"/>
+    <p:sldId id="257" r:id="rId8"/>
+    <p:sldId id="267" r:id="rId9"/>
+    <p:sldId id="268" r:id="rId10"/>
+    <p:sldId id="269" r:id="rId11"/>
+    <p:sldId id="272" r:id="rId12"/>
+    <p:sldId id="281" r:id="rId13"/>
+    <p:sldId id="282" r:id="rId14"/>
+    <p:sldId id="270" r:id="rId15"/>
+    <p:sldId id="273" r:id="rId16"/>
+    <p:sldId id="287" r:id="rId17"/>
+    <p:sldId id="288" r:id="rId18"/>
+    <p:sldId id="283" r:id="rId19"/>
+    <p:sldId id="271" r:id="rId20"/>
+    <p:sldId id="274" r:id="rId21"/>
+    <p:sldId id="289" r:id="rId22"/>
+    <p:sldId id="290" r:id="rId23"/>
+    <p:sldId id="284" r:id="rId24"/>
+    <p:sldId id="275" r:id="rId25"/>
+    <p:sldId id="276" r:id="rId26"/>
+    <p:sldId id="285" r:id="rId27"/>
+    <p:sldId id="286" r:id="rId28"/>
+    <p:sldId id="296" r:id="rId29"/>
+    <p:sldId id="277" r:id="rId30"/>
+    <p:sldId id="278" r:id="rId31"/>
+    <p:sldId id="291" r:id="rId32"/>
+    <p:sldId id="297" r:id="rId33"/>
+    <p:sldId id="292" r:id="rId34"/>
+    <p:sldId id="293" r:id="rId35"/>
+    <p:sldId id="298" r:id="rId36"/>
+    <p:sldId id="294" r:id="rId37"/>
+    <p:sldId id="295" r:id="rId38"/>
+    <p:sldId id="299" r:id="rId39"/>
+    <p:sldId id="279" r:id="rId40"/>
+    <p:sldId id="300" r:id="rId41"/>
   </p:sldIdLst>
   <p:sldSz cx="11520488" cy="6480175"/>
   <p:notesSz cx="6858000" cy="9144000"/>
@@ -254,7 +255,7 @@
           <a:p>
             <a:fld id="{31D4CB5B-F102-4D58-A04D-55F87B5CA643}" type="datetimeFigureOut">
               <a:rPr lang="en-US" smtClean="0"/>
-              <a:t>9/26/2025</a:t>
+              <a:t>9/27/2025</a:t>
             </a:fld>
             <a:endParaRPr lang="en-US"/>
           </a:p>
@@ -566,71 +567,8 @@
           <a:lstStyle/>
           <a:p>
             <a:r>
-              <a:rPr lang="en-US" dirty="0"/>
-              <a:t>Migration strategy is ultimately up to your team.</a:t>
-            </a:r>
-            <a:br>
-              <a:rPr lang="en-US" dirty="0"/>
-            </a:br>
-            <a:r>
-              <a:rPr lang="en-US" dirty="0"/>
-              <a:t>If you are trying to achieve true production CI/CD with rollouts that don’t get stuck or require additional manual intervention, use a tool.  If you just need an easy way to do it you could make a public API via an azure function endpoint that can just run the typical migration update command</a:t>
-            </a:r>
-          </a:p>
-          <a:p>
-            <a:br>
-              <a:rPr lang="en-US" dirty="0"/>
-            </a:br>
-            <a:r>
-              <a:rPr lang="en-US" dirty="0"/>
-              <a:t>Using a GitHub action is going to be painful as GH hosted runners can’t hit the database through the built-in firewall and you can’t </a:t>
-            </a:r>
-            <a:r>
-              <a:rPr lang="en-US" dirty="0" err="1"/>
-              <a:t>guantee</a:t>
-            </a:r>
-            <a:r>
-              <a:rPr lang="en-US" dirty="0"/>
-              <a:t> their IP to poke a hole in the firewall</a:t>
-            </a:r>
-            <a:br>
-              <a:rPr lang="en-US" dirty="0"/>
-            </a:br>
-            <a:br>
-              <a:rPr lang="en-US" dirty="0"/>
-            </a:br>
-            <a:r>
-              <a:rPr lang="en-US" dirty="0"/>
-              <a:t>You could use GitHub Private runners (</a:t>
-            </a:r>
-            <a:r>
-              <a:rPr lang="en-US" dirty="0" err="1"/>
-              <a:t>github</a:t>
-            </a:r>
-            <a:r>
-              <a:rPr lang="en-US" dirty="0"/>
-              <a:t> enterprise)</a:t>
-            </a:r>
-            <a:br>
-              <a:rPr lang="en-US" dirty="0"/>
-            </a:br>
-            <a:r>
-              <a:rPr lang="en-US" dirty="0"/>
-              <a:t>Or you could try a container instance inside your network at azure or with guaranteed range of outbound Ips.  But this is also PAINFUL</a:t>
-            </a:r>
-          </a:p>
-          <a:p>
-            <a:r>
-              <a:rPr lang="en-US" dirty="0"/>
-              <a:t>You need an image for the </a:t>
-            </a:r>
-            <a:r>
-              <a:rPr lang="en-US" dirty="0" err="1"/>
-              <a:t>github</a:t>
-            </a:r>
-            <a:r>
-              <a:rPr lang="en-US" dirty="0"/>
-              <a:t> action to run on the ACI and you’ll need a token to get it, or you could try to pull from public but it’s likely throttled. You would also need to get the thing running on your container in the ACI with enough information to run migrations on your database.</a:t>
+              <a:rPr lang="en-US"/>
+              <a:t>Link to Raffle: https://forms.office.com/r/ZMSNL0Bbpp</a:t>
             </a:r>
           </a:p>
         </p:txBody>
@@ -652,7 +590,7 @@
           <a:p>
             <a:fld id="{1A8F4386-F8E0-437E-911F-526A26FCC1EB}" type="slidenum">
               <a:rPr lang="en-US" smtClean="0"/>
-              <a:t>8</a:t>
+              <a:t>3</a:t>
             </a:fld>
             <a:endParaRPr lang="en-US"/>
           </a:p>
@@ -661,7 +599,7 @@
     </p:spTree>
     <p:extLst>
       <p:ext uri="{BB962C8B-B14F-4D97-AF65-F5344CB8AC3E}">
-        <p14:creationId xmlns:p14="http://schemas.microsoft.com/office/powerpoint/2010/main" val="1445421093"/>
+        <p14:creationId xmlns:p14="http://schemas.microsoft.com/office/powerpoint/2010/main" val="3481422575"/>
       </p:ext>
     </p:extLst>
   </p:cSld>
@@ -672,6 +610,93 @@
 </file>
 
 <file path=ppt/notesSlides/notesSlide10.xml><?xml version="1.0" encoding="utf-8"?>
+<p:notes xmlns:a="http://schemas.openxmlformats.org/drawingml/2006/main" xmlns:r="http://schemas.openxmlformats.org/officeDocument/2006/relationships" xmlns:p="http://schemas.openxmlformats.org/presentationml/2006/main">
+  <p:cSld>
+    <p:spTree>
+      <p:nvGrpSpPr>
+        <p:cNvPr id="1" name=""/>
+        <p:cNvGrpSpPr/>
+        <p:nvPr/>
+      </p:nvGrpSpPr>
+      <p:grpSpPr>
+        <a:xfrm>
+          <a:off x="0" y="0"/>
+          <a:ext cx="0" cy="0"/>
+          <a:chOff x="0" y="0"/>
+          <a:chExt cx="0" cy="0"/>
+        </a:xfrm>
+      </p:grpSpPr>
+      <p:sp>
+        <p:nvSpPr>
+          <p:cNvPr id="2" name="Slide Image Placeholder 1"/>
+          <p:cNvSpPr>
+            <a:spLocks noGrp="1" noRot="1" noChangeAspect="1"/>
+          </p:cNvSpPr>
+          <p:nvPr>
+            <p:ph type="sldImg"/>
+          </p:nvPr>
+        </p:nvSpPr>
+        <p:spPr/>
+      </p:sp>
+      <p:sp>
+        <p:nvSpPr>
+          <p:cNvPr id="3" name="Notes Placeholder 2"/>
+          <p:cNvSpPr>
+            <a:spLocks noGrp="1"/>
+          </p:cNvSpPr>
+          <p:nvPr>
+            <p:ph type="body" idx="1"/>
+          </p:nvPr>
+        </p:nvSpPr>
+        <p:spPr/>
+        <p:txBody>
+          <a:bodyPr/>
+          <a:lstStyle/>
+          <a:p>
+            <a:r>
+              <a:rPr lang="en-US" dirty="0"/>
+              <a:t>This query will look much better to developers</a:t>
+            </a:r>
+          </a:p>
+        </p:txBody>
+      </p:sp>
+      <p:sp>
+        <p:nvSpPr>
+          <p:cNvPr id="4" name="Slide Number Placeholder 3"/>
+          <p:cNvSpPr>
+            <a:spLocks noGrp="1"/>
+          </p:cNvSpPr>
+          <p:nvPr>
+            <p:ph type="sldNum" sz="quarter" idx="5"/>
+          </p:nvPr>
+        </p:nvSpPr>
+        <p:spPr/>
+        <p:txBody>
+          <a:bodyPr/>
+          <a:lstStyle/>
+          <a:p>
+            <a:fld id="{1A8F4386-F8E0-437E-911F-526A26FCC1EB}" type="slidenum">
+              <a:rPr lang="en-US" smtClean="0"/>
+              <a:t>27</a:t>
+            </a:fld>
+            <a:endParaRPr lang="en-US"/>
+          </a:p>
+        </p:txBody>
+      </p:sp>
+    </p:spTree>
+    <p:extLst>
+      <p:ext uri="{BB962C8B-B14F-4D97-AF65-F5344CB8AC3E}">
+        <p14:creationId xmlns:p14="http://schemas.microsoft.com/office/powerpoint/2010/main" val="3906717610"/>
+      </p:ext>
+    </p:extLst>
+  </p:cSld>
+  <p:clrMapOvr>
+    <a:masterClrMapping/>
+  </p:clrMapOvr>
+</p:notes>
+</file>
+
+<file path=ppt/notesSlides/notesSlide11.xml><?xml version="1.0" encoding="utf-8"?>
 <p:notes xmlns:a="http://schemas.openxmlformats.org/drawingml/2006/main" xmlns:r="http://schemas.openxmlformats.org/officeDocument/2006/relationships" xmlns:p="http://schemas.openxmlformats.org/presentationml/2006/main">
   <p:cSld>
     <p:spTree>
@@ -760,7 +785,7 @@
           <a:p>
             <a:fld id="{1A8F4386-F8E0-437E-911F-526A26FCC1EB}" type="slidenum">
               <a:rPr lang="en-US" smtClean="0"/>
-              <a:t>27</a:t>
+              <a:t>28</a:t>
             </a:fld>
             <a:endParaRPr lang="en-US"/>
           </a:p>
@@ -779,7 +804,7 @@
 </p:notes>
 </file>
 
-<file path=ppt/notesSlides/notesSlide11.xml><?xml version="1.0" encoding="utf-8"?>
+<file path=ppt/notesSlides/notesSlide12.xml><?xml version="1.0" encoding="utf-8"?>
 <p:notes xmlns:a="http://schemas.openxmlformats.org/drawingml/2006/main" xmlns:r="http://schemas.openxmlformats.org/officeDocument/2006/relationships" xmlns:p="http://schemas.openxmlformats.org/presentationml/2006/main">
   <p:cSld>
     <p:spTree>
@@ -868,7 +893,7 @@
           <a:p>
             <a:fld id="{1A8F4386-F8E0-437E-911F-526A26FCC1EB}" type="slidenum">
               <a:rPr lang="en-US" smtClean="0"/>
-              <a:t>31</a:t>
+              <a:t>32</a:t>
             </a:fld>
             <a:endParaRPr lang="en-US"/>
           </a:p>
@@ -887,7 +912,7 @@
 </p:notes>
 </file>
 
-<file path=ppt/notesSlides/notesSlide12.xml><?xml version="1.0" encoding="utf-8"?>
+<file path=ppt/notesSlides/notesSlide13.xml><?xml version="1.0" encoding="utf-8"?>
 <p:notes xmlns:a="http://schemas.openxmlformats.org/drawingml/2006/main" xmlns:r="http://schemas.openxmlformats.org/officeDocument/2006/relationships" xmlns:p="http://schemas.openxmlformats.org/presentationml/2006/main">
   <p:cSld>
     <p:spTree>
@@ -952,7 +977,7 @@
           <a:p>
             <a:fld id="{1A8F4386-F8E0-437E-911F-526A26FCC1EB}" type="slidenum">
               <a:rPr lang="en-US" smtClean="0"/>
-              <a:t>33</a:t>
+              <a:t>34</a:t>
             </a:fld>
             <a:endParaRPr lang="en-US"/>
           </a:p>
@@ -971,7 +996,7 @@
 </p:notes>
 </file>
 
-<file path=ppt/notesSlides/notesSlide13.xml><?xml version="1.0" encoding="utf-8"?>
+<file path=ppt/notesSlides/notesSlide14.xml><?xml version="1.0" encoding="utf-8"?>
 <p:notes xmlns:a="http://schemas.openxmlformats.org/drawingml/2006/main" xmlns:r="http://schemas.openxmlformats.org/officeDocument/2006/relationships" xmlns:p="http://schemas.openxmlformats.org/presentationml/2006/main">
   <p:cSld>
     <p:spTree>
@@ -1060,7 +1085,7 @@
           <a:p>
             <a:fld id="{1A8F4386-F8E0-437E-911F-526A26FCC1EB}" type="slidenum">
               <a:rPr lang="en-US" smtClean="0"/>
-              <a:t>34</a:t>
+              <a:t>35</a:t>
             </a:fld>
             <a:endParaRPr lang="en-US"/>
           </a:p>
@@ -1070,90 +1095,6 @@
     <p:extLst>
       <p:ext uri="{BB962C8B-B14F-4D97-AF65-F5344CB8AC3E}">
         <p14:creationId xmlns:p14="http://schemas.microsoft.com/office/powerpoint/2010/main" val="2056636177"/>
-      </p:ext>
-    </p:extLst>
-  </p:cSld>
-  <p:clrMapOvr>
-    <a:masterClrMapping/>
-  </p:clrMapOvr>
-</p:notes>
-</file>
-
-<file path=ppt/notesSlides/notesSlide14.xml><?xml version="1.0" encoding="utf-8"?>
-<p:notes xmlns:a="http://schemas.openxmlformats.org/drawingml/2006/main" xmlns:r="http://schemas.openxmlformats.org/officeDocument/2006/relationships" xmlns:p="http://schemas.openxmlformats.org/presentationml/2006/main">
-  <p:cSld>
-    <p:spTree>
-      <p:nvGrpSpPr>
-        <p:cNvPr id="1" name=""/>
-        <p:cNvGrpSpPr/>
-        <p:nvPr/>
-      </p:nvGrpSpPr>
-      <p:grpSpPr>
-        <a:xfrm>
-          <a:off x="0" y="0"/>
-          <a:ext cx="0" cy="0"/>
-          <a:chOff x="0" y="0"/>
-          <a:chExt cx="0" cy="0"/>
-        </a:xfrm>
-      </p:grpSpPr>
-      <p:sp>
-        <p:nvSpPr>
-          <p:cNvPr id="2" name="Slide Image Placeholder 1"/>
-          <p:cNvSpPr>
-            <a:spLocks noGrp="1" noRot="1" noChangeAspect="1"/>
-          </p:cNvSpPr>
-          <p:nvPr>
-            <p:ph type="sldImg"/>
-          </p:nvPr>
-        </p:nvSpPr>
-        <p:spPr/>
-      </p:sp>
-      <p:sp>
-        <p:nvSpPr>
-          <p:cNvPr id="3" name="Notes Placeholder 2"/>
-          <p:cNvSpPr>
-            <a:spLocks noGrp="1"/>
-          </p:cNvSpPr>
-          <p:nvPr>
-            <p:ph type="body" idx="1"/>
-          </p:nvPr>
-        </p:nvSpPr>
-        <p:spPr/>
-        <p:txBody>
-          <a:bodyPr/>
-          <a:lstStyle/>
-          <a:p>
-            <a:endParaRPr lang="en-US" dirty="0"/>
-          </a:p>
-        </p:txBody>
-      </p:sp>
-      <p:sp>
-        <p:nvSpPr>
-          <p:cNvPr id="4" name="Slide Number Placeholder 3"/>
-          <p:cNvSpPr>
-            <a:spLocks noGrp="1"/>
-          </p:cNvSpPr>
-          <p:nvPr>
-            <p:ph type="sldNum" sz="quarter" idx="5"/>
-          </p:nvPr>
-        </p:nvSpPr>
-        <p:spPr/>
-        <p:txBody>
-          <a:bodyPr/>
-          <a:lstStyle/>
-          <a:p>
-            <a:fld id="{1A8F4386-F8E0-437E-911F-526A26FCC1EB}" type="slidenum">
-              <a:rPr lang="en-US" smtClean="0"/>
-              <a:t>35</a:t>
-            </a:fld>
-            <a:endParaRPr lang="en-US"/>
-          </a:p>
-        </p:txBody>
-      </p:sp>
-    </p:spTree>
-    <p:extLst>
-      <p:ext uri="{BB962C8B-B14F-4D97-AF65-F5344CB8AC3E}">
-        <p14:creationId xmlns:p14="http://schemas.microsoft.com/office/powerpoint/2010/main" val="104202716"/>
       </p:ext>
     </p:extLst>
   </p:cSld>
@@ -1207,10 +1148,7 @@
           <a:bodyPr/>
           <a:lstStyle/>
           <a:p>
-            <a:r>
-              <a:rPr lang="en-US" dirty="0"/>
-              <a:t>Note: This has 0 performance benefit as the exact same query is generated as the original query!</a:t>
-            </a:r>
+            <a:endParaRPr lang="en-US" dirty="0"/>
           </a:p>
         </p:txBody>
       </p:sp>
@@ -1232,6 +1170,93 @@
             <a:fld id="{1A8F4386-F8E0-437E-911F-526A26FCC1EB}" type="slidenum">
               <a:rPr lang="en-US" smtClean="0"/>
               <a:t>36</a:t>
+            </a:fld>
+            <a:endParaRPr lang="en-US"/>
+          </a:p>
+        </p:txBody>
+      </p:sp>
+    </p:spTree>
+    <p:extLst>
+      <p:ext uri="{BB962C8B-B14F-4D97-AF65-F5344CB8AC3E}">
+        <p14:creationId xmlns:p14="http://schemas.microsoft.com/office/powerpoint/2010/main" val="104202716"/>
+      </p:ext>
+    </p:extLst>
+  </p:cSld>
+  <p:clrMapOvr>
+    <a:masterClrMapping/>
+  </p:clrMapOvr>
+</p:notes>
+</file>
+
+<file path=ppt/notesSlides/notesSlide16.xml><?xml version="1.0" encoding="utf-8"?>
+<p:notes xmlns:a="http://schemas.openxmlformats.org/drawingml/2006/main" xmlns:r="http://schemas.openxmlformats.org/officeDocument/2006/relationships" xmlns:p="http://schemas.openxmlformats.org/presentationml/2006/main">
+  <p:cSld>
+    <p:spTree>
+      <p:nvGrpSpPr>
+        <p:cNvPr id="1" name=""/>
+        <p:cNvGrpSpPr/>
+        <p:nvPr/>
+      </p:nvGrpSpPr>
+      <p:grpSpPr>
+        <a:xfrm>
+          <a:off x="0" y="0"/>
+          <a:ext cx="0" cy="0"/>
+          <a:chOff x="0" y="0"/>
+          <a:chExt cx="0" cy="0"/>
+        </a:xfrm>
+      </p:grpSpPr>
+      <p:sp>
+        <p:nvSpPr>
+          <p:cNvPr id="2" name="Slide Image Placeholder 1"/>
+          <p:cNvSpPr>
+            <a:spLocks noGrp="1" noRot="1" noChangeAspect="1"/>
+          </p:cNvSpPr>
+          <p:nvPr>
+            <p:ph type="sldImg"/>
+          </p:nvPr>
+        </p:nvSpPr>
+        <p:spPr/>
+      </p:sp>
+      <p:sp>
+        <p:nvSpPr>
+          <p:cNvPr id="3" name="Notes Placeholder 2"/>
+          <p:cNvSpPr>
+            <a:spLocks noGrp="1"/>
+          </p:cNvSpPr>
+          <p:nvPr>
+            <p:ph type="body" idx="1"/>
+          </p:nvPr>
+        </p:nvSpPr>
+        <p:spPr/>
+        <p:txBody>
+          <a:bodyPr/>
+          <a:lstStyle/>
+          <a:p>
+            <a:r>
+              <a:rPr lang="en-US" dirty="0"/>
+              <a:t>Note: This has 0 performance benefit as the exact same query is generated as the original query!</a:t>
+            </a:r>
+          </a:p>
+        </p:txBody>
+      </p:sp>
+      <p:sp>
+        <p:nvSpPr>
+          <p:cNvPr id="4" name="Slide Number Placeholder 3"/>
+          <p:cNvSpPr>
+            <a:spLocks noGrp="1"/>
+          </p:cNvSpPr>
+          <p:nvPr>
+            <p:ph type="sldNum" sz="quarter" idx="5"/>
+          </p:nvPr>
+        </p:nvSpPr>
+        <p:spPr/>
+        <p:txBody>
+          <a:bodyPr/>
+          <a:lstStyle/>
+          <a:p>
+            <a:fld id="{1A8F4386-F8E0-437E-911F-526A26FCC1EB}" type="slidenum">
+              <a:rPr lang="en-US" smtClean="0"/>
+              <a:t>37</a:t>
             </a:fld>
             <a:endParaRPr lang="en-US"/>
           </a:p>
@@ -1250,7 +1275,7 @@
 </p:notes>
 </file>
 
-<file path=ppt/notesSlides/notesSlide16.xml><?xml version="1.0" encoding="utf-8"?>
+<file path=ppt/notesSlides/notesSlide17.xml><?xml version="1.0" encoding="utf-8"?>
 <p:notes xmlns:a="http://schemas.openxmlformats.org/drawingml/2006/main" xmlns:r="http://schemas.openxmlformats.org/officeDocument/2006/relationships" xmlns:p="http://schemas.openxmlformats.org/presentationml/2006/main">
   <p:cSld>
     <p:spTree>
@@ -1339,7 +1364,7 @@
           <a:p>
             <a:fld id="{1A8F4386-F8E0-437E-911F-526A26FCC1EB}" type="slidenum">
               <a:rPr lang="en-US" smtClean="0"/>
-              <a:t>37</a:t>
+              <a:t>38</a:t>
             </a:fld>
             <a:endParaRPr lang="en-US"/>
           </a:p>
@@ -1358,7 +1383,7 @@
 </p:notes>
 </file>
 
-<file path=ppt/notesSlides/notesSlide17.xml><?xml version="1.0" encoding="utf-8"?>
+<file path=ppt/notesSlides/notesSlide18.xml><?xml version="1.0" encoding="utf-8"?>
 <p:notes xmlns:a="http://schemas.openxmlformats.org/drawingml/2006/main" xmlns:r="http://schemas.openxmlformats.org/officeDocument/2006/relationships" xmlns:p="http://schemas.openxmlformats.org/presentationml/2006/main">
   <p:cSld>
     <p:spTree>
@@ -1440,7 +1465,7 @@
           <a:p>
             <a:fld id="{1A8F4386-F8E0-437E-911F-526A26FCC1EB}" type="slidenum">
               <a:rPr lang="en-US" smtClean="0"/>
-              <a:t>39</a:t>
+              <a:t>40</a:t>
             </a:fld>
             <a:endParaRPr lang="en-US"/>
           </a:p>
@@ -1503,7 +1528,73 @@
           <a:bodyPr/>
           <a:lstStyle/>
           <a:p>
-            <a:endParaRPr lang="en-US" dirty="0"/>
+            <a:r>
+              <a:rPr lang="en-US" dirty="0"/>
+              <a:t>Migration strategy is ultimately up to your team.</a:t>
+            </a:r>
+            <a:br>
+              <a:rPr lang="en-US" dirty="0"/>
+            </a:br>
+            <a:r>
+              <a:rPr lang="en-US" dirty="0"/>
+              <a:t>If you are trying to achieve true production CI/CD with rollouts that don’t get stuck or require additional manual intervention, use a tool.  If you just need an easy way to do it you could make a public API via an azure function endpoint that can just run the typical migration update command</a:t>
+            </a:r>
+          </a:p>
+          <a:p>
+            <a:br>
+              <a:rPr lang="en-US" dirty="0"/>
+            </a:br>
+            <a:r>
+              <a:rPr lang="en-US" dirty="0"/>
+              <a:t>Using a GitHub action is going to be painful as GH hosted runners can’t hit the database through the built-in firewall and you can’t </a:t>
+            </a:r>
+            <a:r>
+              <a:rPr lang="en-US" dirty="0" err="1"/>
+              <a:t>guantee</a:t>
+            </a:r>
+            <a:r>
+              <a:rPr lang="en-US" dirty="0"/>
+              <a:t> their IP to poke a hole in the firewall</a:t>
+            </a:r>
+            <a:br>
+              <a:rPr lang="en-US" dirty="0"/>
+            </a:br>
+            <a:br>
+              <a:rPr lang="en-US" dirty="0"/>
+            </a:br>
+            <a:r>
+              <a:rPr lang="en-US" dirty="0"/>
+              <a:t>You could use GitHub Private runners (</a:t>
+            </a:r>
+            <a:r>
+              <a:rPr lang="en-US" dirty="0" err="1"/>
+              <a:t>github</a:t>
+            </a:r>
+            <a:r>
+              <a:rPr lang="en-US" dirty="0"/>
+              <a:t> enterprise)</a:t>
+            </a:r>
+            <a:br>
+              <a:rPr lang="en-US" dirty="0"/>
+            </a:br>
+            <a:r>
+              <a:rPr lang="en-US" dirty="0"/>
+              <a:t>Or you could try a container instance inside your network at azure or with guaranteed range of outbound Ips.  But this is also PAINFUL</a:t>
+            </a:r>
+          </a:p>
+          <a:p>
+            <a:r>
+              <a:rPr lang="en-US" dirty="0"/>
+              <a:t>You need an image for the </a:t>
+            </a:r>
+            <a:r>
+              <a:rPr lang="en-US" dirty="0" err="1"/>
+              <a:t>github</a:t>
+            </a:r>
+            <a:r>
+              <a:rPr lang="en-US" dirty="0"/>
+              <a:t> action to run on the ACI and you’ll need a token to get it, or you could try to pull from public but it’s likely throttled. You would also need to get the thing running on your container in the ACI with enough information to run migrations on your database.</a:t>
+            </a:r>
           </a:p>
         </p:txBody>
       </p:sp>
@@ -1524,7 +1615,7 @@
           <a:p>
             <a:fld id="{1A8F4386-F8E0-437E-911F-526A26FCC1EB}" type="slidenum">
               <a:rPr lang="en-US" smtClean="0"/>
-              <a:t>15</a:t>
+              <a:t>9</a:t>
             </a:fld>
             <a:endParaRPr lang="en-US"/>
           </a:p>
@@ -1533,7 +1624,7 @@
     </p:spTree>
     <p:extLst>
       <p:ext uri="{BB962C8B-B14F-4D97-AF65-F5344CB8AC3E}">
-        <p14:creationId xmlns:p14="http://schemas.microsoft.com/office/powerpoint/2010/main" val="3320068916"/>
+        <p14:creationId xmlns:p14="http://schemas.microsoft.com/office/powerpoint/2010/main" val="1445421093"/>
       </p:ext>
     </p:extLst>
   </p:cSld>
@@ -1587,61 +1678,6 @@
           <a:bodyPr/>
           <a:lstStyle/>
           <a:p>
-            <a:r>
-              <a:rPr lang="en-US" dirty="0"/>
-              <a:t>Each problem requires a loop</a:t>
-            </a:r>
-          </a:p>
-          <a:p>
-            <a:r>
-              <a:rPr lang="en-US" dirty="0"/>
-              <a:t>However, the second requires a filter</a:t>
-            </a:r>
-          </a:p>
-          <a:p>
-            <a:br>
-              <a:rPr lang="en-US" dirty="0"/>
-            </a:br>
-            <a:r>
-              <a:rPr lang="en-US" dirty="0"/>
-              <a:t>Prior to bulk update / bulk delete, either you iterate all on the client side or use a proc</a:t>
-            </a:r>
-            <a:br>
-              <a:rPr lang="en-US" dirty="0"/>
-            </a:br>
-            <a:r>
-              <a:rPr lang="en-US" dirty="0"/>
-              <a:t>With bulk-update/ bulk-delete you can do one operation</a:t>
-            </a:r>
-          </a:p>
-          <a:p>
-            <a:br>
-              <a:rPr lang="en-US" dirty="0"/>
-            </a:br>
-            <a:r>
-              <a:rPr lang="en-US" dirty="0"/>
-              <a:t>Side effects:</a:t>
-            </a:r>
-            <a:br>
-              <a:rPr lang="en-US" dirty="0"/>
-            </a:br>
-            <a:r>
-              <a:rPr lang="en-US" dirty="0"/>
-              <a:t>No </a:t>
-            </a:r>
-            <a:r>
-              <a:rPr lang="en-US" dirty="0" err="1"/>
-              <a:t>SaveChanges</a:t>
-            </a:r>
-            <a:br>
-              <a:rPr lang="en-US" dirty="0"/>
-            </a:br>
-            <a:r>
-              <a:rPr lang="en-US" dirty="0"/>
-              <a:t>No ability to intercept (No such thing as an automatic soft delete with this)</a:t>
-            </a:r>
-          </a:p>
-          <a:p>
             <a:endParaRPr lang="en-US" dirty="0"/>
           </a:p>
         </p:txBody>
@@ -1663,7 +1699,7 @@
           <a:p>
             <a:fld id="{1A8F4386-F8E0-437E-911F-526A26FCC1EB}" type="slidenum">
               <a:rPr lang="en-US" smtClean="0"/>
-              <a:t>19</a:t>
+              <a:t>16</a:t>
             </a:fld>
             <a:endParaRPr lang="en-US"/>
           </a:p>
@@ -1672,7 +1708,7 @@
     </p:spTree>
     <p:extLst>
       <p:ext uri="{BB962C8B-B14F-4D97-AF65-F5344CB8AC3E}">
-        <p14:creationId xmlns:p14="http://schemas.microsoft.com/office/powerpoint/2010/main" val="860592616"/>
+        <p14:creationId xmlns:p14="http://schemas.microsoft.com/office/powerpoint/2010/main" val="3320068916"/>
       </p:ext>
     </p:extLst>
   </p:cSld>
@@ -1728,24 +1764,60 @@
           <a:p>
             <a:r>
               <a:rPr lang="en-US" dirty="0"/>
-              <a:t>Iteration means O(n) growth rate</a:t>
-            </a:r>
+              <a:t>Each problem requires a loop</a:t>
+            </a:r>
+          </a:p>
+          <a:p>
+            <a:r>
+              <a:rPr lang="en-US" dirty="0"/>
+              <a:t>However, the second requires a filter</a:t>
+            </a:r>
+          </a:p>
+          <a:p>
             <a:br>
               <a:rPr lang="en-US" dirty="0"/>
             </a:br>
             <a:r>
               <a:rPr lang="en-US" dirty="0"/>
-              <a:t>Transaction means you might get through 1000s then fail and nothing is updated and have to do it all again</a:t>
+              <a:t>Prior to bulk update / bulk delete, either you iterate all on the client side or use a proc</a:t>
+            </a:r>
+            <a:br>
+              <a:rPr lang="en-US" dirty="0"/>
+            </a:br>
+            <a:r>
+              <a:rPr lang="en-US" dirty="0"/>
+              <a:t>With bulk-update/ bulk-delete you can do one operation</a:t>
+            </a:r>
+          </a:p>
+          <a:p>
+            <a:br>
+              <a:rPr lang="en-US" dirty="0"/>
+            </a:br>
+            <a:r>
+              <a:rPr lang="en-US" dirty="0"/>
+              <a:t>Side effects:</a:t>
+            </a:r>
+            <a:br>
+              <a:rPr lang="en-US" dirty="0"/>
+            </a:br>
+            <a:r>
+              <a:rPr lang="en-US" dirty="0"/>
+              <a:t>No </a:t>
+            </a:r>
+            <a:r>
+              <a:rPr lang="en-US" dirty="0" err="1"/>
+              <a:t>SaveChanges</a:t>
+            </a:r>
+            <a:br>
+              <a:rPr lang="en-US" dirty="0"/>
+            </a:br>
+            <a:r>
+              <a:rPr lang="en-US" dirty="0"/>
+              <a:t>No ability to intercept (No such thing as an automatic soft delete with this)</a:t>
             </a:r>
           </a:p>
           <a:p>
             <a:endParaRPr lang="en-US" dirty="0"/>
-          </a:p>
-          <a:p>
-            <a:r>
-              <a:rPr lang="en-US" dirty="0"/>
-              <a:t>Solution was likely use a PROC</a:t>
-            </a:r>
           </a:p>
         </p:txBody>
       </p:sp>
@@ -1775,7 +1847,7 @@
     </p:spTree>
     <p:extLst>
       <p:ext uri="{BB962C8B-B14F-4D97-AF65-F5344CB8AC3E}">
-        <p14:creationId xmlns:p14="http://schemas.microsoft.com/office/powerpoint/2010/main" val="3818299251"/>
+        <p14:creationId xmlns:p14="http://schemas.microsoft.com/office/powerpoint/2010/main" val="860592616"/>
       </p:ext>
     </p:extLst>
   </p:cSld>
@@ -1831,20 +1903,23 @@
           <a:p>
             <a:r>
               <a:rPr lang="en-US" dirty="0"/>
-              <a:t>Reminder:</a:t>
+              <a:t>Iteration means O(n) growth rate</a:t>
             </a:r>
             <a:br>
               <a:rPr lang="en-US" dirty="0"/>
             </a:br>
             <a:r>
               <a:rPr lang="en-US" dirty="0"/>
-              <a:t>There is no save changes on this operation</a:t>
-            </a:r>
-          </a:p>
-          <a:p>
-            <a:r>
-              <a:rPr lang="en-US" dirty="0"/>
-              <a:t>There is no interceptor capture of command on this data</a:t>
+              <a:t>Transaction means you might get through 1000s then fail and nothing is updated and have to do it all again</a:t>
+            </a:r>
+          </a:p>
+          <a:p>
+            <a:endParaRPr lang="en-US" dirty="0"/>
+          </a:p>
+          <a:p>
+            <a:r>
+              <a:rPr lang="en-US" dirty="0"/>
+              <a:t>Solution was likely use a PROC</a:t>
             </a:r>
           </a:p>
         </p:txBody>
@@ -1875,7 +1950,7 @@
     </p:spTree>
     <p:extLst>
       <p:ext uri="{BB962C8B-B14F-4D97-AF65-F5344CB8AC3E}">
-        <p14:creationId xmlns:p14="http://schemas.microsoft.com/office/powerpoint/2010/main" val="2627787229"/>
+        <p14:creationId xmlns:p14="http://schemas.microsoft.com/office/powerpoint/2010/main" val="3818299251"/>
       </p:ext>
     </p:extLst>
   </p:cSld>
@@ -1929,7 +2004,23 @@
           <a:bodyPr/>
           <a:lstStyle/>
           <a:p>
-            <a:endParaRPr lang="en-US" dirty="0"/>
+            <a:r>
+              <a:rPr lang="en-US" dirty="0"/>
+              <a:t>Reminder:</a:t>
+            </a:r>
+            <a:br>
+              <a:rPr lang="en-US" dirty="0"/>
+            </a:br>
+            <a:r>
+              <a:rPr lang="en-US" dirty="0"/>
+              <a:t>There is no save changes on this operation</a:t>
+            </a:r>
+          </a:p>
+          <a:p>
+            <a:r>
+              <a:rPr lang="en-US" dirty="0"/>
+              <a:t>There is no interceptor capture of command on this data</a:t>
+            </a:r>
           </a:p>
         </p:txBody>
       </p:sp>
@@ -1959,7 +2050,7 @@
     </p:spTree>
     <p:extLst>
       <p:ext uri="{BB962C8B-B14F-4D97-AF65-F5344CB8AC3E}">
-        <p14:creationId xmlns:p14="http://schemas.microsoft.com/office/powerpoint/2010/main" val="2444440591"/>
+        <p14:creationId xmlns:p14="http://schemas.microsoft.com/office/powerpoint/2010/main" val="2627787229"/>
       </p:ext>
     </p:extLst>
   </p:cSld>
@@ -2043,7 +2134,7 @@
     </p:spTree>
     <p:extLst>
       <p:ext uri="{BB962C8B-B14F-4D97-AF65-F5344CB8AC3E}">
-        <p14:creationId xmlns:p14="http://schemas.microsoft.com/office/powerpoint/2010/main" val="4246146959"/>
+        <p14:creationId xmlns:p14="http://schemas.microsoft.com/office/powerpoint/2010/main" val="2444440591"/>
       </p:ext>
     </p:extLst>
   </p:cSld>
@@ -2097,10 +2188,7 @@
           <a:bodyPr/>
           <a:lstStyle/>
           <a:p>
-            <a:r>
-              <a:rPr lang="en-US" dirty="0"/>
-              <a:t>This is not the only way to do it, just one example</a:t>
-            </a:r>
+            <a:endParaRPr lang="en-US" dirty="0"/>
           </a:p>
         </p:txBody>
       </p:sp>
@@ -2121,7 +2209,7 @@
           <a:p>
             <a:fld id="{1A8F4386-F8E0-437E-911F-526A26FCC1EB}" type="slidenum">
               <a:rPr lang="en-US" smtClean="0"/>
-              <a:t>25</a:t>
+              <a:t>24</a:t>
             </a:fld>
             <a:endParaRPr lang="en-US"/>
           </a:p>
@@ -2130,7 +2218,7 @@
     </p:spTree>
     <p:extLst>
       <p:ext uri="{BB962C8B-B14F-4D97-AF65-F5344CB8AC3E}">
-        <p14:creationId xmlns:p14="http://schemas.microsoft.com/office/powerpoint/2010/main" val="3723997312"/>
+        <p14:creationId xmlns:p14="http://schemas.microsoft.com/office/powerpoint/2010/main" val="4246146959"/>
       </p:ext>
     </p:extLst>
   </p:cSld>
@@ -2186,7 +2274,7 @@
           <a:p>
             <a:r>
               <a:rPr lang="en-US" dirty="0"/>
-              <a:t>This query will look much better to developers</a:t>
+              <a:t>This is not the only way to do it, just one example</a:t>
             </a:r>
           </a:p>
         </p:txBody>
@@ -2217,7 +2305,7 @@
     </p:spTree>
     <p:extLst>
       <p:ext uri="{BB962C8B-B14F-4D97-AF65-F5344CB8AC3E}">
-        <p14:creationId xmlns:p14="http://schemas.microsoft.com/office/powerpoint/2010/main" val="3906717610"/>
+        <p14:creationId xmlns:p14="http://schemas.microsoft.com/office/powerpoint/2010/main" val="3723997312"/>
       </p:ext>
     </p:extLst>
   </p:cSld>
@@ -3761,6 +3849,70 @@
         <p:cNvPr id="1" name="">
           <a:extLst>
             <a:ext uri="{FF2B5EF4-FFF2-40B4-BE49-F238E27FC236}">
+              <a16:creationId xmlns:a16="http://schemas.microsoft.com/office/drawing/2014/main" id="{5F78C80A-18C1-7717-D72D-CD7624FC00AC}"/>
+            </a:ext>
+          </a:extLst>
+        </p:cNvPr>
+        <p:cNvGrpSpPr/>
+        <p:nvPr/>
+      </p:nvGrpSpPr>
+      <p:grpSpPr>
+        <a:xfrm>
+          <a:off x="0" y="0"/>
+          <a:ext cx="0" cy="0"/>
+          <a:chOff x="0" y="0"/>
+          <a:chExt cx="0" cy="0"/>
+        </a:xfrm>
+      </p:grpSpPr>
+      <p:sp>
+        <p:nvSpPr>
+          <p:cNvPr id="2" name="Title 1">
+            <a:extLst>
+              <a:ext uri="{FF2B5EF4-FFF2-40B4-BE49-F238E27FC236}">
+                <a16:creationId xmlns:a16="http://schemas.microsoft.com/office/drawing/2014/main" id="{E4D57CFC-B745-64D2-F017-37E9E6CA9AC5}"/>
+              </a:ext>
+            </a:extLst>
+          </p:cNvPr>
+          <p:cNvSpPr>
+            <a:spLocks noGrp="1"/>
+          </p:cNvSpPr>
+          <p:nvPr>
+            <p:ph type="title"/>
+          </p:nvPr>
+        </p:nvSpPr>
+        <p:spPr/>
+        <p:txBody>
+          <a:bodyPr/>
+          <a:lstStyle/>
+          <a:p>
+            <a:r>
+              <a:rPr lang="en-US" dirty="0"/>
+              <a:t>Interceptors</a:t>
+            </a:r>
+          </a:p>
+        </p:txBody>
+      </p:sp>
+    </p:spTree>
+    <p:extLst>
+      <p:ext uri="{BB962C8B-B14F-4D97-AF65-F5344CB8AC3E}">
+        <p14:creationId xmlns:p14="http://schemas.microsoft.com/office/powerpoint/2010/main" val="4147337205"/>
+      </p:ext>
+    </p:extLst>
+  </p:cSld>
+  <p:clrMapOvr>
+    <a:masterClrMapping/>
+  </p:clrMapOvr>
+</p:sld>
+</file>
+
+<file path=ppt/slides/slide11.xml><?xml version="1.0" encoding="utf-8"?>
+<p:sld xmlns:a="http://schemas.openxmlformats.org/drawingml/2006/main" xmlns:r="http://schemas.openxmlformats.org/officeDocument/2006/relationships" xmlns:p="http://schemas.openxmlformats.org/presentationml/2006/main">
+  <p:cSld>
+    <p:spTree>
+      <p:nvGrpSpPr>
+        <p:cNvPr id="1" name="">
+          <a:extLst>
+            <a:ext uri="{FF2B5EF4-FFF2-40B4-BE49-F238E27FC236}">
               <a16:creationId xmlns:a16="http://schemas.microsoft.com/office/drawing/2014/main" id="{FBC0FDD7-EF23-30C4-18CF-1C52990A4B6A}"/>
             </a:ext>
           </a:extLst>
@@ -3903,492 +4055,6 @@
     <p:extLst>
       <p:ext uri="{BB962C8B-B14F-4D97-AF65-F5344CB8AC3E}">
         <p14:creationId xmlns:p14="http://schemas.microsoft.com/office/powerpoint/2010/main" val="755066658"/>
-      </p:ext>
-    </p:extLst>
-  </p:cSld>
-  <p:clrMapOvr>
-    <a:masterClrMapping/>
-  </p:clrMapOvr>
-</p:sld>
-</file>
-
-<file path=ppt/slides/slide11.xml><?xml version="1.0" encoding="utf-8"?>
-<p:sld xmlns:a="http://schemas.openxmlformats.org/drawingml/2006/main" xmlns:r="http://schemas.openxmlformats.org/officeDocument/2006/relationships" xmlns:p="http://schemas.openxmlformats.org/presentationml/2006/main">
-  <p:cSld>
-    <p:spTree>
-      <p:nvGrpSpPr>
-        <p:cNvPr id="1" name=""/>
-        <p:cNvGrpSpPr/>
-        <p:nvPr/>
-      </p:nvGrpSpPr>
-      <p:grpSpPr>
-        <a:xfrm>
-          <a:off x="0" y="0"/>
-          <a:ext cx="0" cy="0"/>
-          <a:chOff x="0" y="0"/>
-          <a:chExt cx="0" cy="0"/>
-        </a:xfrm>
-      </p:grpSpPr>
-      <p:sp>
-        <p:nvSpPr>
-          <p:cNvPr id="2" name="Title 1">
-            <a:extLst>
-              <a:ext uri="{FF2B5EF4-FFF2-40B4-BE49-F238E27FC236}">
-                <a16:creationId xmlns:a16="http://schemas.microsoft.com/office/drawing/2014/main" id="{D5F9EE2A-0E4B-9DE0-3FC2-0EDF762115E5}"/>
-              </a:ext>
-            </a:extLst>
-          </p:cNvPr>
-          <p:cNvSpPr>
-            <a:spLocks noGrp="1"/>
-          </p:cNvSpPr>
-          <p:nvPr>
-            <p:ph type="title"/>
-          </p:nvPr>
-        </p:nvSpPr>
-        <p:spPr>
-          <a:xfrm>
-            <a:off x="360125" y="139383"/>
-            <a:ext cx="10800000" cy="720000"/>
-          </a:xfrm>
-        </p:spPr>
-        <p:txBody>
-          <a:bodyPr/>
-          <a:lstStyle/>
-          <a:p>
-            <a:r>
-              <a:rPr lang="en-US" dirty="0"/>
-              <a:t>Sample Code</a:t>
-            </a:r>
-          </a:p>
-        </p:txBody>
-      </p:sp>
-      <p:sp>
-        <p:nvSpPr>
-          <p:cNvPr id="3" name="Content Placeholder 2">
-            <a:extLst>
-              <a:ext uri="{FF2B5EF4-FFF2-40B4-BE49-F238E27FC236}">
-                <a16:creationId xmlns:a16="http://schemas.microsoft.com/office/drawing/2014/main" id="{F291D46A-801E-8120-657D-98C3E1C9D92B}"/>
-              </a:ext>
-            </a:extLst>
-          </p:cNvPr>
-          <p:cNvSpPr>
-            <a:spLocks noGrp="1"/>
-          </p:cNvSpPr>
-          <p:nvPr>
-            <p:ph idx="1"/>
-          </p:nvPr>
-        </p:nvSpPr>
-        <p:spPr>
-          <a:xfrm>
-            <a:off x="360125" y="1080363"/>
-            <a:ext cx="10800000" cy="5039450"/>
-          </a:xfrm>
-        </p:spPr>
-        <p:txBody>
-          <a:bodyPr>
-            <a:normAutofit fontScale="32500" lnSpcReduction="20000"/>
-          </a:bodyPr>
-          <a:lstStyle/>
-          <a:p>
-            <a:r>
-              <a:rPr lang="en-US" dirty="0"/>
-              <a:t>public class </a:t>
-            </a:r>
-            <a:r>
-              <a:rPr lang="en-US" dirty="0" err="1"/>
-              <a:t>LoggingCommandInterceptor</a:t>
-            </a:r>
-            <a:r>
-              <a:rPr lang="en-US" dirty="0"/>
-              <a:t> : </a:t>
-            </a:r>
-            <a:r>
-              <a:rPr lang="en-US" b="1" dirty="0" err="1"/>
-              <a:t>DbCommandInterceptor</a:t>
-            </a:r>
-            <a:endParaRPr lang="en-US" b="1" dirty="0"/>
-          </a:p>
-          <a:p>
-            <a:r>
-              <a:rPr lang="en-US" dirty="0"/>
-              <a:t>{</a:t>
-            </a:r>
-          </a:p>
-          <a:p>
-            <a:r>
-              <a:rPr lang="en-US" dirty="0"/>
-              <a:t>    private </a:t>
-            </a:r>
-            <a:r>
-              <a:rPr lang="en-US" dirty="0" err="1"/>
-              <a:t>readonly</a:t>
-            </a:r>
-            <a:r>
-              <a:rPr lang="en-US" dirty="0"/>
-              <a:t> </a:t>
-            </a:r>
-            <a:r>
-              <a:rPr lang="en-US" dirty="0" err="1"/>
-              <a:t>ILogger</a:t>
-            </a:r>
-            <a:r>
-              <a:rPr lang="en-US" dirty="0"/>
-              <a:t> _logger;</a:t>
-            </a:r>
-          </a:p>
-          <a:p>
-            <a:endParaRPr lang="en-US" dirty="0"/>
-          </a:p>
-          <a:p>
-            <a:r>
-              <a:rPr lang="en-US" dirty="0"/>
-              <a:t>    public </a:t>
-            </a:r>
-            <a:r>
-              <a:rPr lang="en-US" dirty="0" err="1"/>
-              <a:t>LoggingCommandInterceptor</a:t>
-            </a:r>
-            <a:r>
-              <a:rPr lang="en-US" dirty="0"/>
-              <a:t>(</a:t>
-            </a:r>
-            <a:r>
-              <a:rPr lang="en-US" dirty="0" err="1"/>
-              <a:t>ILoggerFactory</a:t>
-            </a:r>
-            <a:r>
-              <a:rPr lang="en-US" dirty="0"/>
-              <a:t> </a:t>
-            </a:r>
-            <a:r>
-              <a:rPr lang="en-US" dirty="0" err="1"/>
-              <a:t>loggerFactory</a:t>
-            </a:r>
-            <a:r>
-              <a:rPr lang="en-US" dirty="0"/>
-              <a:t>)</a:t>
-            </a:r>
-          </a:p>
-          <a:p>
-            <a:r>
-              <a:rPr lang="en-US" dirty="0"/>
-              <a:t>    {</a:t>
-            </a:r>
-          </a:p>
-          <a:p>
-            <a:r>
-              <a:rPr lang="en-US" dirty="0"/>
-              <a:t>        _logger = </a:t>
-            </a:r>
-            <a:r>
-              <a:rPr lang="en-US" dirty="0" err="1"/>
-              <a:t>loggerFactory.CreateLogger</a:t>
-            </a:r>
-            <a:r>
-              <a:rPr lang="en-US" dirty="0"/>
-              <a:t>("</a:t>
-            </a:r>
-            <a:r>
-              <a:rPr lang="en-US" dirty="0" err="1"/>
-              <a:t>EFCustomInterceptor</a:t>
-            </a:r>
-            <a:r>
-              <a:rPr lang="en-US" dirty="0"/>
-              <a:t>");</a:t>
-            </a:r>
-          </a:p>
-          <a:p>
-            <a:r>
-              <a:rPr lang="en-US" dirty="0"/>
-              <a:t>    }</a:t>
-            </a:r>
-          </a:p>
-          <a:p>
-            <a:endParaRPr lang="en-US" dirty="0"/>
-          </a:p>
-          <a:p>
-            <a:r>
-              <a:rPr lang="en-US" dirty="0"/>
-              <a:t>    public override </a:t>
-            </a:r>
-            <a:r>
-              <a:rPr lang="en-US" b="1" dirty="0" err="1"/>
-              <a:t>InterceptionResult</a:t>
-            </a:r>
-            <a:r>
-              <a:rPr lang="en-US" dirty="0"/>
-              <a:t>&lt;</a:t>
-            </a:r>
-            <a:r>
-              <a:rPr lang="en-US" dirty="0" err="1"/>
-              <a:t>DbCommand</a:t>
-            </a:r>
-            <a:r>
-              <a:rPr lang="en-US" dirty="0"/>
-              <a:t>&gt; </a:t>
-            </a:r>
-            <a:r>
-              <a:rPr lang="en-US" b="1" dirty="0" err="1"/>
-              <a:t>CommandCreating</a:t>
-            </a:r>
-            <a:r>
-              <a:rPr lang="en-US" dirty="0"/>
-              <a:t>(</a:t>
-            </a:r>
-          </a:p>
-          <a:p>
-            <a:r>
-              <a:rPr lang="en-US" dirty="0"/>
-              <a:t>        </a:t>
-            </a:r>
-            <a:r>
-              <a:rPr lang="en-US" dirty="0" err="1"/>
-              <a:t>CommandCorrelatedEventData</a:t>
-            </a:r>
-            <a:r>
-              <a:rPr lang="en-US" dirty="0"/>
-              <a:t> </a:t>
-            </a:r>
-            <a:r>
-              <a:rPr lang="en-US" dirty="0" err="1"/>
-              <a:t>eventData</a:t>
-            </a:r>
-            <a:r>
-              <a:rPr lang="en-US" dirty="0"/>
-              <a:t>,</a:t>
-            </a:r>
-          </a:p>
-          <a:p>
-            <a:r>
-              <a:rPr lang="en-US" dirty="0"/>
-              <a:t>        </a:t>
-            </a:r>
-            <a:r>
-              <a:rPr lang="en-US" dirty="0" err="1"/>
-              <a:t>InterceptionResult</a:t>
-            </a:r>
-            <a:r>
-              <a:rPr lang="en-US" dirty="0"/>
-              <a:t>&lt;</a:t>
-            </a:r>
-            <a:r>
-              <a:rPr lang="en-US" dirty="0" err="1"/>
-              <a:t>DbCommand</a:t>
-            </a:r>
-            <a:r>
-              <a:rPr lang="en-US" dirty="0"/>
-              <a:t>&gt; result)</a:t>
-            </a:r>
-          </a:p>
-          <a:p>
-            <a:r>
-              <a:rPr lang="en-US" dirty="0"/>
-              <a:t>    {</a:t>
-            </a:r>
-          </a:p>
-          <a:p>
-            <a:r>
-              <a:rPr lang="en-US" dirty="0"/>
-              <a:t>        _</a:t>
-            </a:r>
-            <a:r>
-              <a:rPr lang="en-US" dirty="0" err="1"/>
-              <a:t>logger.LogInformation</a:t>
-            </a:r>
-            <a:r>
-              <a:rPr lang="en-US" dirty="0"/>
-              <a:t>("Creating command for context {Context}", eventData.Context?.</a:t>
-            </a:r>
-            <a:r>
-              <a:rPr lang="en-US" dirty="0" err="1"/>
-              <a:t>GetType</a:t>
-            </a:r>
-            <a:r>
-              <a:rPr lang="en-US" dirty="0"/>
-              <a:t>().Name);</a:t>
-            </a:r>
-          </a:p>
-          <a:p>
-            <a:r>
-              <a:rPr lang="en-US" dirty="0"/>
-              <a:t>        return </a:t>
-            </a:r>
-            <a:r>
-              <a:rPr lang="en-US" dirty="0" err="1"/>
-              <a:t>base.CommandCreating</a:t>
-            </a:r>
-            <a:r>
-              <a:rPr lang="en-US" dirty="0"/>
-              <a:t>(</a:t>
-            </a:r>
-            <a:r>
-              <a:rPr lang="en-US" dirty="0" err="1"/>
-              <a:t>eventData</a:t>
-            </a:r>
-            <a:r>
-              <a:rPr lang="en-US" dirty="0"/>
-              <a:t>, result);</a:t>
-            </a:r>
-          </a:p>
-          <a:p>
-            <a:r>
-              <a:rPr lang="en-US" dirty="0"/>
-              <a:t>    }</a:t>
-            </a:r>
-          </a:p>
-          <a:p>
-            <a:endParaRPr lang="en-US" dirty="0"/>
-          </a:p>
-          <a:p>
-            <a:r>
-              <a:rPr lang="en-US" dirty="0"/>
-              <a:t>    public override </a:t>
-            </a:r>
-            <a:r>
-              <a:rPr lang="en-US" b="1" dirty="0" err="1"/>
-              <a:t>InterceptionResult</a:t>
-            </a:r>
-            <a:r>
-              <a:rPr lang="en-US" dirty="0"/>
-              <a:t>&lt;int&gt; </a:t>
-            </a:r>
-            <a:r>
-              <a:rPr lang="en-US" b="1" dirty="0" err="1"/>
-              <a:t>NonQueryExecuting</a:t>
-            </a:r>
-            <a:r>
-              <a:rPr lang="en-US" dirty="0"/>
-              <a:t>(</a:t>
-            </a:r>
-          </a:p>
-          <a:p>
-            <a:r>
-              <a:rPr lang="en-US" dirty="0"/>
-              <a:t>        </a:t>
-            </a:r>
-            <a:r>
-              <a:rPr lang="en-US" dirty="0" err="1"/>
-              <a:t>DbCommand</a:t>
-            </a:r>
-            <a:r>
-              <a:rPr lang="en-US" dirty="0"/>
-              <a:t> command,</a:t>
-            </a:r>
-          </a:p>
-          <a:p>
-            <a:r>
-              <a:rPr lang="en-US" dirty="0"/>
-              <a:t>        </a:t>
-            </a:r>
-            <a:r>
-              <a:rPr lang="en-US" dirty="0" err="1"/>
-              <a:t>CommandEventData</a:t>
-            </a:r>
-            <a:r>
-              <a:rPr lang="en-US" dirty="0"/>
-              <a:t> </a:t>
-            </a:r>
-            <a:r>
-              <a:rPr lang="en-US" dirty="0" err="1"/>
-              <a:t>eventData</a:t>
-            </a:r>
-            <a:r>
-              <a:rPr lang="en-US" dirty="0"/>
-              <a:t>,</a:t>
-            </a:r>
-          </a:p>
-          <a:p>
-            <a:r>
-              <a:rPr lang="en-US" dirty="0"/>
-              <a:t>        </a:t>
-            </a:r>
-            <a:r>
-              <a:rPr lang="en-US" dirty="0" err="1"/>
-              <a:t>InterceptionResult</a:t>
-            </a:r>
-            <a:r>
-              <a:rPr lang="en-US" dirty="0"/>
-              <a:t>&lt;int&gt; result)</a:t>
-            </a:r>
-          </a:p>
-          <a:p>
-            <a:r>
-              <a:rPr lang="en-US" dirty="0"/>
-              <a:t>    {</a:t>
-            </a:r>
-          </a:p>
-          <a:p>
-            <a:r>
-              <a:rPr lang="en-US" dirty="0"/>
-              <a:t>        _</a:t>
-            </a:r>
-            <a:r>
-              <a:rPr lang="en-US" b="1" dirty="0" err="1"/>
-              <a:t>logger.LogInformation</a:t>
-            </a:r>
-            <a:r>
-              <a:rPr lang="en-US" b="1" dirty="0"/>
-              <a:t>("Executing </a:t>
-            </a:r>
-            <a:r>
-              <a:rPr lang="en-US" b="1" dirty="0" err="1"/>
-              <a:t>NonQuery</a:t>
-            </a:r>
-            <a:r>
-              <a:rPr lang="en-US" b="1" dirty="0"/>
-              <a:t>: {</a:t>
-            </a:r>
-            <a:r>
-              <a:rPr lang="en-US" b="1" dirty="0" err="1"/>
-              <a:t>CommandText</a:t>
-            </a:r>
-            <a:r>
-              <a:rPr lang="en-US" b="1" dirty="0"/>
-              <a:t>}", </a:t>
-            </a:r>
-            <a:r>
-              <a:rPr lang="en-US" b="1" dirty="0" err="1"/>
-              <a:t>command.CommandText</a:t>
-            </a:r>
-            <a:r>
-              <a:rPr lang="en-US" b="1" dirty="0"/>
-              <a:t>);</a:t>
-            </a:r>
-          </a:p>
-          <a:p>
-            <a:r>
-              <a:rPr lang="en-US" b="1" dirty="0"/>
-              <a:t>        return </a:t>
-            </a:r>
-            <a:r>
-              <a:rPr lang="en-US" b="1" dirty="0" err="1"/>
-              <a:t>base.NonQueryExecuting</a:t>
-            </a:r>
-            <a:r>
-              <a:rPr lang="en-US" b="1" dirty="0"/>
-              <a:t>(command, </a:t>
-            </a:r>
-            <a:r>
-              <a:rPr lang="en-US" b="1" dirty="0" err="1"/>
-              <a:t>eventData</a:t>
-            </a:r>
-            <a:r>
-              <a:rPr lang="en-US" b="1" dirty="0"/>
-              <a:t>, result);</a:t>
-            </a:r>
-          </a:p>
-          <a:p>
-            <a:r>
-              <a:rPr lang="en-US" dirty="0"/>
-              <a:t>    }</a:t>
-            </a:r>
-          </a:p>
-        </p:txBody>
-      </p:sp>
-    </p:spTree>
-    <p:extLst>
-      <p:ext uri="{BB962C8B-B14F-4D97-AF65-F5344CB8AC3E}">
-        <p14:creationId xmlns:p14="http://schemas.microsoft.com/office/powerpoint/2010/main" val="1880199221"/>
       </p:ext>
     </p:extLst>
   </p:cSld>
@@ -4420,6 +4086,492 @@
           <p:cNvPr id="2" name="Title 1">
             <a:extLst>
               <a:ext uri="{FF2B5EF4-FFF2-40B4-BE49-F238E27FC236}">
+                <a16:creationId xmlns:a16="http://schemas.microsoft.com/office/drawing/2014/main" id="{D5F9EE2A-0E4B-9DE0-3FC2-0EDF762115E5}"/>
+              </a:ext>
+            </a:extLst>
+          </p:cNvPr>
+          <p:cNvSpPr>
+            <a:spLocks noGrp="1"/>
+          </p:cNvSpPr>
+          <p:nvPr>
+            <p:ph type="title"/>
+          </p:nvPr>
+        </p:nvSpPr>
+        <p:spPr>
+          <a:xfrm>
+            <a:off x="360125" y="139383"/>
+            <a:ext cx="10800000" cy="720000"/>
+          </a:xfrm>
+        </p:spPr>
+        <p:txBody>
+          <a:bodyPr/>
+          <a:lstStyle/>
+          <a:p>
+            <a:r>
+              <a:rPr lang="en-US" dirty="0"/>
+              <a:t>Sample Code</a:t>
+            </a:r>
+          </a:p>
+        </p:txBody>
+      </p:sp>
+      <p:sp>
+        <p:nvSpPr>
+          <p:cNvPr id="3" name="Content Placeholder 2">
+            <a:extLst>
+              <a:ext uri="{FF2B5EF4-FFF2-40B4-BE49-F238E27FC236}">
+                <a16:creationId xmlns:a16="http://schemas.microsoft.com/office/drawing/2014/main" id="{F291D46A-801E-8120-657D-98C3E1C9D92B}"/>
+              </a:ext>
+            </a:extLst>
+          </p:cNvPr>
+          <p:cNvSpPr>
+            <a:spLocks noGrp="1"/>
+          </p:cNvSpPr>
+          <p:nvPr>
+            <p:ph idx="1"/>
+          </p:nvPr>
+        </p:nvSpPr>
+        <p:spPr>
+          <a:xfrm>
+            <a:off x="360125" y="1080363"/>
+            <a:ext cx="10800000" cy="5039450"/>
+          </a:xfrm>
+        </p:spPr>
+        <p:txBody>
+          <a:bodyPr>
+            <a:normAutofit fontScale="32500" lnSpcReduction="20000"/>
+          </a:bodyPr>
+          <a:lstStyle/>
+          <a:p>
+            <a:r>
+              <a:rPr lang="en-US" dirty="0"/>
+              <a:t>public class </a:t>
+            </a:r>
+            <a:r>
+              <a:rPr lang="en-US" dirty="0" err="1"/>
+              <a:t>LoggingCommandInterceptor</a:t>
+            </a:r>
+            <a:r>
+              <a:rPr lang="en-US" dirty="0"/>
+              <a:t> : </a:t>
+            </a:r>
+            <a:r>
+              <a:rPr lang="en-US" b="1" dirty="0" err="1"/>
+              <a:t>DbCommandInterceptor</a:t>
+            </a:r>
+            <a:endParaRPr lang="en-US" b="1" dirty="0"/>
+          </a:p>
+          <a:p>
+            <a:r>
+              <a:rPr lang="en-US" dirty="0"/>
+              <a:t>{</a:t>
+            </a:r>
+          </a:p>
+          <a:p>
+            <a:r>
+              <a:rPr lang="en-US" dirty="0"/>
+              <a:t>    private </a:t>
+            </a:r>
+            <a:r>
+              <a:rPr lang="en-US" dirty="0" err="1"/>
+              <a:t>readonly</a:t>
+            </a:r>
+            <a:r>
+              <a:rPr lang="en-US" dirty="0"/>
+              <a:t> </a:t>
+            </a:r>
+            <a:r>
+              <a:rPr lang="en-US" dirty="0" err="1"/>
+              <a:t>ILogger</a:t>
+            </a:r>
+            <a:r>
+              <a:rPr lang="en-US" dirty="0"/>
+              <a:t> _logger;</a:t>
+            </a:r>
+          </a:p>
+          <a:p>
+            <a:endParaRPr lang="en-US" dirty="0"/>
+          </a:p>
+          <a:p>
+            <a:r>
+              <a:rPr lang="en-US" dirty="0"/>
+              <a:t>    public </a:t>
+            </a:r>
+            <a:r>
+              <a:rPr lang="en-US" dirty="0" err="1"/>
+              <a:t>LoggingCommandInterceptor</a:t>
+            </a:r>
+            <a:r>
+              <a:rPr lang="en-US" dirty="0"/>
+              <a:t>(</a:t>
+            </a:r>
+            <a:r>
+              <a:rPr lang="en-US" dirty="0" err="1"/>
+              <a:t>ILoggerFactory</a:t>
+            </a:r>
+            <a:r>
+              <a:rPr lang="en-US" dirty="0"/>
+              <a:t> </a:t>
+            </a:r>
+            <a:r>
+              <a:rPr lang="en-US" dirty="0" err="1"/>
+              <a:t>loggerFactory</a:t>
+            </a:r>
+            <a:r>
+              <a:rPr lang="en-US" dirty="0"/>
+              <a:t>)</a:t>
+            </a:r>
+          </a:p>
+          <a:p>
+            <a:r>
+              <a:rPr lang="en-US" dirty="0"/>
+              <a:t>    {</a:t>
+            </a:r>
+          </a:p>
+          <a:p>
+            <a:r>
+              <a:rPr lang="en-US" dirty="0"/>
+              <a:t>        _logger = </a:t>
+            </a:r>
+            <a:r>
+              <a:rPr lang="en-US" dirty="0" err="1"/>
+              <a:t>loggerFactory.CreateLogger</a:t>
+            </a:r>
+            <a:r>
+              <a:rPr lang="en-US" dirty="0"/>
+              <a:t>("</a:t>
+            </a:r>
+            <a:r>
+              <a:rPr lang="en-US" dirty="0" err="1"/>
+              <a:t>EFCustomInterceptor</a:t>
+            </a:r>
+            <a:r>
+              <a:rPr lang="en-US" dirty="0"/>
+              <a:t>");</a:t>
+            </a:r>
+          </a:p>
+          <a:p>
+            <a:r>
+              <a:rPr lang="en-US" dirty="0"/>
+              <a:t>    }</a:t>
+            </a:r>
+          </a:p>
+          <a:p>
+            <a:endParaRPr lang="en-US" dirty="0"/>
+          </a:p>
+          <a:p>
+            <a:r>
+              <a:rPr lang="en-US" dirty="0"/>
+              <a:t>    public override </a:t>
+            </a:r>
+            <a:r>
+              <a:rPr lang="en-US" b="1" dirty="0" err="1"/>
+              <a:t>InterceptionResult</a:t>
+            </a:r>
+            <a:r>
+              <a:rPr lang="en-US" dirty="0"/>
+              <a:t>&lt;</a:t>
+            </a:r>
+            <a:r>
+              <a:rPr lang="en-US" dirty="0" err="1"/>
+              <a:t>DbCommand</a:t>
+            </a:r>
+            <a:r>
+              <a:rPr lang="en-US" dirty="0"/>
+              <a:t>&gt; </a:t>
+            </a:r>
+            <a:r>
+              <a:rPr lang="en-US" b="1" dirty="0" err="1"/>
+              <a:t>CommandCreating</a:t>
+            </a:r>
+            <a:r>
+              <a:rPr lang="en-US" dirty="0"/>
+              <a:t>(</a:t>
+            </a:r>
+          </a:p>
+          <a:p>
+            <a:r>
+              <a:rPr lang="en-US" dirty="0"/>
+              <a:t>        </a:t>
+            </a:r>
+            <a:r>
+              <a:rPr lang="en-US" dirty="0" err="1"/>
+              <a:t>CommandCorrelatedEventData</a:t>
+            </a:r>
+            <a:r>
+              <a:rPr lang="en-US" dirty="0"/>
+              <a:t> </a:t>
+            </a:r>
+            <a:r>
+              <a:rPr lang="en-US" dirty="0" err="1"/>
+              <a:t>eventData</a:t>
+            </a:r>
+            <a:r>
+              <a:rPr lang="en-US" dirty="0"/>
+              <a:t>,</a:t>
+            </a:r>
+          </a:p>
+          <a:p>
+            <a:r>
+              <a:rPr lang="en-US" dirty="0"/>
+              <a:t>        </a:t>
+            </a:r>
+            <a:r>
+              <a:rPr lang="en-US" dirty="0" err="1"/>
+              <a:t>InterceptionResult</a:t>
+            </a:r>
+            <a:r>
+              <a:rPr lang="en-US" dirty="0"/>
+              <a:t>&lt;</a:t>
+            </a:r>
+            <a:r>
+              <a:rPr lang="en-US" dirty="0" err="1"/>
+              <a:t>DbCommand</a:t>
+            </a:r>
+            <a:r>
+              <a:rPr lang="en-US" dirty="0"/>
+              <a:t>&gt; result)</a:t>
+            </a:r>
+          </a:p>
+          <a:p>
+            <a:r>
+              <a:rPr lang="en-US" dirty="0"/>
+              <a:t>    {</a:t>
+            </a:r>
+          </a:p>
+          <a:p>
+            <a:r>
+              <a:rPr lang="en-US" dirty="0"/>
+              <a:t>        _</a:t>
+            </a:r>
+            <a:r>
+              <a:rPr lang="en-US" dirty="0" err="1"/>
+              <a:t>logger.LogInformation</a:t>
+            </a:r>
+            <a:r>
+              <a:rPr lang="en-US" dirty="0"/>
+              <a:t>("Creating command for context {Context}", eventData.Context?.</a:t>
+            </a:r>
+            <a:r>
+              <a:rPr lang="en-US" dirty="0" err="1"/>
+              <a:t>GetType</a:t>
+            </a:r>
+            <a:r>
+              <a:rPr lang="en-US" dirty="0"/>
+              <a:t>().Name);</a:t>
+            </a:r>
+          </a:p>
+          <a:p>
+            <a:r>
+              <a:rPr lang="en-US" dirty="0"/>
+              <a:t>        return </a:t>
+            </a:r>
+            <a:r>
+              <a:rPr lang="en-US" dirty="0" err="1"/>
+              <a:t>base.CommandCreating</a:t>
+            </a:r>
+            <a:r>
+              <a:rPr lang="en-US" dirty="0"/>
+              <a:t>(</a:t>
+            </a:r>
+            <a:r>
+              <a:rPr lang="en-US" dirty="0" err="1"/>
+              <a:t>eventData</a:t>
+            </a:r>
+            <a:r>
+              <a:rPr lang="en-US" dirty="0"/>
+              <a:t>, result);</a:t>
+            </a:r>
+          </a:p>
+          <a:p>
+            <a:r>
+              <a:rPr lang="en-US" dirty="0"/>
+              <a:t>    }</a:t>
+            </a:r>
+          </a:p>
+          <a:p>
+            <a:endParaRPr lang="en-US" dirty="0"/>
+          </a:p>
+          <a:p>
+            <a:r>
+              <a:rPr lang="en-US" dirty="0"/>
+              <a:t>    public override </a:t>
+            </a:r>
+            <a:r>
+              <a:rPr lang="en-US" b="1" dirty="0" err="1"/>
+              <a:t>InterceptionResult</a:t>
+            </a:r>
+            <a:r>
+              <a:rPr lang="en-US" dirty="0"/>
+              <a:t>&lt;int&gt; </a:t>
+            </a:r>
+            <a:r>
+              <a:rPr lang="en-US" b="1" dirty="0" err="1"/>
+              <a:t>NonQueryExecuting</a:t>
+            </a:r>
+            <a:r>
+              <a:rPr lang="en-US" dirty="0"/>
+              <a:t>(</a:t>
+            </a:r>
+          </a:p>
+          <a:p>
+            <a:r>
+              <a:rPr lang="en-US" dirty="0"/>
+              <a:t>        </a:t>
+            </a:r>
+            <a:r>
+              <a:rPr lang="en-US" dirty="0" err="1"/>
+              <a:t>DbCommand</a:t>
+            </a:r>
+            <a:r>
+              <a:rPr lang="en-US" dirty="0"/>
+              <a:t> command,</a:t>
+            </a:r>
+          </a:p>
+          <a:p>
+            <a:r>
+              <a:rPr lang="en-US" dirty="0"/>
+              <a:t>        </a:t>
+            </a:r>
+            <a:r>
+              <a:rPr lang="en-US" dirty="0" err="1"/>
+              <a:t>CommandEventData</a:t>
+            </a:r>
+            <a:r>
+              <a:rPr lang="en-US" dirty="0"/>
+              <a:t> </a:t>
+            </a:r>
+            <a:r>
+              <a:rPr lang="en-US" dirty="0" err="1"/>
+              <a:t>eventData</a:t>
+            </a:r>
+            <a:r>
+              <a:rPr lang="en-US" dirty="0"/>
+              <a:t>,</a:t>
+            </a:r>
+          </a:p>
+          <a:p>
+            <a:r>
+              <a:rPr lang="en-US" dirty="0"/>
+              <a:t>        </a:t>
+            </a:r>
+            <a:r>
+              <a:rPr lang="en-US" dirty="0" err="1"/>
+              <a:t>InterceptionResult</a:t>
+            </a:r>
+            <a:r>
+              <a:rPr lang="en-US" dirty="0"/>
+              <a:t>&lt;int&gt; result)</a:t>
+            </a:r>
+          </a:p>
+          <a:p>
+            <a:r>
+              <a:rPr lang="en-US" dirty="0"/>
+              <a:t>    {</a:t>
+            </a:r>
+          </a:p>
+          <a:p>
+            <a:r>
+              <a:rPr lang="en-US" dirty="0"/>
+              <a:t>        _</a:t>
+            </a:r>
+            <a:r>
+              <a:rPr lang="en-US" b="1" dirty="0" err="1"/>
+              <a:t>logger.LogInformation</a:t>
+            </a:r>
+            <a:r>
+              <a:rPr lang="en-US" b="1" dirty="0"/>
+              <a:t>("Executing </a:t>
+            </a:r>
+            <a:r>
+              <a:rPr lang="en-US" b="1" dirty="0" err="1"/>
+              <a:t>NonQuery</a:t>
+            </a:r>
+            <a:r>
+              <a:rPr lang="en-US" b="1" dirty="0"/>
+              <a:t>: {</a:t>
+            </a:r>
+            <a:r>
+              <a:rPr lang="en-US" b="1" dirty="0" err="1"/>
+              <a:t>CommandText</a:t>
+            </a:r>
+            <a:r>
+              <a:rPr lang="en-US" b="1" dirty="0"/>
+              <a:t>}", </a:t>
+            </a:r>
+            <a:r>
+              <a:rPr lang="en-US" b="1" dirty="0" err="1"/>
+              <a:t>command.CommandText</a:t>
+            </a:r>
+            <a:r>
+              <a:rPr lang="en-US" b="1" dirty="0"/>
+              <a:t>);</a:t>
+            </a:r>
+          </a:p>
+          <a:p>
+            <a:r>
+              <a:rPr lang="en-US" b="1" dirty="0"/>
+              <a:t>        return </a:t>
+            </a:r>
+            <a:r>
+              <a:rPr lang="en-US" b="1" dirty="0" err="1"/>
+              <a:t>base.NonQueryExecuting</a:t>
+            </a:r>
+            <a:r>
+              <a:rPr lang="en-US" b="1" dirty="0"/>
+              <a:t>(command, </a:t>
+            </a:r>
+            <a:r>
+              <a:rPr lang="en-US" b="1" dirty="0" err="1"/>
+              <a:t>eventData</a:t>
+            </a:r>
+            <a:r>
+              <a:rPr lang="en-US" b="1" dirty="0"/>
+              <a:t>, result);</a:t>
+            </a:r>
+          </a:p>
+          <a:p>
+            <a:r>
+              <a:rPr lang="en-US" dirty="0"/>
+              <a:t>    }</a:t>
+            </a:r>
+          </a:p>
+        </p:txBody>
+      </p:sp>
+    </p:spTree>
+    <p:extLst>
+      <p:ext uri="{BB962C8B-B14F-4D97-AF65-F5344CB8AC3E}">
+        <p14:creationId xmlns:p14="http://schemas.microsoft.com/office/powerpoint/2010/main" val="1880199221"/>
+      </p:ext>
+    </p:extLst>
+  </p:cSld>
+  <p:clrMapOvr>
+    <a:masterClrMapping/>
+  </p:clrMapOvr>
+</p:sld>
+</file>
+
+<file path=ppt/slides/slide13.xml><?xml version="1.0" encoding="utf-8"?>
+<p:sld xmlns:a="http://schemas.openxmlformats.org/drawingml/2006/main" xmlns:r="http://schemas.openxmlformats.org/officeDocument/2006/relationships" xmlns:p="http://schemas.openxmlformats.org/presentationml/2006/main">
+  <p:cSld>
+    <p:spTree>
+      <p:nvGrpSpPr>
+        <p:cNvPr id="1" name=""/>
+        <p:cNvGrpSpPr/>
+        <p:nvPr/>
+      </p:nvGrpSpPr>
+      <p:grpSpPr>
+        <a:xfrm>
+          <a:off x="0" y="0"/>
+          <a:ext cx="0" cy="0"/>
+          <a:chOff x="0" y="0"/>
+          <a:chExt cx="0" cy="0"/>
+        </a:xfrm>
+      </p:grpSpPr>
+      <p:sp>
+        <p:nvSpPr>
+          <p:cNvPr id="2" name="Title 1">
+            <a:extLst>
+              <a:ext uri="{FF2B5EF4-FFF2-40B4-BE49-F238E27FC236}">
                 <a16:creationId xmlns:a16="http://schemas.microsoft.com/office/drawing/2014/main" id="{AA00D572-C3D2-3C0B-50C7-71ACC52B8F65}"/>
               </a:ext>
             </a:extLst>
@@ -4494,7 +4646,7 @@
 </p:sld>
 </file>
 
-<file path=ppt/slides/slide13.xml><?xml version="1.0" encoding="utf-8"?>
+<file path=ppt/slides/slide14.xml><?xml version="1.0" encoding="utf-8"?>
 <p:sld xmlns:a="http://schemas.openxmlformats.org/drawingml/2006/main" xmlns:r="http://schemas.openxmlformats.org/officeDocument/2006/relationships" xmlns:p="http://schemas.openxmlformats.org/presentationml/2006/main">
   <p:cSld>
     <p:spTree>
@@ -4558,7 +4710,7 @@
 </p:sld>
 </file>
 
-<file path=ppt/slides/slide14.xml><?xml version="1.0" encoding="utf-8"?>
+<file path=ppt/slides/slide15.xml><?xml version="1.0" encoding="utf-8"?>
 <p:sld xmlns:a="http://schemas.openxmlformats.org/drawingml/2006/main" xmlns:r="http://schemas.openxmlformats.org/officeDocument/2006/relationships" xmlns:p="http://schemas.openxmlformats.org/presentationml/2006/main">
   <p:cSld>
     <p:spTree>
@@ -4683,144 +4835,6 @@
     <p:extLst>
       <p:ext uri="{BB962C8B-B14F-4D97-AF65-F5344CB8AC3E}">
         <p14:creationId xmlns:p14="http://schemas.microsoft.com/office/powerpoint/2010/main" val="3200313748"/>
-      </p:ext>
-    </p:extLst>
-  </p:cSld>
-  <p:clrMapOvr>
-    <a:masterClrMapping/>
-  </p:clrMapOvr>
-</p:sld>
-</file>
-
-<file path=ppt/slides/slide15.xml><?xml version="1.0" encoding="utf-8"?>
-<p:sld xmlns:a="http://schemas.openxmlformats.org/drawingml/2006/main" xmlns:r="http://schemas.openxmlformats.org/officeDocument/2006/relationships" xmlns:p="http://schemas.openxmlformats.org/presentationml/2006/main">
-  <p:cSld>
-    <p:spTree>
-      <p:nvGrpSpPr>
-        <p:cNvPr id="1" name=""/>
-        <p:cNvGrpSpPr/>
-        <p:nvPr/>
-      </p:nvGrpSpPr>
-      <p:grpSpPr>
-        <a:xfrm>
-          <a:off x="0" y="0"/>
-          <a:ext cx="0" cy="0"/>
-          <a:chOff x="0" y="0"/>
-          <a:chExt cx="0" cy="0"/>
-        </a:xfrm>
-      </p:grpSpPr>
-      <p:sp>
-        <p:nvSpPr>
-          <p:cNvPr id="2" name="Title 1">
-            <a:extLst>
-              <a:ext uri="{FF2B5EF4-FFF2-40B4-BE49-F238E27FC236}">
-                <a16:creationId xmlns:a16="http://schemas.microsoft.com/office/drawing/2014/main" id="{E5B2AC7B-3501-BA21-FEE6-52FA7461E1CB}"/>
-              </a:ext>
-            </a:extLst>
-          </p:cNvPr>
-          <p:cNvSpPr>
-            <a:spLocks noGrp="1"/>
-          </p:cNvSpPr>
-          <p:nvPr>
-            <p:ph type="title"/>
-          </p:nvPr>
-        </p:nvSpPr>
-        <p:spPr/>
-        <p:txBody>
-          <a:bodyPr/>
-          <a:lstStyle/>
-          <a:p>
-            <a:r>
-              <a:rPr lang="en-US" dirty="0"/>
-              <a:t>Original Code</a:t>
-            </a:r>
-          </a:p>
-        </p:txBody>
-      </p:sp>
-      <p:sp>
-        <p:nvSpPr>
-          <p:cNvPr id="3" name="Content Placeholder 2">
-            <a:extLst>
-              <a:ext uri="{FF2B5EF4-FFF2-40B4-BE49-F238E27FC236}">
-                <a16:creationId xmlns:a16="http://schemas.microsoft.com/office/drawing/2014/main" id="{8CC555FB-DFE3-D9B1-AD1A-23E5D7837CC0}"/>
-              </a:ext>
-            </a:extLst>
-          </p:cNvPr>
-          <p:cNvSpPr>
-            <a:spLocks noGrp="1"/>
-          </p:cNvSpPr>
-          <p:nvPr>
-            <p:ph idx="1"/>
-          </p:nvPr>
-        </p:nvSpPr>
-        <p:spPr/>
-        <p:txBody>
-          <a:bodyPr>
-            <a:normAutofit lnSpcReduction="10000"/>
-          </a:bodyPr>
-          <a:lstStyle/>
-          <a:p>
-            <a:r>
-              <a:rPr lang="en-US" dirty="0"/>
-              <a:t>Disabled with “</a:t>
-            </a:r>
-            <a:r>
-              <a:rPr lang="en-US" dirty="0" err="1"/>
-              <a:t>IgnoreQueryFilters</a:t>
-            </a:r>
-            <a:r>
-              <a:rPr lang="en-US" dirty="0"/>
-              <a:t>”</a:t>
-            </a:r>
-          </a:p>
-          <a:p>
-            <a:endParaRPr lang="en-US" dirty="0"/>
-          </a:p>
-          <a:p>
-            <a:r>
-              <a:rPr lang="en-US" dirty="0"/>
-              <a:t>var stamps = await _</a:t>
-            </a:r>
-            <a:r>
-              <a:rPr lang="en-US" dirty="0" err="1"/>
-              <a:t>db.Categories.IgnoreQueryFilters</a:t>
-            </a:r>
-            <a:r>
-              <a:rPr lang="en-US" dirty="0"/>
-              <a:t>().</a:t>
-            </a:r>
-            <a:r>
-              <a:rPr lang="en-US" dirty="0" err="1"/>
-              <a:t>FirstOrDefaultAsync</a:t>
-            </a:r>
-            <a:r>
-              <a:rPr lang="en-US" dirty="0"/>
-              <a:t>(c =&gt; </a:t>
-            </a:r>
-            <a:r>
-              <a:rPr lang="en-US" dirty="0" err="1"/>
-              <a:t>c.CategoryName</a:t>
-            </a:r>
-            <a:r>
-              <a:rPr lang="en-US" dirty="0"/>
-              <a:t> == "Stamps");</a:t>
-            </a:r>
-          </a:p>
-          <a:p>
-            <a:endParaRPr lang="en-US" dirty="0"/>
-          </a:p>
-          <a:p>
-            <a:r>
-              <a:rPr lang="en-US" dirty="0"/>
-              <a:t>-All or Nothing command (tenancy disabled, soft-delete disabled)</a:t>
-            </a:r>
-          </a:p>
-        </p:txBody>
-      </p:sp>
-    </p:spTree>
-    <p:extLst>
-      <p:ext uri="{BB962C8B-B14F-4D97-AF65-F5344CB8AC3E}">
-        <p14:creationId xmlns:p14="http://schemas.microsoft.com/office/powerpoint/2010/main" val="2920228141"/>
       </p:ext>
     </p:extLst>
   </p:cSld>
@@ -4852,6 +4866,144 @@
           <p:cNvPr id="2" name="Title 1">
             <a:extLst>
               <a:ext uri="{FF2B5EF4-FFF2-40B4-BE49-F238E27FC236}">
+                <a16:creationId xmlns:a16="http://schemas.microsoft.com/office/drawing/2014/main" id="{E5B2AC7B-3501-BA21-FEE6-52FA7461E1CB}"/>
+              </a:ext>
+            </a:extLst>
+          </p:cNvPr>
+          <p:cNvSpPr>
+            <a:spLocks noGrp="1"/>
+          </p:cNvSpPr>
+          <p:nvPr>
+            <p:ph type="title"/>
+          </p:nvPr>
+        </p:nvSpPr>
+        <p:spPr/>
+        <p:txBody>
+          <a:bodyPr/>
+          <a:lstStyle/>
+          <a:p>
+            <a:r>
+              <a:rPr lang="en-US" dirty="0"/>
+              <a:t>Original Code</a:t>
+            </a:r>
+          </a:p>
+        </p:txBody>
+      </p:sp>
+      <p:sp>
+        <p:nvSpPr>
+          <p:cNvPr id="3" name="Content Placeholder 2">
+            <a:extLst>
+              <a:ext uri="{FF2B5EF4-FFF2-40B4-BE49-F238E27FC236}">
+                <a16:creationId xmlns:a16="http://schemas.microsoft.com/office/drawing/2014/main" id="{8CC555FB-DFE3-D9B1-AD1A-23E5D7837CC0}"/>
+              </a:ext>
+            </a:extLst>
+          </p:cNvPr>
+          <p:cNvSpPr>
+            <a:spLocks noGrp="1"/>
+          </p:cNvSpPr>
+          <p:nvPr>
+            <p:ph idx="1"/>
+          </p:nvPr>
+        </p:nvSpPr>
+        <p:spPr/>
+        <p:txBody>
+          <a:bodyPr>
+            <a:normAutofit lnSpcReduction="10000"/>
+          </a:bodyPr>
+          <a:lstStyle/>
+          <a:p>
+            <a:r>
+              <a:rPr lang="en-US" dirty="0"/>
+              <a:t>Disabled with “</a:t>
+            </a:r>
+            <a:r>
+              <a:rPr lang="en-US" dirty="0" err="1"/>
+              <a:t>IgnoreQueryFilters</a:t>
+            </a:r>
+            <a:r>
+              <a:rPr lang="en-US" dirty="0"/>
+              <a:t>”</a:t>
+            </a:r>
+          </a:p>
+          <a:p>
+            <a:endParaRPr lang="en-US" dirty="0"/>
+          </a:p>
+          <a:p>
+            <a:r>
+              <a:rPr lang="en-US" dirty="0"/>
+              <a:t>var stamps = await _</a:t>
+            </a:r>
+            <a:r>
+              <a:rPr lang="en-US" dirty="0" err="1"/>
+              <a:t>db.Categories.IgnoreQueryFilters</a:t>
+            </a:r>
+            <a:r>
+              <a:rPr lang="en-US" dirty="0"/>
+              <a:t>().</a:t>
+            </a:r>
+            <a:r>
+              <a:rPr lang="en-US" dirty="0" err="1"/>
+              <a:t>FirstOrDefaultAsync</a:t>
+            </a:r>
+            <a:r>
+              <a:rPr lang="en-US" dirty="0"/>
+              <a:t>(c =&gt; </a:t>
+            </a:r>
+            <a:r>
+              <a:rPr lang="en-US" dirty="0" err="1"/>
+              <a:t>c.CategoryName</a:t>
+            </a:r>
+            <a:r>
+              <a:rPr lang="en-US" dirty="0"/>
+              <a:t> == "Stamps");</a:t>
+            </a:r>
+          </a:p>
+          <a:p>
+            <a:endParaRPr lang="en-US" dirty="0"/>
+          </a:p>
+          <a:p>
+            <a:r>
+              <a:rPr lang="en-US" dirty="0"/>
+              <a:t>-All or Nothing command (tenancy disabled, soft-delete disabled)</a:t>
+            </a:r>
+          </a:p>
+        </p:txBody>
+      </p:sp>
+    </p:spTree>
+    <p:extLst>
+      <p:ext uri="{BB962C8B-B14F-4D97-AF65-F5344CB8AC3E}">
+        <p14:creationId xmlns:p14="http://schemas.microsoft.com/office/powerpoint/2010/main" val="2920228141"/>
+      </p:ext>
+    </p:extLst>
+  </p:cSld>
+  <p:clrMapOvr>
+    <a:masterClrMapping/>
+  </p:clrMapOvr>
+</p:sld>
+</file>
+
+<file path=ppt/slides/slide17.xml><?xml version="1.0" encoding="utf-8"?>
+<p:sld xmlns:a="http://schemas.openxmlformats.org/drawingml/2006/main" xmlns:r="http://schemas.openxmlformats.org/officeDocument/2006/relationships" xmlns:p="http://schemas.openxmlformats.org/presentationml/2006/main">
+  <p:cSld>
+    <p:spTree>
+      <p:nvGrpSpPr>
+        <p:cNvPr id="1" name=""/>
+        <p:cNvGrpSpPr/>
+        <p:nvPr/>
+      </p:nvGrpSpPr>
+      <p:grpSpPr>
+        <a:xfrm>
+          <a:off x="0" y="0"/>
+          <a:ext cx="0" cy="0"/>
+          <a:chOff x="0" y="0"/>
+          <a:chExt cx="0" cy="0"/>
+        </a:xfrm>
+      </p:grpSpPr>
+      <p:sp>
+        <p:nvSpPr>
+          <p:cNvPr id="2" name="Title 1">
+            <a:extLst>
+              <a:ext uri="{FF2B5EF4-FFF2-40B4-BE49-F238E27FC236}">
                 <a16:creationId xmlns:a16="http://schemas.microsoft.com/office/drawing/2014/main" id="{65FC3462-AC86-F981-6E03-8E4CB2F40503}"/>
               </a:ext>
             </a:extLst>
@@ -5076,7 +5228,7 @@
 </p:sld>
 </file>
 
-<file path=ppt/slides/slide17.xml><?xml version="1.0" encoding="utf-8"?>
+<file path=ppt/slides/slide18.xml><?xml version="1.0" encoding="utf-8"?>
 <p:sld xmlns:a="http://schemas.openxmlformats.org/drawingml/2006/main" xmlns:r="http://schemas.openxmlformats.org/officeDocument/2006/relationships" xmlns:p="http://schemas.openxmlformats.org/presentationml/2006/main">
   <p:cSld>
     <p:spTree>
@@ -5178,7 +5330,7 @@
 </p:sld>
 </file>
 
-<file path=ppt/slides/slide18.xml><?xml version="1.0" encoding="utf-8"?>
+<file path=ppt/slides/slide19.xml><?xml version="1.0" encoding="utf-8"?>
 <p:sld xmlns:a="http://schemas.openxmlformats.org/drawingml/2006/main" xmlns:r="http://schemas.openxmlformats.org/officeDocument/2006/relationships" xmlns:p="http://schemas.openxmlformats.org/presentationml/2006/main">
   <p:cSld>
     <p:spTree>
@@ -5239,142 +5391,6 @@
     <p:extLst>
       <p:ext uri="{BB962C8B-B14F-4D97-AF65-F5344CB8AC3E}">
         <p14:creationId xmlns:p14="http://schemas.microsoft.com/office/powerpoint/2010/main" val="1150547347"/>
-      </p:ext>
-    </p:extLst>
-  </p:cSld>
-  <p:clrMapOvr>
-    <a:masterClrMapping/>
-  </p:clrMapOvr>
-</p:sld>
-</file>
-
-<file path=ppt/slides/slide19.xml><?xml version="1.0" encoding="utf-8"?>
-<p:sld xmlns:a="http://schemas.openxmlformats.org/drawingml/2006/main" xmlns:r="http://schemas.openxmlformats.org/officeDocument/2006/relationships" xmlns:p="http://schemas.openxmlformats.org/presentationml/2006/main">
-  <p:cSld>
-    <p:spTree>
-      <p:nvGrpSpPr>
-        <p:cNvPr id="1" name="">
-          <a:extLst>
-            <a:ext uri="{FF2B5EF4-FFF2-40B4-BE49-F238E27FC236}">
-              <a16:creationId xmlns:a16="http://schemas.microsoft.com/office/drawing/2014/main" id="{ADD33A7F-48BD-6996-4E26-834F974E8A79}"/>
-            </a:ext>
-          </a:extLst>
-        </p:cNvPr>
-        <p:cNvGrpSpPr/>
-        <p:nvPr/>
-      </p:nvGrpSpPr>
-      <p:grpSpPr>
-        <a:xfrm>
-          <a:off x="0" y="0"/>
-          <a:ext cx="0" cy="0"/>
-          <a:chOff x="0" y="0"/>
-          <a:chExt cx="0" cy="0"/>
-        </a:xfrm>
-      </p:grpSpPr>
-      <p:sp>
-        <p:nvSpPr>
-          <p:cNvPr id="18" name="Title 17">
-            <a:extLst>
-              <a:ext uri="{FF2B5EF4-FFF2-40B4-BE49-F238E27FC236}">
-                <a16:creationId xmlns:a16="http://schemas.microsoft.com/office/drawing/2014/main" id="{E699E381-79B1-5541-90FC-D8E823D2042B}"/>
-              </a:ext>
-            </a:extLst>
-          </p:cNvPr>
-          <p:cNvSpPr>
-            <a:spLocks noGrp="1"/>
-          </p:cNvSpPr>
-          <p:nvPr>
-            <p:ph type="title"/>
-          </p:nvPr>
-        </p:nvSpPr>
-        <p:spPr/>
-        <p:txBody>
-          <a:bodyPr/>
-          <a:lstStyle/>
-          <a:p>
-            <a:r>
-              <a:rPr lang="en-US" dirty="0"/>
-              <a:t>Bulk Update/Delete</a:t>
-            </a:r>
-          </a:p>
-        </p:txBody>
-      </p:sp>
-      <p:sp>
-        <p:nvSpPr>
-          <p:cNvPr id="19" name="Content Placeholder 18">
-            <a:extLst>
-              <a:ext uri="{FF2B5EF4-FFF2-40B4-BE49-F238E27FC236}">
-                <a16:creationId xmlns:a16="http://schemas.microsoft.com/office/drawing/2014/main" id="{D68AE5CE-1D38-1CE1-8D88-BC79A45577B3}"/>
-              </a:ext>
-            </a:extLst>
-          </p:cNvPr>
-          <p:cNvSpPr>
-            <a:spLocks noGrp="1"/>
-          </p:cNvSpPr>
-          <p:nvPr>
-            <p:ph idx="1"/>
-          </p:nvPr>
-        </p:nvSpPr>
-        <p:spPr/>
-        <p:txBody>
-          <a:bodyPr/>
-          <a:lstStyle/>
-          <a:p>
-            <a:r>
-              <a:rPr lang="en-US" dirty="0"/>
-              <a:t>Problems:</a:t>
-            </a:r>
-          </a:p>
-          <a:p>
-            <a:pPr marL="571500" indent="-571500">
-              <a:buFontTx/>
-              <a:buChar char="-"/>
-            </a:pPr>
-            <a:r>
-              <a:rPr lang="en-US" dirty="0"/>
-              <a:t>Need to update every item to set each on sale</a:t>
-            </a:r>
-          </a:p>
-          <a:p>
-            <a:pPr marL="571500" indent="-571500">
-              <a:buFontTx/>
-              <a:buChar char="-"/>
-            </a:pPr>
-            <a:r>
-              <a:rPr lang="en-US" dirty="0"/>
-              <a:t>Need to delete all unpaid/expired subscriptions</a:t>
-            </a:r>
-          </a:p>
-          <a:p>
-            <a:r>
-              <a:rPr lang="en-US" dirty="0"/>
-              <a:t>Solution:</a:t>
-            </a:r>
-          </a:p>
-          <a:p>
-            <a:r>
-              <a:rPr lang="en-US" dirty="0"/>
-              <a:t>- Stored procedure (previous solution)</a:t>
-            </a:r>
-          </a:p>
-          <a:p>
-            <a:r>
-              <a:rPr lang="en-US" dirty="0"/>
-              <a:t>- Bulk Update (with or without filter)</a:t>
-            </a:r>
-          </a:p>
-          <a:p>
-            <a:r>
-              <a:rPr lang="en-US" dirty="0"/>
-              <a:t>- Bulk Delete (with or without filter)</a:t>
-            </a:r>
-          </a:p>
-        </p:txBody>
-      </p:sp>
-    </p:spTree>
-    <p:extLst>
-      <p:ext uri="{BB962C8B-B14F-4D97-AF65-F5344CB8AC3E}">
-        <p14:creationId xmlns:p14="http://schemas.microsoft.com/office/powerpoint/2010/main" val="2722877002"/>
       </p:ext>
     </p:extLst>
   </p:cSld>
@@ -5564,7 +5580,13 @@
   <p:cSld>
     <p:spTree>
       <p:nvGrpSpPr>
-        <p:cNvPr id="1" name=""/>
+        <p:cNvPr id="1" name="">
+          <a:extLst>
+            <a:ext uri="{FF2B5EF4-FFF2-40B4-BE49-F238E27FC236}">
+              <a16:creationId xmlns:a16="http://schemas.microsoft.com/office/drawing/2014/main" id="{ADD33A7F-48BD-6996-4E26-834F974E8A79}"/>
+            </a:ext>
+          </a:extLst>
+        </p:cNvPr>
         <p:cNvGrpSpPr/>
         <p:nvPr/>
       </p:nvGrpSpPr>
@@ -5578,10 +5600,10 @@
       </p:grpSpPr>
       <p:sp>
         <p:nvSpPr>
-          <p:cNvPr id="2" name="Title 1">
+          <p:cNvPr id="18" name="Title 17">
             <a:extLst>
               <a:ext uri="{FF2B5EF4-FFF2-40B4-BE49-F238E27FC236}">
-                <a16:creationId xmlns:a16="http://schemas.microsoft.com/office/drawing/2014/main" id="{22FC3665-270C-F8D9-0161-B34DF66F955B}"/>
+                <a16:creationId xmlns:a16="http://schemas.microsoft.com/office/drawing/2014/main" id="{E699E381-79B1-5541-90FC-D8E823D2042B}"/>
               </a:ext>
             </a:extLst>
           </p:cNvPr>
@@ -5599,17 +5621,17 @@
           <a:p>
             <a:r>
               <a:rPr lang="en-US" dirty="0"/>
-              <a:t>Original Bulk Update (no SPROC)</a:t>
-            </a:r>
-          </a:p>
-        </p:txBody>
-      </p:sp>
-      <p:sp>
-        <p:nvSpPr>
-          <p:cNvPr id="3" name="Content Placeholder 2">
+              <a:t>Bulk Update/Delete</a:t>
+            </a:r>
+          </a:p>
+        </p:txBody>
+      </p:sp>
+      <p:sp>
+        <p:nvSpPr>
+          <p:cNvPr id="19" name="Content Placeholder 18">
             <a:extLst>
               <a:ext uri="{FF2B5EF4-FFF2-40B4-BE49-F238E27FC236}">
-                <a16:creationId xmlns:a16="http://schemas.microsoft.com/office/drawing/2014/main" id="{C2A283AA-DD78-87BF-77FA-C4E37EF47173}"/>
+                <a16:creationId xmlns:a16="http://schemas.microsoft.com/office/drawing/2014/main" id="{D68AE5CE-1D38-1CE1-8D88-BC79A45577B3}"/>
               </a:ext>
             </a:extLst>
           </p:cNvPr>
@@ -5627,61 +5649,51 @@
           <a:p>
             <a:r>
               <a:rPr lang="en-US" dirty="0"/>
-              <a:t>var items = await _</a:t>
-            </a:r>
-            <a:r>
-              <a:rPr lang="en-US" dirty="0" err="1"/>
-              <a:t>db.Items.ToListAsync</a:t>
-            </a:r>
-            <a:r>
-              <a:rPr lang="en-US" dirty="0"/>
-              <a:t>();</a:t>
-            </a:r>
-          </a:p>
-          <a:p>
-            <a:r>
-              <a:rPr lang="en-US" dirty="0"/>
-              <a:t>foreach (var item in items)</a:t>
-            </a:r>
-          </a:p>
-          <a:p>
-            <a:r>
-              <a:rPr lang="en-US" dirty="0"/>
-              <a:t>{</a:t>
-            </a:r>
-          </a:p>
-          <a:p>
-            <a:r>
-              <a:rPr lang="en-US" dirty="0"/>
-              <a:t>    </a:t>
-            </a:r>
-            <a:r>
-              <a:rPr lang="en-US" dirty="0" err="1"/>
-              <a:t>item.IsOnSale</a:t>
-            </a:r>
-            <a:r>
-              <a:rPr lang="en-US" dirty="0"/>
-              <a:t> = true;</a:t>
-            </a:r>
-          </a:p>
-          <a:p>
-            <a:r>
-              <a:rPr lang="en-US" dirty="0"/>
-              <a:t>}</a:t>
-            </a:r>
-          </a:p>
-          <a:p>
-            <a:r>
-              <a:rPr lang="en-US" dirty="0"/>
-              <a:t>await _</a:t>
-            </a:r>
-            <a:r>
-              <a:rPr lang="en-US" dirty="0" err="1"/>
-              <a:t>db.SaveChangesAsync</a:t>
-            </a:r>
-            <a:r>
-              <a:rPr lang="en-US" dirty="0"/>
-              <a:t>();</a:t>
+              <a:t>Problems:</a:t>
+            </a:r>
+          </a:p>
+          <a:p>
+            <a:pPr marL="571500" indent="-571500">
+              <a:buFontTx/>
+              <a:buChar char="-"/>
+            </a:pPr>
+            <a:r>
+              <a:rPr lang="en-US" dirty="0"/>
+              <a:t>Need to update every item to set each on sale</a:t>
+            </a:r>
+          </a:p>
+          <a:p>
+            <a:pPr marL="571500" indent="-571500">
+              <a:buFontTx/>
+              <a:buChar char="-"/>
+            </a:pPr>
+            <a:r>
+              <a:rPr lang="en-US" dirty="0"/>
+              <a:t>Need to delete all unpaid/expired subscriptions</a:t>
+            </a:r>
+          </a:p>
+          <a:p>
+            <a:r>
+              <a:rPr lang="en-US" dirty="0"/>
+              <a:t>Solution:</a:t>
+            </a:r>
+          </a:p>
+          <a:p>
+            <a:r>
+              <a:rPr lang="en-US" dirty="0"/>
+              <a:t>- Stored procedure (previous solution)</a:t>
+            </a:r>
+          </a:p>
+          <a:p>
+            <a:r>
+              <a:rPr lang="en-US" dirty="0"/>
+              <a:t>- Bulk Update (with or without filter)</a:t>
+            </a:r>
+          </a:p>
+          <a:p>
+            <a:r>
+              <a:rPr lang="en-US" dirty="0"/>
+              <a:t>- Bulk Delete (with or without filter)</a:t>
             </a:r>
           </a:p>
         </p:txBody>
@@ -5689,7 +5701,7 @@
     </p:spTree>
     <p:extLst>
       <p:ext uri="{BB962C8B-B14F-4D97-AF65-F5344CB8AC3E}">
-        <p14:creationId xmlns:p14="http://schemas.microsoft.com/office/powerpoint/2010/main" val="2614878323"/>
+        <p14:creationId xmlns:p14="http://schemas.microsoft.com/office/powerpoint/2010/main" val="2722877002"/>
       </p:ext>
     </p:extLst>
   </p:cSld>
@@ -5721,6 +5733,146 @@
           <p:cNvPr id="2" name="Title 1">
             <a:extLst>
               <a:ext uri="{FF2B5EF4-FFF2-40B4-BE49-F238E27FC236}">
+                <a16:creationId xmlns:a16="http://schemas.microsoft.com/office/drawing/2014/main" id="{22FC3665-270C-F8D9-0161-B34DF66F955B}"/>
+              </a:ext>
+            </a:extLst>
+          </p:cNvPr>
+          <p:cNvSpPr>
+            <a:spLocks noGrp="1"/>
+          </p:cNvSpPr>
+          <p:nvPr>
+            <p:ph type="title"/>
+          </p:nvPr>
+        </p:nvSpPr>
+        <p:spPr/>
+        <p:txBody>
+          <a:bodyPr/>
+          <a:lstStyle/>
+          <a:p>
+            <a:r>
+              <a:rPr lang="en-US" dirty="0"/>
+              <a:t>Original Bulk Update (no SPROC)</a:t>
+            </a:r>
+          </a:p>
+        </p:txBody>
+      </p:sp>
+      <p:sp>
+        <p:nvSpPr>
+          <p:cNvPr id="3" name="Content Placeholder 2">
+            <a:extLst>
+              <a:ext uri="{FF2B5EF4-FFF2-40B4-BE49-F238E27FC236}">
+                <a16:creationId xmlns:a16="http://schemas.microsoft.com/office/drawing/2014/main" id="{C2A283AA-DD78-87BF-77FA-C4E37EF47173}"/>
+              </a:ext>
+            </a:extLst>
+          </p:cNvPr>
+          <p:cNvSpPr>
+            <a:spLocks noGrp="1"/>
+          </p:cNvSpPr>
+          <p:nvPr>
+            <p:ph idx="1"/>
+          </p:nvPr>
+        </p:nvSpPr>
+        <p:spPr/>
+        <p:txBody>
+          <a:bodyPr/>
+          <a:lstStyle/>
+          <a:p>
+            <a:r>
+              <a:rPr lang="en-US" dirty="0"/>
+              <a:t>var items = await _</a:t>
+            </a:r>
+            <a:r>
+              <a:rPr lang="en-US" dirty="0" err="1"/>
+              <a:t>db.Items.ToListAsync</a:t>
+            </a:r>
+            <a:r>
+              <a:rPr lang="en-US" dirty="0"/>
+              <a:t>();</a:t>
+            </a:r>
+          </a:p>
+          <a:p>
+            <a:r>
+              <a:rPr lang="en-US" dirty="0"/>
+              <a:t>foreach (var item in items)</a:t>
+            </a:r>
+          </a:p>
+          <a:p>
+            <a:r>
+              <a:rPr lang="en-US" dirty="0"/>
+              <a:t>{</a:t>
+            </a:r>
+          </a:p>
+          <a:p>
+            <a:r>
+              <a:rPr lang="en-US" dirty="0"/>
+              <a:t>    </a:t>
+            </a:r>
+            <a:r>
+              <a:rPr lang="en-US" dirty="0" err="1"/>
+              <a:t>item.IsOnSale</a:t>
+            </a:r>
+            <a:r>
+              <a:rPr lang="en-US" dirty="0"/>
+              <a:t> = true;</a:t>
+            </a:r>
+          </a:p>
+          <a:p>
+            <a:r>
+              <a:rPr lang="en-US" dirty="0"/>
+              <a:t>}</a:t>
+            </a:r>
+          </a:p>
+          <a:p>
+            <a:r>
+              <a:rPr lang="en-US" dirty="0"/>
+              <a:t>await _</a:t>
+            </a:r>
+            <a:r>
+              <a:rPr lang="en-US" dirty="0" err="1"/>
+              <a:t>db.SaveChangesAsync</a:t>
+            </a:r>
+            <a:r>
+              <a:rPr lang="en-US" dirty="0"/>
+              <a:t>();</a:t>
+            </a:r>
+          </a:p>
+        </p:txBody>
+      </p:sp>
+    </p:spTree>
+    <p:extLst>
+      <p:ext uri="{BB962C8B-B14F-4D97-AF65-F5344CB8AC3E}">
+        <p14:creationId xmlns:p14="http://schemas.microsoft.com/office/powerpoint/2010/main" val="2614878323"/>
+      </p:ext>
+    </p:extLst>
+  </p:cSld>
+  <p:clrMapOvr>
+    <a:masterClrMapping/>
+  </p:clrMapOvr>
+</p:sld>
+</file>
+
+<file path=ppt/slides/slide22.xml><?xml version="1.0" encoding="utf-8"?>
+<p:sld xmlns:a="http://schemas.openxmlformats.org/drawingml/2006/main" xmlns:r="http://schemas.openxmlformats.org/officeDocument/2006/relationships" xmlns:p="http://schemas.openxmlformats.org/presentationml/2006/main">
+  <p:cSld>
+    <p:spTree>
+      <p:nvGrpSpPr>
+        <p:cNvPr id="1" name=""/>
+        <p:cNvGrpSpPr/>
+        <p:nvPr/>
+      </p:nvGrpSpPr>
+      <p:grpSpPr>
+        <a:xfrm>
+          <a:off x="0" y="0"/>
+          <a:ext cx="0" cy="0"/>
+          <a:chOff x="0" y="0"/>
+          <a:chExt cx="0" cy="0"/>
+        </a:xfrm>
+      </p:grpSpPr>
+      <p:sp>
+        <p:nvSpPr>
+          <p:cNvPr id="2" name="Title 1">
+            <a:extLst>
+              <a:ext uri="{FF2B5EF4-FFF2-40B4-BE49-F238E27FC236}">
                 <a16:creationId xmlns:a16="http://schemas.microsoft.com/office/drawing/2014/main" id="{FF5EFC3B-43FA-5393-EE22-05762C178241}"/>
               </a:ext>
             </a:extLst>
@@ -5938,7 +6090,7 @@
 </p:sld>
 </file>
 
-<file path=ppt/slides/slide22.xml><?xml version="1.0" encoding="utf-8"?>
+<file path=ppt/slides/slide23.xml><?xml version="1.0" encoding="utf-8"?>
 <p:sld xmlns:a="http://schemas.openxmlformats.org/drawingml/2006/main" xmlns:r="http://schemas.openxmlformats.org/officeDocument/2006/relationships" xmlns:p="http://schemas.openxmlformats.org/presentationml/2006/main">
   <p:cSld>
     <p:spTree>
@@ -6040,7 +6192,7 @@
 </p:sld>
 </file>
 
-<file path=ppt/slides/slide23.xml><?xml version="1.0" encoding="utf-8"?>
+<file path=ppt/slides/slide24.xml><?xml version="1.0" encoding="utf-8"?>
 <p:sld xmlns:a="http://schemas.openxmlformats.org/drawingml/2006/main" xmlns:r="http://schemas.openxmlformats.org/officeDocument/2006/relationships" xmlns:p="http://schemas.openxmlformats.org/presentationml/2006/main">
   <p:cSld>
     <p:spTree>
@@ -6104,7 +6256,7 @@
 </p:sld>
 </file>
 
-<file path=ppt/slides/slide24.xml><?xml version="1.0" encoding="utf-8"?>
+<file path=ppt/slides/slide25.xml><?xml version="1.0" encoding="utf-8"?>
 <p:sld xmlns:a="http://schemas.openxmlformats.org/drawingml/2006/main" xmlns:r="http://schemas.openxmlformats.org/officeDocument/2006/relationships" xmlns:p="http://schemas.openxmlformats.org/presentationml/2006/main">
   <p:cSld>
     <p:spTree>
@@ -6265,150 +6417,6 @@
     <p:extLst>
       <p:ext uri="{BB962C8B-B14F-4D97-AF65-F5344CB8AC3E}">
         <p14:creationId xmlns:p14="http://schemas.microsoft.com/office/powerpoint/2010/main" val="3723313383"/>
-      </p:ext>
-    </p:extLst>
-  </p:cSld>
-  <p:clrMapOvr>
-    <a:masterClrMapping/>
-  </p:clrMapOvr>
-</p:sld>
-</file>
-
-<file path=ppt/slides/slide25.xml><?xml version="1.0" encoding="utf-8"?>
-<p:sld xmlns:a="http://schemas.openxmlformats.org/drawingml/2006/main" xmlns:r="http://schemas.openxmlformats.org/officeDocument/2006/relationships" xmlns:p="http://schemas.openxmlformats.org/presentationml/2006/main">
-  <p:cSld>
-    <p:spTree>
-      <p:nvGrpSpPr>
-        <p:cNvPr id="1" name=""/>
-        <p:cNvGrpSpPr/>
-        <p:nvPr/>
-      </p:nvGrpSpPr>
-      <p:grpSpPr>
-        <a:xfrm>
-          <a:off x="0" y="0"/>
-          <a:ext cx="0" cy="0"/>
-          <a:chOff x="0" y="0"/>
-          <a:chExt cx="0" cy="0"/>
-        </a:xfrm>
-      </p:grpSpPr>
-      <p:sp>
-        <p:nvSpPr>
-          <p:cNvPr id="2" name="Title 1">
-            <a:extLst>
-              <a:ext uri="{FF2B5EF4-FFF2-40B4-BE49-F238E27FC236}">
-                <a16:creationId xmlns:a16="http://schemas.microsoft.com/office/drawing/2014/main" id="{02EFF40A-6D00-D6A3-1AF4-19743790D91B}"/>
-              </a:ext>
-            </a:extLst>
-          </p:cNvPr>
-          <p:cNvSpPr>
-            <a:spLocks noGrp="1"/>
-          </p:cNvSpPr>
-          <p:nvPr>
-            <p:ph type="title"/>
-          </p:nvPr>
-        </p:nvSpPr>
-        <p:spPr/>
-        <p:txBody>
-          <a:bodyPr/>
-          <a:lstStyle/>
-          <a:p>
-            <a:r>
-              <a:rPr lang="en-US" dirty="0"/>
-              <a:t>Original Query</a:t>
-            </a:r>
-          </a:p>
-        </p:txBody>
-      </p:sp>
-      <p:sp>
-        <p:nvSpPr>
-          <p:cNvPr id="3" name="Content Placeholder 2">
-            <a:extLst>
-              <a:ext uri="{FF2B5EF4-FFF2-40B4-BE49-F238E27FC236}">
-                <a16:creationId xmlns:a16="http://schemas.microsoft.com/office/drawing/2014/main" id="{57D76C5C-39B5-B50D-B4DC-9D0273815ACB}"/>
-              </a:ext>
-            </a:extLst>
-          </p:cNvPr>
-          <p:cNvSpPr>
-            <a:spLocks noGrp="1"/>
-          </p:cNvSpPr>
-          <p:nvPr>
-            <p:ph idx="1"/>
-          </p:nvPr>
-        </p:nvSpPr>
-        <p:spPr/>
-        <p:txBody>
-          <a:bodyPr>
-            <a:normAutofit lnSpcReduction="10000"/>
-          </a:bodyPr>
-          <a:lstStyle/>
-          <a:p>
-            <a:r>
-              <a:rPr lang="en-US" dirty="0"/>
-              <a:t>The original way to query JSON may have looked something like this:</a:t>
-            </a:r>
-          </a:p>
-          <a:p>
-            <a:endParaRPr lang="en-US" dirty="0"/>
-          </a:p>
-          <a:p>
-            <a:r>
-              <a:rPr lang="en-US" dirty="0"/>
-              <a:t>var contributors = await _</a:t>
-            </a:r>
-            <a:r>
-              <a:rPr lang="en-US" dirty="0" err="1"/>
-              <a:t>db.Contributors</a:t>
-            </a:r>
-            <a:endParaRPr lang="en-US" dirty="0"/>
-          </a:p>
-          <a:p>
-            <a:r>
-              <a:rPr lang="en-US" dirty="0"/>
-              <a:t>    .</a:t>
-            </a:r>
-            <a:r>
-              <a:rPr lang="en-US" dirty="0" err="1"/>
-              <a:t>FromSqlRaw</a:t>
-            </a:r>
-            <a:r>
-              <a:rPr lang="en-US" dirty="0"/>
-              <a:t>(</a:t>
-            </a:r>
-          </a:p>
-          <a:p>
-            <a:r>
-              <a:rPr lang="en-US" dirty="0"/>
-              <a:t>        "SELECT * FROM Contributors WHERE JSON_VALUE([Address], '$.City') = {0}", </a:t>
-            </a:r>
-            <a:r>
-              <a:rPr lang="en-US" dirty="0" err="1"/>
-              <a:t>cityToFind</a:t>
-            </a:r>
-            <a:r>
-              <a:rPr lang="en-US" dirty="0"/>
-              <a:t>)</a:t>
-            </a:r>
-          </a:p>
-          <a:p>
-            <a:r>
-              <a:rPr lang="en-US" dirty="0"/>
-              <a:t>    .</a:t>
-            </a:r>
-            <a:r>
-              <a:rPr lang="en-US" dirty="0" err="1"/>
-              <a:t>ToListAsync</a:t>
-            </a:r>
-            <a:r>
-              <a:rPr lang="en-US" dirty="0"/>
-              <a:t>();</a:t>
-            </a:r>
-          </a:p>
-        </p:txBody>
-      </p:sp>
-    </p:spTree>
-    <p:extLst>
-      <p:ext uri="{BB962C8B-B14F-4D97-AF65-F5344CB8AC3E}">
-        <p14:creationId xmlns:p14="http://schemas.microsoft.com/office/powerpoint/2010/main" val="519431327"/>
       </p:ext>
     </p:extLst>
   </p:cSld>
@@ -6440,6 +6448,150 @@
           <p:cNvPr id="2" name="Title 1">
             <a:extLst>
               <a:ext uri="{FF2B5EF4-FFF2-40B4-BE49-F238E27FC236}">
+                <a16:creationId xmlns:a16="http://schemas.microsoft.com/office/drawing/2014/main" id="{02EFF40A-6D00-D6A3-1AF4-19743790D91B}"/>
+              </a:ext>
+            </a:extLst>
+          </p:cNvPr>
+          <p:cNvSpPr>
+            <a:spLocks noGrp="1"/>
+          </p:cNvSpPr>
+          <p:nvPr>
+            <p:ph type="title"/>
+          </p:nvPr>
+        </p:nvSpPr>
+        <p:spPr/>
+        <p:txBody>
+          <a:bodyPr/>
+          <a:lstStyle/>
+          <a:p>
+            <a:r>
+              <a:rPr lang="en-US" dirty="0"/>
+              <a:t>Original Query</a:t>
+            </a:r>
+          </a:p>
+        </p:txBody>
+      </p:sp>
+      <p:sp>
+        <p:nvSpPr>
+          <p:cNvPr id="3" name="Content Placeholder 2">
+            <a:extLst>
+              <a:ext uri="{FF2B5EF4-FFF2-40B4-BE49-F238E27FC236}">
+                <a16:creationId xmlns:a16="http://schemas.microsoft.com/office/drawing/2014/main" id="{57D76C5C-39B5-B50D-B4DC-9D0273815ACB}"/>
+              </a:ext>
+            </a:extLst>
+          </p:cNvPr>
+          <p:cNvSpPr>
+            <a:spLocks noGrp="1"/>
+          </p:cNvSpPr>
+          <p:nvPr>
+            <p:ph idx="1"/>
+          </p:nvPr>
+        </p:nvSpPr>
+        <p:spPr/>
+        <p:txBody>
+          <a:bodyPr>
+            <a:normAutofit lnSpcReduction="10000"/>
+          </a:bodyPr>
+          <a:lstStyle/>
+          <a:p>
+            <a:r>
+              <a:rPr lang="en-US" dirty="0"/>
+              <a:t>The original way to query JSON may have looked something like this:</a:t>
+            </a:r>
+          </a:p>
+          <a:p>
+            <a:endParaRPr lang="en-US" dirty="0"/>
+          </a:p>
+          <a:p>
+            <a:r>
+              <a:rPr lang="en-US" dirty="0"/>
+              <a:t>var contributors = await _</a:t>
+            </a:r>
+            <a:r>
+              <a:rPr lang="en-US" dirty="0" err="1"/>
+              <a:t>db.Contributors</a:t>
+            </a:r>
+            <a:endParaRPr lang="en-US" dirty="0"/>
+          </a:p>
+          <a:p>
+            <a:r>
+              <a:rPr lang="en-US" dirty="0"/>
+              <a:t>    .</a:t>
+            </a:r>
+            <a:r>
+              <a:rPr lang="en-US" dirty="0" err="1"/>
+              <a:t>FromSqlRaw</a:t>
+            </a:r>
+            <a:r>
+              <a:rPr lang="en-US" dirty="0"/>
+              <a:t>(</a:t>
+            </a:r>
+          </a:p>
+          <a:p>
+            <a:r>
+              <a:rPr lang="en-US" dirty="0"/>
+              <a:t>        "SELECT * FROM Contributors WHERE JSON_VALUE([Address], '$.City') = {0}", </a:t>
+            </a:r>
+            <a:r>
+              <a:rPr lang="en-US" dirty="0" err="1"/>
+              <a:t>cityToFind</a:t>
+            </a:r>
+            <a:r>
+              <a:rPr lang="en-US" dirty="0"/>
+              <a:t>)</a:t>
+            </a:r>
+          </a:p>
+          <a:p>
+            <a:r>
+              <a:rPr lang="en-US" dirty="0"/>
+              <a:t>    .</a:t>
+            </a:r>
+            <a:r>
+              <a:rPr lang="en-US" dirty="0" err="1"/>
+              <a:t>ToListAsync</a:t>
+            </a:r>
+            <a:r>
+              <a:rPr lang="en-US" dirty="0"/>
+              <a:t>();</a:t>
+            </a:r>
+          </a:p>
+        </p:txBody>
+      </p:sp>
+    </p:spTree>
+    <p:extLst>
+      <p:ext uri="{BB962C8B-B14F-4D97-AF65-F5344CB8AC3E}">
+        <p14:creationId xmlns:p14="http://schemas.microsoft.com/office/powerpoint/2010/main" val="519431327"/>
+      </p:ext>
+    </p:extLst>
+  </p:cSld>
+  <p:clrMapOvr>
+    <a:masterClrMapping/>
+  </p:clrMapOvr>
+</p:sld>
+</file>
+
+<file path=ppt/slides/slide27.xml><?xml version="1.0" encoding="utf-8"?>
+<p:sld xmlns:a="http://schemas.openxmlformats.org/drawingml/2006/main" xmlns:r="http://schemas.openxmlformats.org/officeDocument/2006/relationships" xmlns:p="http://schemas.openxmlformats.org/presentationml/2006/main">
+  <p:cSld>
+    <p:spTree>
+      <p:nvGrpSpPr>
+        <p:cNvPr id="1" name=""/>
+        <p:cNvGrpSpPr/>
+        <p:nvPr/>
+      </p:nvGrpSpPr>
+      <p:grpSpPr>
+        <a:xfrm>
+          <a:off x="0" y="0"/>
+          <a:ext cx="0" cy="0"/>
+          <a:chOff x="0" y="0"/>
+          <a:chExt cx="0" cy="0"/>
+        </a:xfrm>
+      </p:grpSpPr>
+      <p:sp>
+        <p:nvSpPr>
+          <p:cNvPr id="2" name="Title 1">
+            <a:extLst>
+              <a:ext uri="{FF2B5EF4-FFF2-40B4-BE49-F238E27FC236}">
                 <a16:creationId xmlns:a16="http://schemas.microsoft.com/office/drawing/2014/main" id="{34C75629-34BA-0F5B-00FC-157A7398266C}"/>
               </a:ext>
             </a:extLst>
@@ -6576,7 +6728,7 @@
 </p:sld>
 </file>
 
-<file path=ppt/slides/slide27.xml><?xml version="1.0" encoding="utf-8"?>
+<file path=ppt/slides/slide28.xml><?xml version="1.0" encoding="utf-8"?>
 <p:sld xmlns:a="http://schemas.openxmlformats.org/drawingml/2006/main" xmlns:r="http://schemas.openxmlformats.org/officeDocument/2006/relationships" xmlns:p="http://schemas.openxmlformats.org/presentationml/2006/main">
   <p:cSld>
     <p:spTree>
@@ -6678,7 +6830,7 @@
 </p:sld>
 </file>
 
-<file path=ppt/slides/slide28.xml><?xml version="1.0" encoding="utf-8"?>
+<file path=ppt/slides/slide29.xml><?xml version="1.0" encoding="utf-8"?>
 <p:sld xmlns:a="http://schemas.openxmlformats.org/drawingml/2006/main" xmlns:r="http://schemas.openxmlformats.org/officeDocument/2006/relationships" xmlns:p="http://schemas.openxmlformats.org/presentationml/2006/main">
   <p:cSld>
     <p:spTree>
@@ -6739,230 +6891,6 @@
     <p:extLst>
       <p:ext uri="{BB962C8B-B14F-4D97-AF65-F5344CB8AC3E}">
         <p14:creationId xmlns:p14="http://schemas.microsoft.com/office/powerpoint/2010/main" val="1842096429"/>
-      </p:ext>
-    </p:extLst>
-  </p:cSld>
-  <p:clrMapOvr>
-    <a:masterClrMapping/>
-  </p:clrMapOvr>
-</p:sld>
-</file>
-
-<file path=ppt/slides/slide29.xml><?xml version="1.0" encoding="utf-8"?>
-<p:sld xmlns:a="http://schemas.openxmlformats.org/drawingml/2006/main" xmlns:r="http://schemas.openxmlformats.org/officeDocument/2006/relationships" xmlns:p="http://schemas.openxmlformats.org/presentationml/2006/main">
-  <p:cSld>
-    <p:spTree>
-      <p:nvGrpSpPr>
-        <p:cNvPr id="1" name="">
-          <a:extLst>
-            <a:ext uri="{FF2B5EF4-FFF2-40B4-BE49-F238E27FC236}">
-              <a16:creationId xmlns:a16="http://schemas.microsoft.com/office/drawing/2014/main" id="{DD0319BB-AEC7-1389-9671-9EA6561A486E}"/>
-            </a:ext>
-          </a:extLst>
-        </p:cNvPr>
-        <p:cNvGrpSpPr/>
-        <p:nvPr/>
-      </p:nvGrpSpPr>
-      <p:grpSpPr>
-        <a:xfrm>
-          <a:off x="0" y="0"/>
-          <a:ext cx="0" cy="0"/>
-          <a:chOff x="0" y="0"/>
-          <a:chExt cx="0" cy="0"/>
-        </a:xfrm>
-      </p:grpSpPr>
-      <p:sp>
-        <p:nvSpPr>
-          <p:cNvPr id="18" name="Title 17">
-            <a:extLst>
-              <a:ext uri="{FF2B5EF4-FFF2-40B4-BE49-F238E27FC236}">
-                <a16:creationId xmlns:a16="http://schemas.microsoft.com/office/drawing/2014/main" id="{380BBA28-E334-67E4-861D-ED6F88D528E0}"/>
-              </a:ext>
-            </a:extLst>
-          </p:cNvPr>
-          <p:cNvSpPr>
-            <a:spLocks noGrp="1"/>
-          </p:cNvSpPr>
-          <p:nvPr>
-            <p:ph type="title"/>
-          </p:nvPr>
-        </p:nvSpPr>
-        <p:spPr/>
-        <p:txBody>
-          <a:bodyPr/>
-          <a:lstStyle/>
-          <a:p>
-            <a:r>
-              <a:rPr lang="en-US" dirty="0"/>
-              <a:t>N + 1 Queries</a:t>
-            </a:r>
-          </a:p>
-        </p:txBody>
-      </p:sp>
-      <p:sp>
-        <p:nvSpPr>
-          <p:cNvPr id="19" name="Content Placeholder 18">
-            <a:extLst>
-              <a:ext uri="{FF2B5EF4-FFF2-40B4-BE49-F238E27FC236}">
-                <a16:creationId xmlns:a16="http://schemas.microsoft.com/office/drawing/2014/main" id="{7D34AD65-FD34-5E1F-827A-980309F3195C}"/>
-              </a:ext>
-            </a:extLst>
-          </p:cNvPr>
-          <p:cNvSpPr>
-            <a:spLocks noGrp="1"/>
-          </p:cNvSpPr>
-          <p:nvPr>
-            <p:ph idx="1"/>
-          </p:nvPr>
-        </p:nvSpPr>
-        <p:spPr/>
-        <p:txBody>
-          <a:bodyPr>
-            <a:normAutofit fontScale="55000" lnSpcReduction="20000"/>
-          </a:bodyPr>
-          <a:lstStyle/>
-          <a:p>
-            <a:r>
-              <a:rPr lang="en-US" dirty="0"/>
-              <a:t>N + 1 Queries = for every record send a database call to get more additional information using lazy load.</a:t>
-            </a:r>
-          </a:p>
-          <a:p>
-            <a:endParaRPr lang="en-US" dirty="0"/>
-          </a:p>
-          <a:p>
-            <a:pPr marL="571500" indent="-571500">
-              <a:buFontTx/>
-              <a:buChar char="-"/>
-            </a:pPr>
-            <a:r>
-              <a:rPr lang="en-US" dirty="0"/>
-              <a:t>Sneaks into grid logic a lot</a:t>
-            </a:r>
-          </a:p>
-          <a:p>
-            <a:pPr marL="571500" indent="-571500">
-              <a:buFontTx/>
-              <a:buChar char="-"/>
-            </a:pPr>
-            <a:r>
-              <a:rPr lang="en-US" dirty="0"/>
-              <a:t>Not terrible if user interaction is desired to get the additional data – only load what is needed until needed</a:t>
-            </a:r>
-          </a:p>
-          <a:p>
-            <a:pPr marL="571500" indent="-571500">
-              <a:buFontTx/>
-              <a:buChar char="-"/>
-            </a:pPr>
-            <a:endParaRPr lang="en-US" dirty="0"/>
-          </a:p>
-          <a:p>
-            <a:pPr marL="571500" indent="-571500">
-              <a:buFontTx/>
-              <a:buChar char="-"/>
-            </a:pPr>
-            <a:endParaRPr lang="en-US" dirty="0"/>
-          </a:p>
-          <a:p>
-            <a:r>
-              <a:rPr lang="en-US" dirty="0"/>
-              <a:t>var items = await _</a:t>
-            </a:r>
-            <a:r>
-              <a:rPr lang="en-US" dirty="0" err="1"/>
-              <a:t>db.Items.ToListAsync</a:t>
-            </a:r>
-            <a:r>
-              <a:rPr lang="en-US" dirty="0"/>
-              <a:t>();</a:t>
-            </a:r>
-          </a:p>
-          <a:p>
-            <a:r>
-              <a:rPr lang="en-US" dirty="0"/>
-              <a:t>foreach (var item in items)</a:t>
-            </a:r>
-          </a:p>
-          <a:p>
-            <a:r>
-              <a:rPr lang="en-US" dirty="0"/>
-              <a:t>{</a:t>
-            </a:r>
-          </a:p>
-          <a:p>
-            <a:r>
-              <a:rPr lang="en-US" dirty="0"/>
-              <a:t>    //requires an additional database call on each iteration</a:t>
-            </a:r>
-          </a:p>
-          <a:p>
-            <a:r>
-              <a:rPr lang="en-US" dirty="0"/>
-              <a:t>    var </a:t>
-            </a:r>
-            <a:r>
-              <a:rPr lang="en-US" dirty="0" err="1"/>
-              <a:t>categoryName</a:t>
-            </a:r>
-            <a:r>
-              <a:rPr lang="en-US" dirty="0"/>
-              <a:t> = item.Category?.</a:t>
-            </a:r>
-            <a:r>
-              <a:rPr lang="en-US" dirty="0" err="1"/>
-              <a:t>CategoryName</a:t>
-            </a:r>
-            <a:r>
-              <a:rPr lang="en-US" dirty="0"/>
-              <a:t> ?? "No Category";</a:t>
-            </a:r>
-          </a:p>
-          <a:p>
-            <a:r>
-              <a:rPr lang="en-US" dirty="0"/>
-              <a:t>    </a:t>
-            </a:r>
-            <a:r>
-              <a:rPr lang="en-US" dirty="0" err="1"/>
-              <a:t>Console.WriteLine</a:t>
-            </a:r>
-            <a:r>
-              <a:rPr lang="en-US" dirty="0"/>
-              <a:t>($"{</a:t>
-            </a:r>
-            <a:r>
-              <a:rPr lang="en-US" dirty="0" err="1"/>
-              <a:t>item.ItemName</a:t>
-            </a:r>
-            <a:r>
-              <a:rPr lang="en-US" dirty="0"/>
-              <a:t>} is in category {</a:t>
-            </a:r>
-            <a:r>
-              <a:rPr lang="en-US" dirty="0" err="1"/>
-              <a:t>categoryName</a:t>
-            </a:r>
-            <a:r>
-              <a:rPr lang="en-US" dirty="0"/>
-              <a:t>}");</a:t>
-            </a:r>
-          </a:p>
-          <a:p>
-            <a:r>
-              <a:rPr lang="en-US" dirty="0"/>
-              <a:t>}</a:t>
-            </a:r>
-          </a:p>
-          <a:p>
-            <a:endParaRPr lang="en-US" dirty="0"/>
-          </a:p>
-        </p:txBody>
-      </p:sp>
-    </p:spTree>
-    <p:extLst>
-      <p:ext uri="{BB962C8B-B14F-4D97-AF65-F5344CB8AC3E}">
-        <p14:creationId xmlns:p14="http://schemas.microsoft.com/office/powerpoint/2010/main" val="272284054"/>
       </p:ext>
     </p:extLst>
   </p:cSld>
@@ -6989,63 +6917,542 @@
           <a:chExt cx="0" cy="0"/>
         </a:xfrm>
       </p:grpSpPr>
-      <p:sp>
-        <p:nvSpPr>
-          <p:cNvPr id="2" name="Title 1">
+      <p:pic>
+        <p:nvPicPr>
+          <p:cNvPr id="23" name="Picture 22" descr="A qr code on a white background&#10;&#10;AI-generated content may be incorrect.">
             <a:extLst>
               <a:ext uri="{FF2B5EF4-FFF2-40B4-BE49-F238E27FC236}">
-                <a16:creationId xmlns:a16="http://schemas.microsoft.com/office/drawing/2014/main" id="{62EBBBAC-FEC9-29D8-91C9-02264CABED77}"/>
+                <a16:creationId xmlns:a16="http://schemas.microsoft.com/office/drawing/2014/main" id="{613FA548-72DA-B3D9-8DDA-AD4195F50ABB}"/>
               </a:ext>
             </a:extLst>
           </p:cNvPr>
-          <p:cNvSpPr>
-            <a:spLocks noGrp="1"/>
-          </p:cNvSpPr>
-          <p:nvPr>
-            <p:ph type="title"/>
-          </p:nvPr>
-        </p:nvSpPr>
-        <p:spPr/>
-        <p:txBody>
-          <a:bodyPr/>
-          <a:lstStyle/>
-          <a:p>
-            <a:r>
-              <a:rPr lang="en-US" dirty="0"/>
-              <a:t>Sponsor</a:t>
-            </a:r>
-          </a:p>
-        </p:txBody>
-      </p:sp>
-      <p:sp>
-        <p:nvSpPr>
-          <p:cNvPr id="3" name="Content Placeholder 2">
+          <p:cNvPicPr>
+            <a:picLocks noChangeAspect="1"/>
+          </p:cNvPicPr>
+          <p:nvPr/>
+        </p:nvPicPr>
+        <p:blipFill>
+          <a:blip r:embed="rId3"/>
+          <a:stretch>
+            <a:fillRect/>
+          </a:stretch>
+        </p:blipFill>
+        <p:spPr>
+          <a:xfrm>
+            <a:off x="9965507" y="-55246"/>
+            <a:ext cx="1547928" cy="1505116"/>
+          </a:xfrm>
+          <a:prstGeom prst="rect">
+            <a:avLst/>
+          </a:prstGeom>
+        </p:spPr>
+      </p:pic>
+      <p:sp>
+        <p:nvSpPr>
+          <p:cNvPr id="8" name="Title 1"/>
+          <p:cNvSpPr txBox="1">
+            <a:spLocks/>
+          </p:cNvSpPr>
+          <p:nvPr/>
+        </p:nvSpPr>
+        <p:spPr>
+          <a:xfrm>
+            <a:off x="222567" y="1472013"/>
+            <a:ext cx="4668956" cy="720000"/>
+          </a:xfrm>
+          <a:prstGeom prst="rect">
+            <a:avLst/>
+          </a:prstGeom>
+        </p:spPr>
+        <p:txBody>
+          <a:bodyPr vert="horz" lIns="0" tIns="0" rIns="0" bIns="0" rtlCol="0" anchor="ctr">
+            <a:noAutofit/>
+          </a:bodyPr>
+          <a:lstStyle>
+            <a:lvl1pPr algn="l" defTabSz="576026" rtl="0" eaLnBrk="1" latinLnBrk="0" hangingPunct="1">
+              <a:spcBef>
+                <a:spcPct val="0"/>
+              </a:spcBef>
+              <a:buNone/>
+              <a:defRPr sz="4400" kern="1200">
+                <a:solidFill>
+                  <a:schemeClr val="accent1"/>
+                </a:solidFill>
+                <a:latin typeface="+mj-lt"/>
+                <a:ea typeface="+mj-ea"/>
+                <a:cs typeface="+mj-cs"/>
+              </a:defRPr>
+            </a:lvl1pPr>
+          </a:lstStyle>
+          <a:p>
+            <a:r>
+              <a:rPr lang="en-US" sz="2400"/>
+              <a:t>Gold Sponsors:</a:t>
+            </a:r>
+          </a:p>
+        </p:txBody>
+      </p:sp>
+      <p:sp>
+        <p:nvSpPr>
+          <p:cNvPr id="13" name="Title 1"/>
+          <p:cNvSpPr txBox="1">
+            <a:spLocks/>
+          </p:cNvSpPr>
+          <p:nvPr/>
+        </p:nvSpPr>
+        <p:spPr>
+          <a:xfrm>
+            <a:off x="3965038" y="157616"/>
+            <a:ext cx="6160253" cy="809704"/>
+          </a:xfrm>
+          <a:prstGeom prst="rect">
+            <a:avLst/>
+          </a:prstGeom>
+        </p:spPr>
+        <p:txBody>
+          <a:bodyPr vert="horz" lIns="0" tIns="0" rIns="0" bIns="0" rtlCol="0" anchor="ctr">
+            <a:noAutofit/>
+          </a:bodyPr>
+          <a:lstStyle>
+            <a:lvl1pPr algn="l" defTabSz="576026" rtl="0" eaLnBrk="1" latinLnBrk="0" hangingPunct="1">
+              <a:spcBef>
+                <a:spcPct val="0"/>
+              </a:spcBef>
+              <a:buNone/>
+              <a:defRPr sz="4400" kern="1200">
+                <a:solidFill>
+                  <a:schemeClr val="accent1"/>
+                </a:solidFill>
+                <a:latin typeface="+mj-lt"/>
+                <a:ea typeface="+mj-ea"/>
+                <a:cs typeface="+mj-cs"/>
+              </a:defRPr>
+            </a:lvl1pPr>
+          </a:lstStyle>
+          <a:p>
+            <a:r>
+              <a:rPr lang="en-US" b="1"/>
+              <a:t>Thank you Sponsors!</a:t>
+            </a:r>
+          </a:p>
+        </p:txBody>
+      </p:sp>
+      <p:cxnSp>
+        <p:nvCxnSpPr>
+          <p:cNvPr id="20" name="Straight Connector 19"/>
+          <p:cNvCxnSpPr/>
+          <p:nvPr/>
+        </p:nvCxnSpPr>
+        <p:spPr>
+          <a:xfrm>
+            <a:off x="215900" y="1388844"/>
+            <a:ext cx="11124316" cy="0"/>
+          </a:xfrm>
+          <a:prstGeom prst="line">
+            <a:avLst/>
+          </a:prstGeom>
+        </p:spPr>
+        <p:style>
+          <a:lnRef idx="2">
+            <a:schemeClr val="accent1"/>
+          </a:lnRef>
+          <a:fillRef idx="0">
+            <a:schemeClr val="accent1"/>
+          </a:fillRef>
+          <a:effectRef idx="1">
+            <a:schemeClr val="accent1"/>
+          </a:effectRef>
+          <a:fontRef idx="minor">
+            <a:schemeClr val="tx1"/>
+          </a:fontRef>
+        </p:style>
+      </p:cxnSp>
+      <p:sp>
+        <p:nvSpPr>
+          <p:cNvPr id="4" name="TextBox 3"/>
+          <p:cNvSpPr txBox="1"/>
+          <p:nvPr/>
+        </p:nvSpPr>
+        <p:spPr>
+          <a:xfrm>
+            <a:off x="220828" y="122274"/>
+            <a:ext cx="9549956" cy="1154483"/>
+          </a:xfrm>
+          <a:prstGeom prst="rect">
+            <a:avLst/>
+          </a:prstGeom>
+          <a:noFill/>
+        </p:spPr>
+        <p:txBody>
+          <a:bodyPr wrap="square" lIns="91440" tIns="45720" rIns="91440" bIns="45720" rtlCol="0" anchor="t">
+            <a:spAutoFit/>
+          </a:bodyPr>
+          <a:lstStyle/>
+          <a:p>
+            <a:pPr marL="285750" indent="-285750">
+              <a:lnSpc>
+                <a:spcPct val="150000"/>
+              </a:lnSpc>
+              <a:buFont typeface="Arial" panose="020B0604020202020204" pitchFamily="34" charset="0"/>
+              <a:buChar char="•"/>
+            </a:pPr>
+            <a:r>
+              <a:rPr lang="en-US" sz="1600" b="1"/>
+              <a:t>Visit the Sponsor Booths</a:t>
+            </a:r>
+            <a:endParaRPr lang="en-US" sz="1600" b="1">
+              <a:cs typeface="Segoe UI"/>
+            </a:endParaRPr>
+          </a:p>
+          <a:p>
+            <a:pPr marL="285750" indent="-285750">
+              <a:lnSpc>
+                <a:spcPct val="150000"/>
+              </a:lnSpc>
+              <a:buFont typeface="Arial" panose="020B0604020202020204" pitchFamily="34" charset="0"/>
+              <a:buChar char="•"/>
+            </a:pPr>
+            <a:r>
+              <a:rPr lang="en-US" sz="1600" b="1"/>
+              <a:t>Lots of Great Raffle Prizes!</a:t>
+            </a:r>
+            <a:endParaRPr lang="en-US" sz="1400" b="1"/>
+          </a:p>
+          <a:p>
+            <a:pPr marL="285750" indent="-285750">
+              <a:lnSpc>
+                <a:spcPct val="150000"/>
+              </a:lnSpc>
+              <a:buFont typeface="Arial" panose="020B0604020202020204" pitchFamily="34" charset="0"/>
+              <a:buChar char="•"/>
+            </a:pPr>
+            <a:r>
+              <a:rPr lang="en-US" sz="1600" b="1"/>
+              <a:t>Enter your details on Raffle Entry Form &amp; visit Sponsors to fill in Bingo card for Raffle prizes</a:t>
+            </a:r>
+            <a:endParaRPr lang="en-US" sz="1600" b="1">
+              <a:cs typeface="Segoe UI"/>
+            </a:endParaRPr>
+          </a:p>
+        </p:txBody>
+      </p:sp>
+      <p:sp>
+        <p:nvSpPr>
+          <p:cNvPr id="11" name="Title 1">
             <a:extLst>
               <a:ext uri="{FF2B5EF4-FFF2-40B4-BE49-F238E27FC236}">
-                <a16:creationId xmlns:a16="http://schemas.microsoft.com/office/drawing/2014/main" id="{F17622C7-E787-CF40-82E6-45589E660B3D}"/>
+                <a16:creationId xmlns:a16="http://schemas.microsoft.com/office/drawing/2014/main" id="{8658C841-2248-6A11-396E-C7B198EAE03A}"/>
               </a:ext>
             </a:extLst>
           </p:cNvPr>
-          <p:cNvSpPr>
-            <a:spLocks noGrp="1"/>
-          </p:cNvSpPr>
-          <p:nvPr>
-            <p:ph idx="1"/>
-          </p:nvPr>
-        </p:nvSpPr>
-        <p:spPr/>
-        <p:txBody>
-          <a:bodyPr/>
-          <a:lstStyle/>
-          <a:p>
-            <a:endParaRPr lang="en-US"/>
+          <p:cNvSpPr txBox="1">
+            <a:spLocks/>
+          </p:cNvSpPr>
+          <p:nvPr/>
+        </p:nvSpPr>
+        <p:spPr>
+          <a:xfrm>
+            <a:off x="139185" y="4887977"/>
+            <a:ext cx="4668956" cy="720000"/>
+          </a:xfrm>
+          <a:prstGeom prst="rect">
+            <a:avLst/>
+          </a:prstGeom>
+        </p:spPr>
+        <p:txBody>
+          <a:bodyPr vert="horz" lIns="0" tIns="0" rIns="0" bIns="0" rtlCol="0" anchor="ctr">
+            <a:noAutofit/>
+          </a:bodyPr>
+          <a:lstStyle>
+            <a:lvl1pPr algn="l" defTabSz="576026" rtl="0" eaLnBrk="1" latinLnBrk="0" hangingPunct="1">
+              <a:spcBef>
+                <a:spcPct val="0"/>
+              </a:spcBef>
+              <a:buNone/>
+              <a:defRPr sz="4400" kern="1200">
+                <a:solidFill>
+                  <a:schemeClr val="accent1"/>
+                </a:solidFill>
+                <a:latin typeface="+mj-lt"/>
+                <a:ea typeface="+mj-ea"/>
+                <a:cs typeface="+mj-cs"/>
+              </a:defRPr>
+            </a:lvl1pPr>
+          </a:lstStyle>
+          <a:p>
+            <a:r>
+              <a:rPr lang="en-US" sz="2400"/>
+              <a:t>Silver Sponsors:</a:t>
+            </a:r>
+          </a:p>
+        </p:txBody>
+      </p:sp>
+      <p:cxnSp>
+        <p:nvCxnSpPr>
+          <p:cNvPr id="14" name="Straight Connector 13">
+            <a:extLst>
+              <a:ext uri="{FF2B5EF4-FFF2-40B4-BE49-F238E27FC236}">
+                <a16:creationId xmlns:a16="http://schemas.microsoft.com/office/drawing/2014/main" id="{763A424A-759D-ABB5-47F0-2BCEB6A06AE1}"/>
+              </a:ext>
+            </a:extLst>
+          </p:cNvPr>
+          <p:cNvCxnSpPr/>
+          <p:nvPr/>
+        </p:nvCxnSpPr>
+        <p:spPr>
+          <a:xfrm>
+            <a:off x="216363" y="4823693"/>
+            <a:ext cx="11124316" cy="0"/>
+          </a:xfrm>
+          <a:prstGeom prst="line">
+            <a:avLst/>
+          </a:prstGeom>
+        </p:spPr>
+        <p:style>
+          <a:lnRef idx="2">
+            <a:schemeClr val="accent1"/>
+          </a:lnRef>
+          <a:fillRef idx="0">
+            <a:schemeClr val="accent1"/>
+          </a:fillRef>
+          <a:effectRef idx="1">
+            <a:schemeClr val="accent1"/>
+          </a:effectRef>
+          <a:fontRef idx="minor">
+            <a:schemeClr val="tx1"/>
+          </a:fontRef>
+        </p:style>
+      </p:cxnSp>
+      <p:pic>
+        <p:nvPicPr>
+          <p:cNvPr id="2052" name="Picture 4">
+            <a:extLst>
+              <a:ext uri="{FF2B5EF4-FFF2-40B4-BE49-F238E27FC236}">
+                <a16:creationId xmlns:a16="http://schemas.microsoft.com/office/drawing/2014/main" id="{580042D8-C9DC-1D46-9E3D-3658E95A1AFE}"/>
+              </a:ext>
+            </a:extLst>
+          </p:cNvPr>
+          <p:cNvPicPr>
+            <a:picLocks noChangeAspect="1" noChangeArrowheads="1"/>
+          </p:cNvPicPr>
+          <p:nvPr/>
+        </p:nvPicPr>
+        <p:blipFill>
+          <a:blip r:embed="rId4">
+            <a:extLst>
+              <a:ext uri="{28A0092B-C50C-407E-A947-70E740481C1C}">
+                <a14:useLocalDpi xmlns:a14="http://schemas.microsoft.com/office/drawing/2010/main" val="0"/>
+              </a:ext>
+            </a:extLst>
+          </a:blip>
+          <a:srcRect/>
+          <a:stretch>
+            <a:fillRect/>
+          </a:stretch>
+        </p:blipFill>
+        <p:spPr bwMode="auto">
+          <a:xfrm>
+            <a:off x="2170738" y="4858981"/>
+            <a:ext cx="4949161" cy="1649720"/>
+          </a:xfrm>
+          <a:prstGeom prst="rect">
+            <a:avLst/>
+          </a:prstGeom>
+          <a:noFill/>
+          <a:extLst>
+            <a:ext uri="{909E8E84-426E-40DD-AFC4-6F175D3DCCD1}">
+              <a14:hiddenFill xmlns:a14="http://schemas.microsoft.com/office/drawing/2010/main">
+                <a:solidFill>
+                  <a:srgbClr val="FFFFFF"/>
+                </a:solidFill>
+              </a14:hiddenFill>
+            </a:ext>
+          </a:extLst>
+        </p:spPr>
+      </p:pic>
+      <p:pic>
+        <p:nvPicPr>
+          <p:cNvPr id="5" name="Picture 4" descr="A black background with grey text&#10;&#10;AI-generated content may be incorrect.">
+            <a:extLst>
+              <a:ext uri="{FF2B5EF4-FFF2-40B4-BE49-F238E27FC236}">
+                <a16:creationId xmlns:a16="http://schemas.microsoft.com/office/drawing/2014/main" id="{2B2C9805-12BF-EEED-EAE0-257EEADCDDD9}"/>
+              </a:ext>
+            </a:extLst>
+          </p:cNvPr>
+          <p:cNvPicPr>
+            <a:picLocks noChangeAspect="1"/>
+          </p:cNvPicPr>
+          <p:nvPr/>
+        </p:nvPicPr>
+        <p:blipFill>
+          <a:blip r:embed="rId5"/>
+          <a:stretch>
+            <a:fillRect/>
+          </a:stretch>
+        </p:blipFill>
+        <p:spPr>
+          <a:xfrm>
+            <a:off x="1041436" y="1470027"/>
+            <a:ext cx="9462332" cy="2248306"/>
+          </a:xfrm>
+          <a:prstGeom prst="rect">
+            <a:avLst/>
+          </a:prstGeom>
+        </p:spPr>
+      </p:pic>
+      <p:pic>
+        <p:nvPicPr>
+          <p:cNvPr id="12" name="Picture 11">
+            <a:extLst>
+              <a:ext uri="{FF2B5EF4-FFF2-40B4-BE49-F238E27FC236}">
+                <a16:creationId xmlns:a16="http://schemas.microsoft.com/office/drawing/2014/main" id="{C604DE00-B6F8-2C55-8ADF-968D33F47220}"/>
+              </a:ext>
+            </a:extLst>
+          </p:cNvPr>
+          <p:cNvPicPr>
+            <a:picLocks noChangeAspect="1"/>
+          </p:cNvPicPr>
+          <p:nvPr/>
+        </p:nvPicPr>
+        <p:blipFill>
+          <a:blip r:embed="rId6"/>
+          <a:stretch>
+            <a:fillRect/>
+          </a:stretch>
+        </p:blipFill>
+        <p:spPr>
+          <a:xfrm>
+            <a:off x="1804706" y="3463975"/>
+            <a:ext cx="7905129" cy="1238984"/>
+          </a:xfrm>
+          <a:prstGeom prst="rect">
+            <a:avLst/>
+          </a:prstGeom>
+        </p:spPr>
+      </p:pic>
+      <p:pic>
+        <p:nvPicPr>
+          <p:cNvPr id="17" name="Picture 16" descr="A red and white letter e&#10;&#10;AI-generated content may be incorrect.">
+            <a:extLst>
+              <a:ext uri="{FF2B5EF4-FFF2-40B4-BE49-F238E27FC236}">
+                <a16:creationId xmlns:a16="http://schemas.microsoft.com/office/drawing/2014/main" id="{6B635C8A-A99C-7A96-8338-97BBD7D9A8FE}"/>
+              </a:ext>
+            </a:extLst>
+          </p:cNvPr>
+          <p:cNvPicPr>
+            <a:picLocks noChangeAspect="1"/>
+          </p:cNvPicPr>
+          <p:nvPr/>
+        </p:nvPicPr>
+        <p:blipFill>
+          <a:blip r:embed="rId7"/>
+          <a:stretch>
+            <a:fillRect/>
+          </a:stretch>
+        </p:blipFill>
+        <p:spPr>
+          <a:xfrm>
+            <a:off x="7658909" y="5679770"/>
+            <a:ext cx="2999208" cy="566779"/>
+          </a:xfrm>
+          <a:prstGeom prst="rect">
+            <a:avLst/>
+          </a:prstGeom>
+        </p:spPr>
+      </p:pic>
+      <p:cxnSp>
+        <p:nvCxnSpPr>
+          <p:cNvPr id="18" name="Straight Connector 17">
+            <a:extLst>
+              <a:ext uri="{FF2B5EF4-FFF2-40B4-BE49-F238E27FC236}">
+                <a16:creationId xmlns:a16="http://schemas.microsoft.com/office/drawing/2014/main" id="{93F97A2F-C5C4-AF8B-5045-7410FE5A5100}"/>
+              </a:ext>
+            </a:extLst>
+          </p:cNvPr>
+          <p:cNvCxnSpPr>
+            <a:cxnSpLocks/>
+          </p:cNvCxnSpPr>
+          <p:nvPr/>
+        </p:nvCxnSpPr>
+        <p:spPr>
+          <a:xfrm flipH="1" flipV="1">
+            <a:off x="7298016" y="4978578"/>
+            <a:ext cx="15677" cy="1253772"/>
+          </a:xfrm>
+          <a:prstGeom prst="line">
+            <a:avLst/>
+          </a:prstGeom>
+        </p:spPr>
+        <p:style>
+          <a:lnRef idx="2">
+            <a:schemeClr val="accent1"/>
+          </a:lnRef>
+          <a:fillRef idx="0">
+            <a:schemeClr val="accent1"/>
+          </a:fillRef>
+          <a:effectRef idx="1">
+            <a:schemeClr val="accent1"/>
+          </a:effectRef>
+          <a:fontRef idx="minor">
+            <a:schemeClr val="tx1"/>
+          </a:fontRef>
+        </p:style>
+      </p:cxnSp>
+      <p:sp>
+        <p:nvSpPr>
+          <p:cNvPr id="22" name="Title 1">
+            <a:extLst>
+              <a:ext uri="{FF2B5EF4-FFF2-40B4-BE49-F238E27FC236}">
+                <a16:creationId xmlns:a16="http://schemas.microsoft.com/office/drawing/2014/main" id="{58E87717-0A93-0966-64F3-1F6D16AA79DE}"/>
+              </a:ext>
+            </a:extLst>
+          </p:cNvPr>
+          <p:cNvSpPr txBox="1">
+            <a:spLocks/>
+          </p:cNvSpPr>
+          <p:nvPr/>
+        </p:nvSpPr>
+        <p:spPr>
+          <a:xfrm>
+            <a:off x="7393070" y="4887987"/>
+            <a:ext cx="4020708" cy="698869"/>
+          </a:xfrm>
+          <a:prstGeom prst="rect">
+            <a:avLst/>
+          </a:prstGeom>
+        </p:spPr>
+        <p:txBody>
+          <a:bodyPr vert="horz" lIns="0" tIns="0" rIns="0" bIns="0" rtlCol="0" anchor="ctr">
+            <a:noAutofit/>
+          </a:bodyPr>
+          <a:lstStyle>
+            <a:lvl1pPr algn="l" defTabSz="576026" rtl="0" eaLnBrk="1" latinLnBrk="0" hangingPunct="1">
+              <a:spcBef>
+                <a:spcPct val="0"/>
+              </a:spcBef>
+              <a:buNone/>
+              <a:defRPr sz="4400" kern="1200">
+                <a:solidFill>
+                  <a:schemeClr val="accent1"/>
+                </a:solidFill>
+                <a:latin typeface="+mj-lt"/>
+                <a:ea typeface="+mj-ea"/>
+                <a:cs typeface="+mj-cs"/>
+              </a:defRPr>
+            </a:lvl1pPr>
+          </a:lstStyle>
+          <a:p>
+            <a:r>
+              <a:rPr lang="en-US" sz="2400"/>
+              <a:t>Bronze Sponsors:</a:t>
+            </a:r>
           </a:p>
         </p:txBody>
       </p:sp>
     </p:spTree>
     <p:extLst>
       <p:ext uri="{BB962C8B-B14F-4D97-AF65-F5344CB8AC3E}">
-        <p14:creationId xmlns:p14="http://schemas.microsoft.com/office/powerpoint/2010/main" val="85454547"/>
+        <p14:creationId xmlns:p14="http://schemas.microsoft.com/office/powerpoint/2010/main" val="1711787654"/>
       </p:ext>
     </p:extLst>
   </p:cSld>
@@ -7056,6 +7463,230 @@
 </file>
 
 <file path=ppt/slides/slide30.xml><?xml version="1.0" encoding="utf-8"?>
+<p:sld xmlns:a="http://schemas.openxmlformats.org/drawingml/2006/main" xmlns:r="http://schemas.openxmlformats.org/officeDocument/2006/relationships" xmlns:p="http://schemas.openxmlformats.org/presentationml/2006/main">
+  <p:cSld>
+    <p:spTree>
+      <p:nvGrpSpPr>
+        <p:cNvPr id="1" name="">
+          <a:extLst>
+            <a:ext uri="{FF2B5EF4-FFF2-40B4-BE49-F238E27FC236}">
+              <a16:creationId xmlns:a16="http://schemas.microsoft.com/office/drawing/2014/main" id="{DD0319BB-AEC7-1389-9671-9EA6561A486E}"/>
+            </a:ext>
+          </a:extLst>
+        </p:cNvPr>
+        <p:cNvGrpSpPr/>
+        <p:nvPr/>
+      </p:nvGrpSpPr>
+      <p:grpSpPr>
+        <a:xfrm>
+          <a:off x="0" y="0"/>
+          <a:ext cx="0" cy="0"/>
+          <a:chOff x="0" y="0"/>
+          <a:chExt cx="0" cy="0"/>
+        </a:xfrm>
+      </p:grpSpPr>
+      <p:sp>
+        <p:nvSpPr>
+          <p:cNvPr id="18" name="Title 17">
+            <a:extLst>
+              <a:ext uri="{FF2B5EF4-FFF2-40B4-BE49-F238E27FC236}">
+                <a16:creationId xmlns:a16="http://schemas.microsoft.com/office/drawing/2014/main" id="{380BBA28-E334-67E4-861D-ED6F88D528E0}"/>
+              </a:ext>
+            </a:extLst>
+          </p:cNvPr>
+          <p:cNvSpPr>
+            <a:spLocks noGrp="1"/>
+          </p:cNvSpPr>
+          <p:nvPr>
+            <p:ph type="title"/>
+          </p:nvPr>
+        </p:nvSpPr>
+        <p:spPr/>
+        <p:txBody>
+          <a:bodyPr/>
+          <a:lstStyle/>
+          <a:p>
+            <a:r>
+              <a:rPr lang="en-US" dirty="0"/>
+              <a:t>N + 1 Queries</a:t>
+            </a:r>
+          </a:p>
+        </p:txBody>
+      </p:sp>
+      <p:sp>
+        <p:nvSpPr>
+          <p:cNvPr id="19" name="Content Placeholder 18">
+            <a:extLst>
+              <a:ext uri="{FF2B5EF4-FFF2-40B4-BE49-F238E27FC236}">
+                <a16:creationId xmlns:a16="http://schemas.microsoft.com/office/drawing/2014/main" id="{7D34AD65-FD34-5E1F-827A-980309F3195C}"/>
+              </a:ext>
+            </a:extLst>
+          </p:cNvPr>
+          <p:cNvSpPr>
+            <a:spLocks noGrp="1"/>
+          </p:cNvSpPr>
+          <p:nvPr>
+            <p:ph idx="1"/>
+          </p:nvPr>
+        </p:nvSpPr>
+        <p:spPr/>
+        <p:txBody>
+          <a:bodyPr>
+            <a:normAutofit fontScale="55000" lnSpcReduction="20000"/>
+          </a:bodyPr>
+          <a:lstStyle/>
+          <a:p>
+            <a:r>
+              <a:rPr lang="en-US" dirty="0"/>
+              <a:t>N + 1 Queries = for every record send a database call to get more additional information using lazy load.</a:t>
+            </a:r>
+          </a:p>
+          <a:p>
+            <a:endParaRPr lang="en-US" dirty="0"/>
+          </a:p>
+          <a:p>
+            <a:pPr marL="571500" indent="-571500">
+              <a:buFontTx/>
+              <a:buChar char="-"/>
+            </a:pPr>
+            <a:r>
+              <a:rPr lang="en-US" dirty="0"/>
+              <a:t>Sneaks into grid logic a lot</a:t>
+            </a:r>
+          </a:p>
+          <a:p>
+            <a:pPr marL="571500" indent="-571500">
+              <a:buFontTx/>
+              <a:buChar char="-"/>
+            </a:pPr>
+            <a:r>
+              <a:rPr lang="en-US" dirty="0"/>
+              <a:t>Not terrible if user interaction is desired to get the additional data – only load what is needed until needed</a:t>
+            </a:r>
+          </a:p>
+          <a:p>
+            <a:pPr marL="571500" indent="-571500">
+              <a:buFontTx/>
+              <a:buChar char="-"/>
+            </a:pPr>
+            <a:endParaRPr lang="en-US" dirty="0"/>
+          </a:p>
+          <a:p>
+            <a:pPr marL="571500" indent="-571500">
+              <a:buFontTx/>
+              <a:buChar char="-"/>
+            </a:pPr>
+            <a:endParaRPr lang="en-US" dirty="0"/>
+          </a:p>
+          <a:p>
+            <a:r>
+              <a:rPr lang="en-US" dirty="0"/>
+              <a:t>var items = await _</a:t>
+            </a:r>
+            <a:r>
+              <a:rPr lang="en-US" dirty="0" err="1"/>
+              <a:t>db.Items.ToListAsync</a:t>
+            </a:r>
+            <a:r>
+              <a:rPr lang="en-US" dirty="0"/>
+              <a:t>();</a:t>
+            </a:r>
+          </a:p>
+          <a:p>
+            <a:r>
+              <a:rPr lang="en-US" dirty="0"/>
+              <a:t>foreach (var item in items)</a:t>
+            </a:r>
+          </a:p>
+          <a:p>
+            <a:r>
+              <a:rPr lang="en-US" dirty="0"/>
+              <a:t>{</a:t>
+            </a:r>
+          </a:p>
+          <a:p>
+            <a:r>
+              <a:rPr lang="en-US" dirty="0"/>
+              <a:t>    //requires an additional database call on each iteration</a:t>
+            </a:r>
+          </a:p>
+          <a:p>
+            <a:r>
+              <a:rPr lang="en-US" dirty="0"/>
+              <a:t>    var </a:t>
+            </a:r>
+            <a:r>
+              <a:rPr lang="en-US" dirty="0" err="1"/>
+              <a:t>categoryName</a:t>
+            </a:r>
+            <a:r>
+              <a:rPr lang="en-US" dirty="0"/>
+              <a:t> = item.Category?.</a:t>
+            </a:r>
+            <a:r>
+              <a:rPr lang="en-US" dirty="0" err="1"/>
+              <a:t>CategoryName</a:t>
+            </a:r>
+            <a:r>
+              <a:rPr lang="en-US" dirty="0"/>
+              <a:t> ?? "No Category";</a:t>
+            </a:r>
+          </a:p>
+          <a:p>
+            <a:r>
+              <a:rPr lang="en-US" dirty="0"/>
+              <a:t>    </a:t>
+            </a:r>
+            <a:r>
+              <a:rPr lang="en-US" dirty="0" err="1"/>
+              <a:t>Console.WriteLine</a:t>
+            </a:r>
+            <a:r>
+              <a:rPr lang="en-US" dirty="0"/>
+              <a:t>($"{</a:t>
+            </a:r>
+            <a:r>
+              <a:rPr lang="en-US" dirty="0" err="1"/>
+              <a:t>item.ItemName</a:t>
+            </a:r>
+            <a:r>
+              <a:rPr lang="en-US" dirty="0"/>
+              <a:t>} is in category {</a:t>
+            </a:r>
+            <a:r>
+              <a:rPr lang="en-US" dirty="0" err="1"/>
+              <a:t>categoryName</a:t>
+            </a:r>
+            <a:r>
+              <a:rPr lang="en-US" dirty="0"/>
+              <a:t>}");</a:t>
+            </a:r>
+          </a:p>
+          <a:p>
+            <a:r>
+              <a:rPr lang="en-US" dirty="0"/>
+              <a:t>}</a:t>
+            </a:r>
+          </a:p>
+          <a:p>
+            <a:endParaRPr lang="en-US" dirty="0"/>
+          </a:p>
+        </p:txBody>
+      </p:sp>
+    </p:spTree>
+    <p:extLst>
+      <p:ext uri="{BB962C8B-B14F-4D97-AF65-F5344CB8AC3E}">
+        <p14:creationId xmlns:p14="http://schemas.microsoft.com/office/powerpoint/2010/main" val="272284054"/>
+      </p:ext>
+    </p:extLst>
+  </p:cSld>
+  <p:clrMapOvr>
+    <a:masterClrMapping/>
+  </p:clrMapOvr>
+</p:sld>
+</file>
+
+<file path=ppt/slides/slide31.xml><?xml version="1.0" encoding="utf-8"?>
 <p:sld xmlns:a="http://schemas.openxmlformats.org/drawingml/2006/main" xmlns:r="http://schemas.openxmlformats.org/officeDocument/2006/relationships" xmlns:p="http://schemas.openxmlformats.org/presentationml/2006/main">
   <p:cSld>
     <p:spTree>
@@ -7258,7 +7889,7 @@
 </p:sld>
 </file>
 
-<file path=ppt/slides/slide31.xml><?xml version="1.0" encoding="utf-8"?>
+<file path=ppt/slides/slide32.xml><?xml version="1.0" encoding="utf-8"?>
 <p:sld xmlns:a="http://schemas.openxmlformats.org/drawingml/2006/main" xmlns:r="http://schemas.openxmlformats.org/officeDocument/2006/relationships" xmlns:p="http://schemas.openxmlformats.org/presentationml/2006/main">
   <p:cSld>
     <p:spTree>
@@ -7351,253 +7982,6 @@
     <p:extLst>
       <p:ext uri="{BB962C8B-B14F-4D97-AF65-F5344CB8AC3E}">
         <p14:creationId xmlns:p14="http://schemas.microsoft.com/office/powerpoint/2010/main" val="3612653757"/>
-      </p:ext>
-    </p:extLst>
-  </p:cSld>
-  <p:clrMapOvr>
-    <a:masterClrMapping/>
-  </p:clrMapOvr>
-</p:sld>
-</file>
-
-<file path=ppt/slides/slide32.xml><?xml version="1.0" encoding="utf-8"?>
-<p:sld xmlns:a="http://schemas.openxmlformats.org/drawingml/2006/main" xmlns:r="http://schemas.openxmlformats.org/officeDocument/2006/relationships" xmlns:p="http://schemas.openxmlformats.org/presentationml/2006/main">
-  <p:cSld>
-    <p:spTree>
-      <p:nvGrpSpPr>
-        <p:cNvPr id="1" name=""/>
-        <p:cNvGrpSpPr/>
-        <p:nvPr/>
-      </p:nvGrpSpPr>
-      <p:grpSpPr>
-        <a:xfrm>
-          <a:off x="0" y="0"/>
-          <a:ext cx="0" cy="0"/>
-          <a:chOff x="0" y="0"/>
-          <a:chExt cx="0" cy="0"/>
-        </a:xfrm>
-      </p:grpSpPr>
-      <p:sp>
-        <p:nvSpPr>
-          <p:cNvPr id="2" name="Title 1">
-            <a:extLst>
-              <a:ext uri="{FF2B5EF4-FFF2-40B4-BE49-F238E27FC236}">
-                <a16:creationId xmlns:a16="http://schemas.microsoft.com/office/drawing/2014/main" id="{A4541693-0CAB-3F14-1A29-180BECC78B43}"/>
-              </a:ext>
-            </a:extLst>
-          </p:cNvPr>
-          <p:cNvSpPr>
-            <a:spLocks noGrp="1"/>
-          </p:cNvSpPr>
-          <p:nvPr>
-            <p:ph type="title"/>
-          </p:nvPr>
-        </p:nvSpPr>
-        <p:spPr/>
-        <p:txBody>
-          <a:bodyPr/>
-          <a:lstStyle/>
-          <a:p>
-            <a:r>
-              <a:rPr lang="en-US" dirty="0"/>
-              <a:t>Pre-fetching data; Operations on Client-side</a:t>
-            </a:r>
-          </a:p>
-        </p:txBody>
-      </p:sp>
-      <p:sp>
-        <p:nvSpPr>
-          <p:cNvPr id="3" name="Content Placeholder 2">
-            <a:extLst>
-              <a:ext uri="{FF2B5EF4-FFF2-40B4-BE49-F238E27FC236}">
-                <a16:creationId xmlns:a16="http://schemas.microsoft.com/office/drawing/2014/main" id="{BC01D48E-6232-CCC3-1B0C-B89C2FC91ACE}"/>
-              </a:ext>
-            </a:extLst>
-          </p:cNvPr>
-          <p:cNvSpPr>
-            <a:spLocks noGrp="1"/>
-          </p:cNvSpPr>
-          <p:nvPr>
-            <p:ph idx="1"/>
-          </p:nvPr>
-        </p:nvSpPr>
-        <p:spPr/>
-        <p:txBody>
-          <a:bodyPr>
-            <a:normAutofit fontScale="70000" lnSpcReduction="20000"/>
-          </a:bodyPr>
-          <a:lstStyle/>
-          <a:p>
-            <a:r>
-              <a:rPr lang="en-US" dirty="0"/>
-              <a:t>In most cases, you would rather get the data up front and then work with it, rather than getting data and then sorting and/or filtering on the client side.</a:t>
-            </a:r>
-            <a:br>
-              <a:rPr lang="en-US" dirty="0"/>
-            </a:br>
-            <a:br>
-              <a:rPr lang="en-US" dirty="0"/>
-            </a:br>
-            <a:r>
-              <a:rPr lang="en-US" dirty="0"/>
-              <a:t>Pre-fetching:</a:t>
-            </a:r>
-          </a:p>
-          <a:p>
-            <a:endParaRPr lang="en-US" dirty="0"/>
-          </a:p>
-          <a:p>
-            <a:r>
-              <a:rPr lang="en-US" dirty="0"/>
-              <a:t>var items = await _</a:t>
-            </a:r>
-            <a:r>
-              <a:rPr lang="en-US" dirty="0" err="1"/>
-              <a:t>db.Items.Include</a:t>
-            </a:r>
-            <a:r>
-              <a:rPr lang="en-US" dirty="0"/>
-              <a:t>(x =&gt; </a:t>
-            </a:r>
-            <a:r>
-              <a:rPr lang="en-US" dirty="0" err="1"/>
-              <a:t>x.Category</a:t>
-            </a:r>
-            <a:r>
-              <a:rPr lang="en-US" dirty="0"/>
-              <a:t>)</a:t>
-            </a:r>
-          </a:p>
-          <a:p>
-            <a:r>
-              <a:rPr lang="en-US" dirty="0"/>
-              <a:t>    .</a:t>
-            </a:r>
-            <a:r>
-              <a:rPr lang="en-US" dirty="0" err="1"/>
-              <a:t>GroupBy</a:t>
-            </a:r>
-            <a:r>
-              <a:rPr lang="en-US" dirty="0"/>
-              <a:t>(</a:t>
-            </a:r>
-            <a:r>
-              <a:rPr lang="en-US" dirty="0" err="1"/>
-              <a:t>i</a:t>
-            </a:r>
-            <a:r>
-              <a:rPr lang="en-US" dirty="0"/>
-              <a:t> =&gt; new { </a:t>
-            </a:r>
-            <a:r>
-              <a:rPr lang="en-US" dirty="0" err="1"/>
-              <a:t>i.ItemName</a:t>
-            </a:r>
-            <a:r>
-              <a:rPr lang="en-US" dirty="0"/>
-              <a:t>, </a:t>
-            </a:r>
-            <a:r>
-              <a:rPr lang="en-US" dirty="0" err="1"/>
-              <a:t>i.Category.CategoryName</a:t>
-            </a:r>
-            <a:r>
-              <a:rPr lang="en-US" dirty="0"/>
-              <a:t> })</a:t>
-            </a:r>
-          </a:p>
-          <a:p>
-            <a:r>
-              <a:rPr lang="en-US" dirty="0"/>
-              <a:t>    .</a:t>
-            </a:r>
-            <a:r>
-              <a:rPr lang="en-US" b="1" dirty="0" err="1"/>
-              <a:t>AsAsyncEnumerable</a:t>
-            </a:r>
-            <a:r>
-              <a:rPr lang="en-US" dirty="0"/>
-              <a:t>()</a:t>
-            </a:r>
-          </a:p>
-          <a:p>
-            <a:r>
-              <a:rPr lang="en-US" dirty="0"/>
-              <a:t>    .Select(g =&gt; </a:t>
-            </a:r>
-            <a:r>
-              <a:rPr lang="en-US" dirty="0" err="1"/>
-              <a:t>g.First</a:t>
-            </a:r>
-            <a:r>
-              <a:rPr lang="en-US" dirty="0"/>
-              <a:t>())</a:t>
-            </a:r>
-          </a:p>
-          <a:p>
-            <a:r>
-              <a:rPr lang="en-US" dirty="0"/>
-              <a:t>    .</a:t>
-            </a:r>
-            <a:r>
-              <a:rPr lang="en-US" dirty="0" err="1"/>
-              <a:t>OrderBy</a:t>
-            </a:r>
-            <a:r>
-              <a:rPr lang="en-US" dirty="0"/>
-              <a:t>(</a:t>
-            </a:r>
-            <a:r>
-              <a:rPr lang="en-US" dirty="0" err="1"/>
-              <a:t>i</a:t>
-            </a:r>
-            <a:r>
-              <a:rPr lang="en-US" dirty="0"/>
-              <a:t> =&gt; </a:t>
-            </a:r>
-            <a:r>
-              <a:rPr lang="en-US" dirty="0" err="1"/>
-              <a:t>i.Category.CategoryName</a:t>
-            </a:r>
-            <a:r>
-              <a:rPr lang="en-US" dirty="0"/>
-              <a:t>)</a:t>
-            </a:r>
-          </a:p>
-          <a:p>
-            <a:r>
-              <a:rPr lang="en-US" dirty="0"/>
-              <a:t>    .Take(</a:t>
-            </a:r>
-            <a:r>
-              <a:rPr lang="en-US" dirty="0" err="1"/>
-              <a:t>howMany</a:t>
-            </a:r>
-            <a:r>
-              <a:rPr lang="en-US" dirty="0"/>
-              <a:t>)</a:t>
-            </a:r>
-          </a:p>
-          <a:p>
-            <a:r>
-              <a:rPr lang="en-US" dirty="0"/>
-              <a:t>    .</a:t>
-            </a:r>
-            <a:r>
-              <a:rPr lang="en-US" b="1" dirty="0" err="1"/>
-              <a:t>ToListAsync</a:t>
-            </a:r>
-            <a:r>
-              <a:rPr lang="en-US" dirty="0"/>
-              <a:t>();</a:t>
-            </a:r>
-          </a:p>
-        </p:txBody>
-      </p:sp>
-    </p:spTree>
-    <p:extLst>
-      <p:ext uri="{BB962C8B-B14F-4D97-AF65-F5344CB8AC3E}">
-        <p14:creationId xmlns:p14="http://schemas.microsoft.com/office/powerpoint/2010/main" val="3285649146"/>
       </p:ext>
     </p:extLst>
   </p:cSld>
@@ -7629,6 +8013,253 @@
           <p:cNvPr id="2" name="Title 1">
             <a:extLst>
               <a:ext uri="{FF2B5EF4-FFF2-40B4-BE49-F238E27FC236}">
+                <a16:creationId xmlns:a16="http://schemas.microsoft.com/office/drawing/2014/main" id="{A4541693-0CAB-3F14-1A29-180BECC78B43}"/>
+              </a:ext>
+            </a:extLst>
+          </p:cNvPr>
+          <p:cNvSpPr>
+            <a:spLocks noGrp="1"/>
+          </p:cNvSpPr>
+          <p:nvPr>
+            <p:ph type="title"/>
+          </p:nvPr>
+        </p:nvSpPr>
+        <p:spPr/>
+        <p:txBody>
+          <a:bodyPr/>
+          <a:lstStyle/>
+          <a:p>
+            <a:r>
+              <a:rPr lang="en-US" dirty="0"/>
+              <a:t>Pre-fetching data; Operations on Client-side</a:t>
+            </a:r>
+          </a:p>
+        </p:txBody>
+      </p:sp>
+      <p:sp>
+        <p:nvSpPr>
+          <p:cNvPr id="3" name="Content Placeholder 2">
+            <a:extLst>
+              <a:ext uri="{FF2B5EF4-FFF2-40B4-BE49-F238E27FC236}">
+                <a16:creationId xmlns:a16="http://schemas.microsoft.com/office/drawing/2014/main" id="{BC01D48E-6232-CCC3-1B0C-B89C2FC91ACE}"/>
+              </a:ext>
+            </a:extLst>
+          </p:cNvPr>
+          <p:cNvSpPr>
+            <a:spLocks noGrp="1"/>
+          </p:cNvSpPr>
+          <p:nvPr>
+            <p:ph idx="1"/>
+          </p:nvPr>
+        </p:nvSpPr>
+        <p:spPr/>
+        <p:txBody>
+          <a:bodyPr>
+            <a:normAutofit fontScale="70000" lnSpcReduction="20000"/>
+          </a:bodyPr>
+          <a:lstStyle/>
+          <a:p>
+            <a:r>
+              <a:rPr lang="en-US" dirty="0"/>
+              <a:t>In most cases, you would rather get the data up front and then work with it, rather than getting data and then sorting and/or filtering on the client side.</a:t>
+            </a:r>
+            <a:br>
+              <a:rPr lang="en-US" dirty="0"/>
+            </a:br>
+            <a:br>
+              <a:rPr lang="en-US" dirty="0"/>
+            </a:br>
+            <a:r>
+              <a:rPr lang="en-US" dirty="0"/>
+              <a:t>Pre-fetching:</a:t>
+            </a:r>
+          </a:p>
+          <a:p>
+            <a:endParaRPr lang="en-US" dirty="0"/>
+          </a:p>
+          <a:p>
+            <a:r>
+              <a:rPr lang="en-US" dirty="0"/>
+              <a:t>var items = await _</a:t>
+            </a:r>
+            <a:r>
+              <a:rPr lang="en-US" dirty="0" err="1"/>
+              <a:t>db.Items.Include</a:t>
+            </a:r>
+            <a:r>
+              <a:rPr lang="en-US" dirty="0"/>
+              <a:t>(x =&gt; </a:t>
+            </a:r>
+            <a:r>
+              <a:rPr lang="en-US" dirty="0" err="1"/>
+              <a:t>x.Category</a:t>
+            </a:r>
+            <a:r>
+              <a:rPr lang="en-US" dirty="0"/>
+              <a:t>)</a:t>
+            </a:r>
+          </a:p>
+          <a:p>
+            <a:r>
+              <a:rPr lang="en-US" dirty="0"/>
+              <a:t>    .</a:t>
+            </a:r>
+            <a:r>
+              <a:rPr lang="en-US" dirty="0" err="1"/>
+              <a:t>GroupBy</a:t>
+            </a:r>
+            <a:r>
+              <a:rPr lang="en-US" dirty="0"/>
+              <a:t>(</a:t>
+            </a:r>
+            <a:r>
+              <a:rPr lang="en-US" dirty="0" err="1"/>
+              <a:t>i</a:t>
+            </a:r>
+            <a:r>
+              <a:rPr lang="en-US" dirty="0"/>
+              <a:t> =&gt; new { </a:t>
+            </a:r>
+            <a:r>
+              <a:rPr lang="en-US" dirty="0" err="1"/>
+              <a:t>i.ItemName</a:t>
+            </a:r>
+            <a:r>
+              <a:rPr lang="en-US" dirty="0"/>
+              <a:t>, </a:t>
+            </a:r>
+            <a:r>
+              <a:rPr lang="en-US" dirty="0" err="1"/>
+              <a:t>i.Category.CategoryName</a:t>
+            </a:r>
+            <a:r>
+              <a:rPr lang="en-US" dirty="0"/>
+              <a:t> })</a:t>
+            </a:r>
+          </a:p>
+          <a:p>
+            <a:r>
+              <a:rPr lang="en-US" dirty="0"/>
+              <a:t>    .</a:t>
+            </a:r>
+            <a:r>
+              <a:rPr lang="en-US" b="1" dirty="0" err="1"/>
+              <a:t>AsAsyncEnumerable</a:t>
+            </a:r>
+            <a:r>
+              <a:rPr lang="en-US" dirty="0"/>
+              <a:t>()</a:t>
+            </a:r>
+          </a:p>
+          <a:p>
+            <a:r>
+              <a:rPr lang="en-US" dirty="0"/>
+              <a:t>    .Select(g =&gt; </a:t>
+            </a:r>
+            <a:r>
+              <a:rPr lang="en-US" dirty="0" err="1"/>
+              <a:t>g.First</a:t>
+            </a:r>
+            <a:r>
+              <a:rPr lang="en-US" dirty="0"/>
+              <a:t>())</a:t>
+            </a:r>
+          </a:p>
+          <a:p>
+            <a:r>
+              <a:rPr lang="en-US" dirty="0"/>
+              <a:t>    .</a:t>
+            </a:r>
+            <a:r>
+              <a:rPr lang="en-US" dirty="0" err="1"/>
+              <a:t>OrderBy</a:t>
+            </a:r>
+            <a:r>
+              <a:rPr lang="en-US" dirty="0"/>
+              <a:t>(</a:t>
+            </a:r>
+            <a:r>
+              <a:rPr lang="en-US" dirty="0" err="1"/>
+              <a:t>i</a:t>
+            </a:r>
+            <a:r>
+              <a:rPr lang="en-US" dirty="0"/>
+              <a:t> =&gt; </a:t>
+            </a:r>
+            <a:r>
+              <a:rPr lang="en-US" dirty="0" err="1"/>
+              <a:t>i.Category.CategoryName</a:t>
+            </a:r>
+            <a:r>
+              <a:rPr lang="en-US" dirty="0"/>
+              <a:t>)</a:t>
+            </a:r>
+          </a:p>
+          <a:p>
+            <a:r>
+              <a:rPr lang="en-US" dirty="0"/>
+              <a:t>    .Take(</a:t>
+            </a:r>
+            <a:r>
+              <a:rPr lang="en-US" dirty="0" err="1"/>
+              <a:t>howMany</a:t>
+            </a:r>
+            <a:r>
+              <a:rPr lang="en-US" dirty="0"/>
+              <a:t>)</a:t>
+            </a:r>
+          </a:p>
+          <a:p>
+            <a:r>
+              <a:rPr lang="en-US" dirty="0"/>
+              <a:t>    .</a:t>
+            </a:r>
+            <a:r>
+              <a:rPr lang="en-US" b="1" dirty="0" err="1"/>
+              <a:t>ToListAsync</a:t>
+            </a:r>
+            <a:r>
+              <a:rPr lang="en-US" dirty="0"/>
+              <a:t>();</a:t>
+            </a:r>
+          </a:p>
+        </p:txBody>
+      </p:sp>
+    </p:spTree>
+    <p:extLst>
+      <p:ext uri="{BB962C8B-B14F-4D97-AF65-F5344CB8AC3E}">
+        <p14:creationId xmlns:p14="http://schemas.microsoft.com/office/powerpoint/2010/main" val="3285649146"/>
+      </p:ext>
+    </p:extLst>
+  </p:cSld>
+  <p:clrMapOvr>
+    <a:masterClrMapping/>
+  </p:clrMapOvr>
+</p:sld>
+</file>
+
+<file path=ppt/slides/slide34.xml><?xml version="1.0" encoding="utf-8"?>
+<p:sld xmlns:a="http://schemas.openxmlformats.org/drawingml/2006/main" xmlns:r="http://schemas.openxmlformats.org/officeDocument/2006/relationships" xmlns:p="http://schemas.openxmlformats.org/presentationml/2006/main">
+  <p:cSld>
+    <p:spTree>
+      <p:nvGrpSpPr>
+        <p:cNvPr id="1" name=""/>
+        <p:cNvGrpSpPr/>
+        <p:nvPr/>
+      </p:nvGrpSpPr>
+      <p:grpSpPr>
+        <a:xfrm>
+          <a:off x="0" y="0"/>
+          <a:ext cx="0" cy="0"/>
+          <a:chOff x="0" y="0"/>
+          <a:chExt cx="0" cy="0"/>
+        </a:xfrm>
+      </p:grpSpPr>
+      <p:sp>
+        <p:nvSpPr>
+          <p:cNvPr id="2" name="Title 1">
+            <a:extLst>
+              <a:ext uri="{FF2B5EF4-FFF2-40B4-BE49-F238E27FC236}">
                 <a16:creationId xmlns:a16="http://schemas.microsoft.com/office/drawing/2014/main" id="{DC96C0CC-B003-75F2-37F0-721C9A78F671}"/>
               </a:ext>
             </a:extLst>
@@ -7857,7 +8488,7 @@
 </p:sld>
 </file>
 
-<file path=ppt/slides/slide34.xml><?xml version="1.0" encoding="utf-8"?>
+<file path=ppt/slides/slide35.xml><?xml version="1.0" encoding="utf-8"?>
 <p:sld xmlns:a="http://schemas.openxmlformats.org/drawingml/2006/main" xmlns:r="http://schemas.openxmlformats.org/officeDocument/2006/relationships" xmlns:p="http://schemas.openxmlformats.org/presentationml/2006/main">
   <p:cSld>
     <p:spTree>
@@ -7950,401 +8581,6 @@
     <p:extLst>
       <p:ext uri="{BB962C8B-B14F-4D97-AF65-F5344CB8AC3E}">
         <p14:creationId xmlns:p14="http://schemas.microsoft.com/office/powerpoint/2010/main" val="736065039"/>
-      </p:ext>
-    </p:extLst>
-  </p:cSld>
-  <p:clrMapOvr>
-    <a:masterClrMapping/>
-  </p:clrMapOvr>
-</p:sld>
-</file>
-
-<file path=ppt/slides/slide35.xml><?xml version="1.0" encoding="utf-8"?>
-<p:sld xmlns:a="http://schemas.openxmlformats.org/drawingml/2006/main" xmlns:r="http://schemas.openxmlformats.org/officeDocument/2006/relationships" xmlns:p="http://schemas.openxmlformats.org/presentationml/2006/main">
-  <p:cSld>
-    <p:spTree>
-      <p:nvGrpSpPr>
-        <p:cNvPr id="1" name=""/>
-        <p:cNvGrpSpPr/>
-        <p:nvPr/>
-      </p:nvGrpSpPr>
-      <p:grpSpPr>
-        <a:xfrm>
-          <a:off x="0" y="0"/>
-          <a:ext cx="0" cy="0"/>
-          <a:chOff x="0" y="0"/>
-          <a:chExt cx="0" cy="0"/>
-        </a:xfrm>
-      </p:grpSpPr>
-      <p:sp>
-        <p:nvSpPr>
-          <p:cNvPr id="2" name="Title 1">
-            <a:extLst>
-              <a:ext uri="{FF2B5EF4-FFF2-40B4-BE49-F238E27FC236}">
-                <a16:creationId xmlns:a16="http://schemas.microsoft.com/office/drawing/2014/main" id="{E22BA6AF-5130-8954-1070-903CB52CCA0F}"/>
-              </a:ext>
-            </a:extLst>
-          </p:cNvPr>
-          <p:cNvSpPr>
-            <a:spLocks noGrp="1"/>
-          </p:cNvSpPr>
-          <p:nvPr>
-            <p:ph type="title"/>
-          </p:nvPr>
-        </p:nvSpPr>
-        <p:spPr/>
-        <p:txBody>
-          <a:bodyPr/>
-          <a:lstStyle/>
-          <a:p>
-            <a:r>
-              <a:rPr lang="en-US" dirty="0"/>
-              <a:t>Using </a:t>
-            </a:r>
-            <a:r>
-              <a:rPr lang="en-US" dirty="0" err="1"/>
-              <a:t>GroupJoin</a:t>
-            </a:r>
-            <a:r>
-              <a:rPr lang="en-US" dirty="0"/>
-              <a:t> with Grouping</a:t>
-            </a:r>
-          </a:p>
-        </p:txBody>
-      </p:sp>
-      <p:sp>
-        <p:nvSpPr>
-          <p:cNvPr id="3" name="Content Placeholder 2">
-            <a:extLst>
-              <a:ext uri="{FF2B5EF4-FFF2-40B4-BE49-F238E27FC236}">
-                <a16:creationId xmlns:a16="http://schemas.microsoft.com/office/drawing/2014/main" id="{D93E08F7-CE0D-07E0-080C-3C1EBAFEBB48}"/>
-              </a:ext>
-            </a:extLst>
-          </p:cNvPr>
-          <p:cNvSpPr>
-            <a:spLocks noGrp="1"/>
-          </p:cNvSpPr>
-          <p:nvPr>
-            <p:ph idx="1"/>
-          </p:nvPr>
-        </p:nvSpPr>
-        <p:spPr/>
-        <p:txBody>
-          <a:bodyPr>
-            <a:normAutofit fontScale="47500" lnSpcReduction="20000"/>
-          </a:bodyPr>
-          <a:lstStyle/>
-          <a:p>
-            <a:r>
-              <a:rPr lang="en-US" dirty="0"/>
-              <a:t>var </a:t>
-            </a:r>
-            <a:r>
-              <a:rPr lang="en-US" dirty="0" err="1"/>
-              <a:t>cdr</a:t>
-            </a:r>
-            <a:r>
-              <a:rPr lang="en-US" dirty="0"/>
-              <a:t> = _</a:t>
-            </a:r>
-            <a:r>
-              <a:rPr lang="en-US" dirty="0" err="1"/>
-              <a:t>db.Contributors</a:t>
-            </a:r>
-            <a:endParaRPr lang="en-US" dirty="0"/>
-          </a:p>
-          <a:p>
-            <a:r>
-              <a:rPr lang="en-US" dirty="0"/>
-              <a:t>    .</a:t>
-            </a:r>
-            <a:r>
-              <a:rPr lang="en-US" b="1" dirty="0" err="1"/>
-              <a:t>GroupJoin</a:t>
-            </a:r>
-            <a:r>
-              <a:rPr lang="en-US" dirty="0"/>
-              <a:t>(</a:t>
-            </a:r>
-          </a:p>
-          <a:p>
-            <a:r>
-              <a:rPr lang="en-US" dirty="0"/>
-              <a:t>        _</a:t>
-            </a:r>
-            <a:r>
-              <a:rPr lang="en-US" dirty="0" err="1"/>
-              <a:t>db.ItemContributors</a:t>
-            </a:r>
-            <a:r>
-              <a:rPr lang="en-US" dirty="0"/>
-              <a:t>,</a:t>
-            </a:r>
-          </a:p>
-          <a:p>
-            <a:r>
-              <a:rPr lang="en-US" dirty="0"/>
-              <a:t>        c =&gt; </a:t>
-            </a:r>
-            <a:r>
-              <a:rPr lang="en-US" dirty="0" err="1"/>
-              <a:t>c.Id</a:t>
-            </a:r>
-            <a:r>
-              <a:rPr lang="en-US" dirty="0"/>
-              <a:t>,</a:t>
-            </a:r>
-          </a:p>
-          <a:p>
-            <a:r>
-              <a:rPr lang="en-US" dirty="0"/>
-              <a:t>        </a:t>
-            </a:r>
-            <a:r>
-              <a:rPr lang="en-US" dirty="0" err="1"/>
-              <a:t>ic</a:t>
-            </a:r>
-            <a:r>
-              <a:rPr lang="en-US" dirty="0"/>
-              <a:t> =&gt; </a:t>
-            </a:r>
-            <a:r>
-              <a:rPr lang="en-US" dirty="0" err="1"/>
-              <a:t>ic.ContributorId</a:t>
-            </a:r>
-            <a:r>
-              <a:rPr lang="en-US" dirty="0"/>
-              <a:t>,</a:t>
-            </a:r>
-          </a:p>
-          <a:p>
-            <a:r>
-              <a:rPr lang="en-US" dirty="0"/>
-              <a:t>        (c, </a:t>
-            </a:r>
-            <a:r>
-              <a:rPr lang="en-US" dirty="0" err="1"/>
-              <a:t>ics</a:t>
-            </a:r>
-            <a:r>
-              <a:rPr lang="en-US" dirty="0"/>
-              <a:t>) =&gt; new { Contributor = c, </a:t>
-            </a:r>
-            <a:r>
-              <a:rPr lang="en-US" dirty="0" err="1"/>
-              <a:t>ItemContributors</a:t>
-            </a:r>
-            <a:r>
-              <a:rPr lang="en-US" dirty="0"/>
-              <a:t> = </a:t>
-            </a:r>
-            <a:r>
-              <a:rPr lang="en-US" dirty="0" err="1"/>
-              <a:t>ics</a:t>
-            </a:r>
-            <a:r>
-              <a:rPr lang="en-US" dirty="0"/>
-              <a:t> }</a:t>
-            </a:r>
-          </a:p>
-          <a:p>
-            <a:r>
-              <a:rPr lang="en-US" dirty="0"/>
-              <a:t>    )</a:t>
-            </a:r>
-          </a:p>
-          <a:p>
-            <a:r>
-              <a:rPr lang="en-US" dirty="0"/>
-              <a:t>    .</a:t>
-            </a:r>
-            <a:r>
-              <a:rPr lang="en-US" b="1" dirty="0" err="1"/>
-              <a:t>SelectMany</a:t>
-            </a:r>
-            <a:r>
-              <a:rPr lang="en-US" dirty="0"/>
-              <a:t>(</a:t>
-            </a:r>
-          </a:p>
-          <a:p>
-            <a:r>
-              <a:rPr lang="en-US" dirty="0"/>
-              <a:t>        x =&gt; </a:t>
-            </a:r>
-            <a:r>
-              <a:rPr lang="en-US" dirty="0" err="1"/>
-              <a:t>x.ItemContributors.DefaultIfEmpty</a:t>
-            </a:r>
-            <a:r>
-              <a:rPr lang="en-US" dirty="0"/>
-              <a:t>(),</a:t>
-            </a:r>
-          </a:p>
-          <a:p>
-            <a:r>
-              <a:rPr lang="en-US" dirty="0"/>
-              <a:t>        (x, </a:t>
-            </a:r>
-            <a:r>
-              <a:rPr lang="en-US" dirty="0" err="1"/>
-              <a:t>ic</a:t>
-            </a:r>
-            <a:r>
-              <a:rPr lang="en-US" dirty="0"/>
-              <a:t>) =&gt; new { </a:t>
-            </a:r>
-            <a:r>
-              <a:rPr lang="en-US" dirty="0" err="1"/>
-              <a:t>x.Contributor</a:t>
-            </a:r>
-            <a:r>
-              <a:rPr lang="en-US" dirty="0"/>
-              <a:t>, </a:t>
-            </a:r>
-            <a:r>
-              <a:rPr lang="en-US" dirty="0" err="1"/>
-              <a:t>ItemContributor</a:t>
-            </a:r>
-            <a:r>
-              <a:rPr lang="en-US" dirty="0"/>
-              <a:t> = </a:t>
-            </a:r>
-            <a:r>
-              <a:rPr lang="en-US" dirty="0" err="1"/>
-              <a:t>ic</a:t>
-            </a:r>
-            <a:r>
-              <a:rPr lang="en-US" dirty="0"/>
-              <a:t> }</a:t>
-            </a:r>
-          </a:p>
-          <a:p>
-            <a:r>
-              <a:rPr lang="en-US" dirty="0"/>
-              <a:t>    )</a:t>
-            </a:r>
-          </a:p>
-          <a:p>
-            <a:r>
-              <a:rPr lang="en-US" dirty="0"/>
-              <a:t>    .</a:t>
-            </a:r>
-            <a:r>
-              <a:rPr lang="en-US" b="1" dirty="0" err="1"/>
-              <a:t>GroupBy</a:t>
-            </a:r>
-            <a:r>
-              <a:rPr lang="en-US" dirty="0"/>
-              <a:t>(x =&gt; </a:t>
-            </a:r>
-            <a:r>
-              <a:rPr lang="en-US" dirty="0" err="1"/>
-              <a:t>x.Contributor</a:t>
-            </a:r>
-            <a:r>
-              <a:rPr lang="en-US" dirty="0"/>
-              <a:t>)</a:t>
-            </a:r>
-          </a:p>
-          <a:p>
-            <a:r>
-              <a:rPr lang="en-US" dirty="0"/>
-              <a:t>    .</a:t>
-            </a:r>
-            <a:r>
-              <a:rPr lang="en-US" b="1" dirty="0"/>
-              <a:t>Select</a:t>
-            </a:r>
-            <a:r>
-              <a:rPr lang="en-US" dirty="0"/>
-              <a:t>(g =&gt; new</a:t>
-            </a:r>
-          </a:p>
-          <a:p>
-            <a:r>
-              <a:rPr lang="en-US" dirty="0"/>
-              <a:t>    {</a:t>
-            </a:r>
-          </a:p>
-          <a:p>
-            <a:r>
-              <a:rPr lang="en-US" dirty="0"/>
-              <a:t>        </a:t>
-            </a:r>
-            <a:r>
-              <a:rPr lang="en-US" dirty="0" err="1"/>
-              <a:t>ContributorName</a:t>
-            </a:r>
-            <a:r>
-              <a:rPr lang="en-US" dirty="0"/>
-              <a:t> = </a:t>
-            </a:r>
-            <a:r>
-              <a:rPr lang="en-US" dirty="0" err="1"/>
-              <a:t>g.Key.ContributorName</a:t>
-            </a:r>
-            <a:r>
-              <a:rPr lang="en-US" dirty="0"/>
-              <a:t>,</a:t>
-            </a:r>
-          </a:p>
-          <a:p>
-            <a:r>
-              <a:rPr lang="en-US" dirty="0"/>
-              <a:t>        </a:t>
-            </a:r>
-            <a:r>
-              <a:rPr lang="en-US" dirty="0" err="1"/>
-              <a:t>ItemCount</a:t>
-            </a:r>
-            <a:r>
-              <a:rPr lang="en-US" dirty="0"/>
-              <a:t> = </a:t>
-            </a:r>
-            <a:r>
-              <a:rPr lang="en-US" dirty="0" err="1"/>
-              <a:t>g.Count</a:t>
-            </a:r>
-            <a:r>
-              <a:rPr lang="en-US" dirty="0"/>
-              <a:t>(x =&gt; </a:t>
-            </a:r>
-            <a:r>
-              <a:rPr lang="en-US" dirty="0" err="1"/>
-              <a:t>x.ItemContributor</a:t>
-            </a:r>
-            <a:r>
-              <a:rPr lang="en-US" dirty="0"/>
-              <a:t> != null)  // counts items safely</a:t>
-            </a:r>
-          </a:p>
-          <a:p>
-            <a:r>
-              <a:rPr lang="en-US" dirty="0"/>
-              <a:t>    })</a:t>
-            </a:r>
-          </a:p>
-          <a:p>
-            <a:r>
-              <a:rPr lang="en-US" dirty="0"/>
-              <a:t>    .</a:t>
-            </a:r>
-            <a:r>
-              <a:rPr lang="en-US" b="1" dirty="0" err="1"/>
-              <a:t>ToList</a:t>
-            </a:r>
-            <a:r>
-              <a:rPr lang="en-US" dirty="0"/>
-              <a:t>();</a:t>
-            </a:r>
-          </a:p>
-        </p:txBody>
-      </p:sp>
-    </p:spTree>
-    <p:extLst>
-      <p:ext uri="{BB962C8B-B14F-4D97-AF65-F5344CB8AC3E}">
-        <p14:creationId xmlns:p14="http://schemas.microsoft.com/office/powerpoint/2010/main" val="1205513938"/>
       </p:ext>
     </p:extLst>
   </p:cSld>
@@ -8376,6 +8612,401 @@
           <p:cNvPr id="2" name="Title 1">
             <a:extLst>
               <a:ext uri="{FF2B5EF4-FFF2-40B4-BE49-F238E27FC236}">
+                <a16:creationId xmlns:a16="http://schemas.microsoft.com/office/drawing/2014/main" id="{E22BA6AF-5130-8954-1070-903CB52CCA0F}"/>
+              </a:ext>
+            </a:extLst>
+          </p:cNvPr>
+          <p:cNvSpPr>
+            <a:spLocks noGrp="1"/>
+          </p:cNvSpPr>
+          <p:nvPr>
+            <p:ph type="title"/>
+          </p:nvPr>
+        </p:nvSpPr>
+        <p:spPr/>
+        <p:txBody>
+          <a:bodyPr/>
+          <a:lstStyle/>
+          <a:p>
+            <a:r>
+              <a:rPr lang="en-US" dirty="0"/>
+              <a:t>Using </a:t>
+            </a:r>
+            <a:r>
+              <a:rPr lang="en-US" dirty="0" err="1"/>
+              <a:t>GroupJoin</a:t>
+            </a:r>
+            <a:r>
+              <a:rPr lang="en-US" dirty="0"/>
+              <a:t> with Grouping</a:t>
+            </a:r>
+          </a:p>
+        </p:txBody>
+      </p:sp>
+      <p:sp>
+        <p:nvSpPr>
+          <p:cNvPr id="3" name="Content Placeholder 2">
+            <a:extLst>
+              <a:ext uri="{FF2B5EF4-FFF2-40B4-BE49-F238E27FC236}">
+                <a16:creationId xmlns:a16="http://schemas.microsoft.com/office/drawing/2014/main" id="{D93E08F7-CE0D-07E0-080C-3C1EBAFEBB48}"/>
+              </a:ext>
+            </a:extLst>
+          </p:cNvPr>
+          <p:cNvSpPr>
+            <a:spLocks noGrp="1"/>
+          </p:cNvSpPr>
+          <p:nvPr>
+            <p:ph idx="1"/>
+          </p:nvPr>
+        </p:nvSpPr>
+        <p:spPr/>
+        <p:txBody>
+          <a:bodyPr>
+            <a:normAutofit fontScale="47500" lnSpcReduction="20000"/>
+          </a:bodyPr>
+          <a:lstStyle/>
+          <a:p>
+            <a:r>
+              <a:rPr lang="en-US" dirty="0"/>
+              <a:t>var </a:t>
+            </a:r>
+            <a:r>
+              <a:rPr lang="en-US" dirty="0" err="1"/>
+              <a:t>cdr</a:t>
+            </a:r>
+            <a:r>
+              <a:rPr lang="en-US" dirty="0"/>
+              <a:t> = _</a:t>
+            </a:r>
+            <a:r>
+              <a:rPr lang="en-US" dirty="0" err="1"/>
+              <a:t>db.Contributors</a:t>
+            </a:r>
+            <a:endParaRPr lang="en-US" dirty="0"/>
+          </a:p>
+          <a:p>
+            <a:r>
+              <a:rPr lang="en-US" dirty="0"/>
+              <a:t>    .</a:t>
+            </a:r>
+            <a:r>
+              <a:rPr lang="en-US" b="1" dirty="0" err="1"/>
+              <a:t>GroupJoin</a:t>
+            </a:r>
+            <a:r>
+              <a:rPr lang="en-US" dirty="0"/>
+              <a:t>(</a:t>
+            </a:r>
+          </a:p>
+          <a:p>
+            <a:r>
+              <a:rPr lang="en-US" dirty="0"/>
+              <a:t>        _</a:t>
+            </a:r>
+            <a:r>
+              <a:rPr lang="en-US" dirty="0" err="1"/>
+              <a:t>db.ItemContributors</a:t>
+            </a:r>
+            <a:r>
+              <a:rPr lang="en-US" dirty="0"/>
+              <a:t>,</a:t>
+            </a:r>
+          </a:p>
+          <a:p>
+            <a:r>
+              <a:rPr lang="en-US" dirty="0"/>
+              <a:t>        c =&gt; </a:t>
+            </a:r>
+            <a:r>
+              <a:rPr lang="en-US" dirty="0" err="1"/>
+              <a:t>c.Id</a:t>
+            </a:r>
+            <a:r>
+              <a:rPr lang="en-US" dirty="0"/>
+              <a:t>,</a:t>
+            </a:r>
+          </a:p>
+          <a:p>
+            <a:r>
+              <a:rPr lang="en-US" dirty="0"/>
+              <a:t>        </a:t>
+            </a:r>
+            <a:r>
+              <a:rPr lang="en-US" dirty="0" err="1"/>
+              <a:t>ic</a:t>
+            </a:r>
+            <a:r>
+              <a:rPr lang="en-US" dirty="0"/>
+              <a:t> =&gt; </a:t>
+            </a:r>
+            <a:r>
+              <a:rPr lang="en-US" dirty="0" err="1"/>
+              <a:t>ic.ContributorId</a:t>
+            </a:r>
+            <a:r>
+              <a:rPr lang="en-US" dirty="0"/>
+              <a:t>,</a:t>
+            </a:r>
+          </a:p>
+          <a:p>
+            <a:r>
+              <a:rPr lang="en-US" dirty="0"/>
+              <a:t>        (c, </a:t>
+            </a:r>
+            <a:r>
+              <a:rPr lang="en-US" dirty="0" err="1"/>
+              <a:t>ics</a:t>
+            </a:r>
+            <a:r>
+              <a:rPr lang="en-US" dirty="0"/>
+              <a:t>) =&gt; new { Contributor = c, </a:t>
+            </a:r>
+            <a:r>
+              <a:rPr lang="en-US" dirty="0" err="1"/>
+              <a:t>ItemContributors</a:t>
+            </a:r>
+            <a:r>
+              <a:rPr lang="en-US" dirty="0"/>
+              <a:t> = </a:t>
+            </a:r>
+            <a:r>
+              <a:rPr lang="en-US" dirty="0" err="1"/>
+              <a:t>ics</a:t>
+            </a:r>
+            <a:r>
+              <a:rPr lang="en-US" dirty="0"/>
+              <a:t> }</a:t>
+            </a:r>
+          </a:p>
+          <a:p>
+            <a:r>
+              <a:rPr lang="en-US" dirty="0"/>
+              <a:t>    )</a:t>
+            </a:r>
+          </a:p>
+          <a:p>
+            <a:r>
+              <a:rPr lang="en-US" dirty="0"/>
+              <a:t>    .</a:t>
+            </a:r>
+            <a:r>
+              <a:rPr lang="en-US" b="1" dirty="0" err="1"/>
+              <a:t>SelectMany</a:t>
+            </a:r>
+            <a:r>
+              <a:rPr lang="en-US" dirty="0"/>
+              <a:t>(</a:t>
+            </a:r>
+          </a:p>
+          <a:p>
+            <a:r>
+              <a:rPr lang="en-US" dirty="0"/>
+              <a:t>        x =&gt; </a:t>
+            </a:r>
+            <a:r>
+              <a:rPr lang="en-US" dirty="0" err="1"/>
+              <a:t>x.ItemContributors.DefaultIfEmpty</a:t>
+            </a:r>
+            <a:r>
+              <a:rPr lang="en-US" dirty="0"/>
+              <a:t>(),</a:t>
+            </a:r>
+          </a:p>
+          <a:p>
+            <a:r>
+              <a:rPr lang="en-US" dirty="0"/>
+              <a:t>        (x, </a:t>
+            </a:r>
+            <a:r>
+              <a:rPr lang="en-US" dirty="0" err="1"/>
+              <a:t>ic</a:t>
+            </a:r>
+            <a:r>
+              <a:rPr lang="en-US" dirty="0"/>
+              <a:t>) =&gt; new { </a:t>
+            </a:r>
+            <a:r>
+              <a:rPr lang="en-US" dirty="0" err="1"/>
+              <a:t>x.Contributor</a:t>
+            </a:r>
+            <a:r>
+              <a:rPr lang="en-US" dirty="0"/>
+              <a:t>, </a:t>
+            </a:r>
+            <a:r>
+              <a:rPr lang="en-US" dirty="0" err="1"/>
+              <a:t>ItemContributor</a:t>
+            </a:r>
+            <a:r>
+              <a:rPr lang="en-US" dirty="0"/>
+              <a:t> = </a:t>
+            </a:r>
+            <a:r>
+              <a:rPr lang="en-US" dirty="0" err="1"/>
+              <a:t>ic</a:t>
+            </a:r>
+            <a:r>
+              <a:rPr lang="en-US" dirty="0"/>
+              <a:t> }</a:t>
+            </a:r>
+          </a:p>
+          <a:p>
+            <a:r>
+              <a:rPr lang="en-US" dirty="0"/>
+              <a:t>    )</a:t>
+            </a:r>
+          </a:p>
+          <a:p>
+            <a:r>
+              <a:rPr lang="en-US" dirty="0"/>
+              <a:t>    .</a:t>
+            </a:r>
+            <a:r>
+              <a:rPr lang="en-US" b="1" dirty="0" err="1"/>
+              <a:t>GroupBy</a:t>
+            </a:r>
+            <a:r>
+              <a:rPr lang="en-US" dirty="0"/>
+              <a:t>(x =&gt; </a:t>
+            </a:r>
+            <a:r>
+              <a:rPr lang="en-US" dirty="0" err="1"/>
+              <a:t>x.Contributor</a:t>
+            </a:r>
+            <a:r>
+              <a:rPr lang="en-US" dirty="0"/>
+              <a:t>)</a:t>
+            </a:r>
+          </a:p>
+          <a:p>
+            <a:r>
+              <a:rPr lang="en-US" dirty="0"/>
+              <a:t>    .</a:t>
+            </a:r>
+            <a:r>
+              <a:rPr lang="en-US" b="1" dirty="0"/>
+              <a:t>Select</a:t>
+            </a:r>
+            <a:r>
+              <a:rPr lang="en-US" dirty="0"/>
+              <a:t>(g =&gt; new</a:t>
+            </a:r>
+          </a:p>
+          <a:p>
+            <a:r>
+              <a:rPr lang="en-US" dirty="0"/>
+              <a:t>    {</a:t>
+            </a:r>
+          </a:p>
+          <a:p>
+            <a:r>
+              <a:rPr lang="en-US" dirty="0"/>
+              <a:t>        </a:t>
+            </a:r>
+            <a:r>
+              <a:rPr lang="en-US" dirty="0" err="1"/>
+              <a:t>ContributorName</a:t>
+            </a:r>
+            <a:r>
+              <a:rPr lang="en-US" dirty="0"/>
+              <a:t> = </a:t>
+            </a:r>
+            <a:r>
+              <a:rPr lang="en-US" dirty="0" err="1"/>
+              <a:t>g.Key.ContributorName</a:t>
+            </a:r>
+            <a:r>
+              <a:rPr lang="en-US" dirty="0"/>
+              <a:t>,</a:t>
+            </a:r>
+          </a:p>
+          <a:p>
+            <a:r>
+              <a:rPr lang="en-US" dirty="0"/>
+              <a:t>        </a:t>
+            </a:r>
+            <a:r>
+              <a:rPr lang="en-US" dirty="0" err="1"/>
+              <a:t>ItemCount</a:t>
+            </a:r>
+            <a:r>
+              <a:rPr lang="en-US" dirty="0"/>
+              <a:t> = </a:t>
+            </a:r>
+            <a:r>
+              <a:rPr lang="en-US" dirty="0" err="1"/>
+              <a:t>g.Count</a:t>
+            </a:r>
+            <a:r>
+              <a:rPr lang="en-US" dirty="0"/>
+              <a:t>(x =&gt; </a:t>
+            </a:r>
+            <a:r>
+              <a:rPr lang="en-US" dirty="0" err="1"/>
+              <a:t>x.ItemContributor</a:t>
+            </a:r>
+            <a:r>
+              <a:rPr lang="en-US" dirty="0"/>
+              <a:t> != null)  // counts items safely</a:t>
+            </a:r>
+          </a:p>
+          <a:p>
+            <a:r>
+              <a:rPr lang="en-US" dirty="0"/>
+              <a:t>    })</a:t>
+            </a:r>
+          </a:p>
+          <a:p>
+            <a:r>
+              <a:rPr lang="en-US" dirty="0"/>
+              <a:t>    .</a:t>
+            </a:r>
+            <a:r>
+              <a:rPr lang="en-US" b="1" dirty="0" err="1"/>
+              <a:t>ToList</a:t>
+            </a:r>
+            <a:r>
+              <a:rPr lang="en-US" dirty="0"/>
+              <a:t>();</a:t>
+            </a:r>
+          </a:p>
+        </p:txBody>
+      </p:sp>
+    </p:spTree>
+    <p:extLst>
+      <p:ext uri="{BB962C8B-B14F-4D97-AF65-F5344CB8AC3E}">
+        <p14:creationId xmlns:p14="http://schemas.microsoft.com/office/powerpoint/2010/main" val="1205513938"/>
+      </p:ext>
+    </p:extLst>
+  </p:cSld>
+  <p:clrMapOvr>
+    <a:masterClrMapping/>
+  </p:clrMapOvr>
+</p:sld>
+</file>
+
+<file path=ppt/slides/slide37.xml><?xml version="1.0" encoding="utf-8"?>
+<p:sld xmlns:a="http://schemas.openxmlformats.org/drawingml/2006/main" xmlns:r="http://schemas.openxmlformats.org/officeDocument/2006/relationships" xmlns:p="http://schemas.openxmlformats.org/presentationml/2006/main">
+  <p:cSld>
+    <p:spTree>
+      <p:nvGrpSpPr>
+        <p:cNvPr id="1" name=""/>
+        <p:cNvGrpSpPr/>
+        <p:nvPr/>
+      </p:nvGrpSpPr>
+      <p:grpSpPr>
+        <a:xfrm>
+          <a:off x="0" y="0"/>
+          <a:ext cx="0" cy="0"/>
+          <a:chOff x="0" y="0"/>
+          <a:chExt cx="0" cy="0"/>
+        </a:xfrm>
+      </p:grpSpPr>
+      <p:sp>
+        <p:nvSpPr>
+          <p:cNvPr id="2" name="Title 1">
+            <a:extLst>
+              <a:ext uri="{FF2B5EF4-FFF2-40B4-BE49-F238E27FC236}">
                 <a16:creationId xmlns:a16="http://schemas.microsoft.com/office/drawing/2014/main" id="{DBC8C15C-CF00-13B7-D0A3-872C91A1D7ED}"/>
               </a:ext>
             </a:extLst>
@@ -8669,7 +9300,7 @@
 </p:sld>
 </file>
 
-<file path=ppt/slides/slide37.xml><?xml version="1.0" encoding="utf-8"?>
+<file path=ppt/slides/slide38.xml><?xml version="1.0" encoding="utf-8"?>
 <p:sld xmlns:a="http://schemas.openxmlformats.org/drawingml/2006/main" xmlns:r="http://schemas.openxmlformats.org/officeDocument/2006/relationships" xmlns:p="http://schemas.openxmlformats.org/presentationml/2006/main">
   <p:cSld>
     <p:spTree>
@@ -8779,7 +9410,7 @@
 </p:sld>
 </file>
 
-<file path=ppt/slides/slide38.xml><?xml version="1.0" encoding="utf-8"?>
+<file path=ppt/slides/slide39.xml><?xml version="1.0" encoding="utf-8"?>
 <p:sld xmlns:a="http://schemas.openxmlformats.org/drawingml/2006/main" xmlns:r="http://schemas.openxmlformats.org/officeDocument/2006/relationships" xmlns:p="http://schemas.openxmlformats.org/presentationml/2006/main">
   <p:cSld>
     <p:spTree>
@@ -8840,61 +9471,6 @@
     <p:extLst>
       <p:ext uri="{BB962C8B-B14F-4D97-AF65-F5344CB8AC3E}">
         <p14:creationId xmlns:p14="http://schemas.microsoft.com/office/powerpoint/2010/main" val="1132259183"/>
-      </p:ext>
-    </p:extLst>
-  </p:cSld>
-  <p:clrMapOvr>
-    <a:masterClrMapping/>
-  </p:clrMapOvr>
-</p:sld>
-</file>
-
-<file path=ppt/slides/slide39.xml><?xml version="1.0" encoding="utf-8"?>
-<p:sld xmlns:a="http://schemas.openxmlformats.org/drawingml/2006/main" xmlns:r="http://schemas.openxmlformats.org/officeDocument/2006/relationships" xmlns:p="http://schemas.openxmlformats.org/presentationml/2006/main">
-  <p:cSld>
-    <p:spTree>
-      <p:nvGrpSpPr>
-        <p:cNvPr id="1" name=""/>
-        <p:cNvGrpSpPr/>
-        <p:nvPr/>
-      </p:nvGrpSpPr>
-      <p:grpSpPr>
-        <a:xfrm>
-          <a:off x="0" y="0"/>
-          <a:ext cx="0" cy="0"/>
-          <a:chOff x="0" y="0"/>
-          <a:chExt cx="0" cy="0"/>
-        </a:xfrm>
-      </p:grpSpPr>
-      <p:sp>
-        <p:nvSpPr>
-          <p:cNvPr id="2" name="Title 1">
-            <a:extLst>
-              <a:ext uri="{FF2B5EF4-FFF2-40B4-BE49-F238E27FC236}">
-                <a16:creationId xmlns:a16="http://schemas.microsoft.com/office/drawing/2014/main" id="{F26B4BB8-6D0C-1582-B592-8BB6DA5C9B8B}"/>
-              </a:ext>
-            </a:extLst>
-          </p:cNvPr>
-          <p:cNvSpPr>
-            <a:spLocks noGrp="1"/>
-          </p:cNvSpPr>
-          <p:nvPr>
-            <p:ph type="title"/>
-          </p:nvPr>
-        </p:nvSpPr>
-        <p:spPr/>
-        <p:txBody>
-          <a:bodyPr/>
-          <a:lstStyle/>
-          <a:p>
-            <a:endParaRPr lang="en-US" dirty="0"/>
-          </a:p>
-        </p:txBody>
-      </p:sp>
-    </p:spTree>
-    <p:extLst>
-      <p:ext uri="{BB962C8B-B14F-4D97-AF65-F5344CB8AC3E}">
-        <p14:creationId xmlns:p14="http://schemas.microsoft.com/office/powerpoint/2010/main" val="3531370197"/>
       </p:ext>
     </p:extLst>
   </p:cSld>
@@ -8923,61 +9499,562 @@
       </p:grpSpPr>
       <p:sp>
         <p:nvSpPr>
-          <p:cNvPr id="2" name="Title 1">
+          <p:cNvPr id="18" name="Title 17"/>
+          <p:cNvSpPr>
+            <a:spLocks noGrp="1"/>
+          </p:cNvSpPr>
+          <p:nvPr>
+            <p:ph type="title"/>
+          </p:nvPr>
+        </p:nvSpPr>
+        <p:spPr/>
+        <p:txBody>
+          <a:bodyPr/>
+          <a:lstStyle/>
+          <a:p>
+            <a:r>
+              <a:rPr lang="en-US"/>
+              <a:t>PASSMN – News/Info</a:t>
+            </a:r>
+          </a:p>
+        </p:txBody>
+      </p:sp>
+      <p:sp>
+        <p:nvSpPr>
+          <p:cNvPr id="19" name="Content Placeholder 18"/>
+          <p:cNvSpPr>
+            <a:spLocks noGrp="1"/>
+          </p:cNvSpPr>
+          <p:nvPr>
+            <p:ph idx="1"/>
+          </p:nvPr>
+        </p:nvSpPr>
+        <p:spPr/>
+        <p:txBody>
+          <a:bodyPr>
+            <a:normAutofit fontScale="92500" lnSpcReduction="20000"/>
+          </a:bodyPr>
+          <a:lstStyle/>
+          <a:p>
+            <a:r>
+              <a:rPr lang="en-US" sz="3500" b="1"/>
+              <a:t>Thanks to all our sponsors of 2025! </a:t>
+            </a:r>
+          </a:p>
+          <a:p>
+            <a:r>
+              <a:rPr lang="en-US" sz="2800"/>
+              <a:t>We need Speakers &amp; Sponsors for 2026 PASSMN Meetings!</a:t>
+            </a:r>
+            <a:endParaRPr lang="en-US" sz="2800">
+              <a:cs typeface="Segoe UI"/>
+            </a:endParaRPr>
+          </a:p>
+          <a:p>
+            <a:pPr marL="457200" indent="-457200">
+              <a:buFont typeface="Arial" panose="020B0604020202020204" pitchFamily="34" charset="0"/>
+              <a:buChar char="•"/>
+            </a:pPr>
+            <a:r>
+              <a:rPr lang="en-US" sz="2800"/>
+              <a:t>Speakers – email us at </a:t>
+            </a:r>
+            <a:r>
+              <a:rPr lang="en-US" sz="2800">
+                <a:hlinkClick r:id="rId2"/>
+              </a:rPr>
+              <a:t>speakers@passmn.com</a:t>
+            </a:r>
+            <a:endParaRPr lang="en-US" sz="2800">
+              <a:cs typeface="Segoe UI"/>
+            </a:endParaRPr>
+          </a:p>
+          <a:p>
+            <a:pPr marL="457200" indent="-457200">
+              <a:buFont typeface="Arial" panose="020B0604020202020204" pitchFamily="34" charset="0"/>
+              <a:buChar char="•"/>
+            </a:pPr>
+            <a:r>
+              <a:rPr lang="en-US" sz="2800">
+                <a:cs typeface="Segoe UI"/>
+              </a:rPr>
+              <a:t>Sponsors – email us at </a:t>
+            </a:r>
+            <a:r>
+              <a:rPr lang="en-US" sz="2800">
+                <a:cs typeface="Segoe UI"/>
+                <a:hlinkClick r:id="rId3"/>
+              </a:rPr>
+              <a:t>sponsors@passmn.com</a:t>
+            </a:r>
+            <a:endParaRPr lang="en-US" sz="2800">
+              <a:cs typeface="Segoe UI"/>
+            </a:endParaRPr>
+          </a:p>
+          <a:p>
+            <a:endParaRPr lang="en-US" sz="2800"/>
+          </a:p>
+          <a:p>
+            <a:r>
+              <a:rPr lang="en-US" sz="2800"/>
+              <a:t>Monthly Meetup: 3</a:t>
+            </a:r>
+            <a:r>
+              <a:rPr lang="en-US" sz="2800" baseline="30000"/>
+              <a:t>rd</a:t>
+            </a:r>
+            <a:r>
+              <a:rPr lang="en-US" sz="2800"/>
+              <a:t> Tuesday of Each Month </a:t>
+            </a:r>
+            <a:endParaRPr lang="en-US" sz="2800">
+              <a:cs typeface="Segoe UI"/>
+            </a:endParaRPr>
+          </a:p>
+          <a:p>
+            <a:r>
+              <a:rPr lang="en-US" sz="2800"/>
+              <a:t>Signup on Meetup:</a:t>
+            </a:r>
+            <a:r>
+              <a:rPr lang="en-US" sz="1900"/>
+              <a:t> </a:t>
+            </a:r>
+            <a:endParaRPr lang="en-US" sz="2800"/>
+          </a:p>
+          <a:p>
+            <a:r>
+              <a:rPr lang="en-US" sz="1900">
+                <a:hlinkClick r:id="rId4"/>
+              </a:rPr>
+              <a:t>https://www.meetup.com/MN-SQL-Server-User-Group-PASSMN/</a:t>
+            </a:r>
+            <a:endParaRPr lang="en-US" sz="2800">
+              <a:cs typeface="Segoe UI"/>
+            </a:endParaRPr>
+          </a:p>
+          <a:p>
+            <a:endParaRPr lang="en-US" sz="2800"/>
+          </a:p>
+          <a:p>
+            <a:r>
+              <a:rPr lang="en-US" sz="2800"/>
+              <a:t>Board Member Elections in Q4: </a:t>
+            </a:r>
+            <a:endParaRPr lang="en-US" sz="2800">
+              <a:cs typeface="Segoe UI"/>
+            </a:endParaRPr>
+          </a:p>
+          <a:p>
+            <a:pPr marL="571500" indent="-571500">
+              <a:buFont typeface="Arial" panose="020B0604020202020204" pitchFamily="34" charset="0"/>
+              <a:buChar char="•"/>
+            </a:pPr>
+            <a:r>
+              <a:rPr lang="en-US" sz="2800"/>
+              <a:t>Your chance to help the MN Data/SQL Community!</a:t>
+            </a:r>
+            <a:endParaRPr lang="en-US" sz="2800">
+              <a:cs typeface="Segoe UI"/>
+            </a:endParaRPr>
+          </a:p>
+          <a:p>
+            <a:pPr marL="1147445" lvl="1" indent="-571500">
+              <a:buFont typeface="Courier New" panose="020B0604020202020204" pitchFamily="34" charset="0"/>
+              <a:buChar char="o"/>
+            </a:pPr>
+            <a:r>
+              <a:rPr lang="en-US" sz="2400">
+                <a:ea typeface="+mn-lt"/>
+                <a:cs typeface="+mn-lt"/>
+                <a:hlinkClick r:id="rId5"/>
+              </a:rPr>
+              <a:t>https://forms.microsoft.com/r/qcjUg5Cwk4</a:t>
+            </a:r>
+            <a:endParaRPr lang="en-US" sz="2400">
+              <a:cs typeface="Segoe UI"/>
+            </a:endParaRPr>
+          </a:p>
+          <a:p>
+            <a:endParaRPr lang="en-US" sz="2800">
+              <a:solidFill>
+                <a:srgbClr val="414A54"/>
+              </a:solidFill>
+              <a:cs typeface="Segoe UI"/>
+            </a:endParaRPr>
+          </a:p>
+          <a:p>
+            <a:endParaRPr lang="en-US" sz="2800"/>
+          </a:p>
+          <a:p>
+            <a:endParaRPr lang="en-US" sz="2800"/>
+          </a:p>
+          <a:p>
+            <a:endParaRPr lang="en-US" sz="2800"/>
+          </a:p>
+        </p:txBody>
+      </p:sp>
+      <p:pic>
+        <p:nvPicPr>
+          <p:cNvPr id="4" name="Picture 3"/>
+          <p:cNvPicPr>
+            <a:picLocks noChangeAspect="1"/>
+          </p:cNvPicPr>
+          <p:nvPr/>
+        </p:nvPicPr>
+        <p:blipFill>
+          <a:blip r:embed="rId6"/>
+          <a:stretch>
+            <a:fillRect/>
+          </a:stretch>
+        </p:blipFill>
+        <p:spPr>
+          <a:xfrm>
+            <a:off x="7803172" y="200443"/>
+            <a:ext cx="3712369" cy="1237456"/>
+          </a:xfrm>
+          <a:prstGeom prst="rect">
+            <a:avLst/>
+          </a:prstGeom>
+        </p:spPr>
+      </p:pic>
+      <p:pic>
+        <p:nvPicPr>
+          <p:cNvPr id="2" name="Picture 1" descr="A qr code with a few black squares&#10;&#10;Description automatically generated">
             <a:extLst>
               <a:ext uri="{FF2B5EF4-FFF2-40B4-BE49-F238E27FC236}">
-                <a16:creationId xmlns:a16="http://schemas.microsoft.com/office/drawing/2014/main" id="{0C9398DB-FAEE-0221-6B45-4D6338BC2DF4}"/>
+                <a16:creationId xmlns:a16="http://schemas.microsoft.com/office/drawing/2014/main" id="{C7E78BB2-2CAC-6A8A-87D7-F876DC883671}"/>
               </a:ext>
             </a:extLst>
           </p:cNvPr>
-          <p:cNvSpPr>
-            <a:spLocks noGrp="1"/>
-          </p:cNvSpPr>
-          <p:nvPr>
-            <p:ph type="title"/>
-          </p:nvPr>
-        </p:nvSpPr>
-        <p:spPr/>
-        <p:txBody>
-          <a:bodyPr/>
-          <a:lstStyle/>
-          <a:p>
-            <a:r>
-              <a:rPr lang="en-US" dirty="0"/>
-              <a:t>Sponsor</a:t>
-            </a:r>
-          </a:p>
-        </p:txBody>
-      </p:sp>
-      <p:sp>
-        <p:nvSpPr>
-          <p:cNvPr id="3" name="Content Placeholder 2">
+          <p:cNvPicPr>
+            <a:picLocks noChangeAspect="1"/>
+          </p:cNvPicPr>
+          <p:nvPr/>
+        </p:nvPicPr>
+        <p:blipFill>
+          <a:blip r:embed="rId7"/>
+          <a:stretch>
+            <a:fillRect/>
+          </a:stretch>
+        </p:blipFill>
+        <p:spPr>
+          <a:xfrm>
+            <a:off x="7390467" y="3312772"/>
+            <a:ext cx="1118289" cy="1118272"/>
+          </a:xfrm>
+          <a:prstGeom prst="rect">
+            <a:avLst/>
+          </a:prstGeom>
+        </p:spPr>
+      </p:pic>
+      <p:pic>
+        <p:nvPicPr>
+          <p:cNvPr id="6" name="Picture 5" descr="A qr code on a white background&#10;&#10;AI-generated content may be incorrect.">
             <a:extLst>
               <a:ext uri="{FF2B5EF4-FFF2-40B4-BE49-F238E27FC236}">
-                <a16:creationId xmlns:a16="http://schemas.microsoft.com/office/drawing/2014/main" id="{F9FB13E0-2AE7-0343-E772-EF5BBC5EF4E8}"/>
+                <a16:creationId xmlns:a16="http://schemas.microsoft.com/office/drawing/2014/main" id="{5212F8BB-1833-0968-010F-D8321480AFD9}"/>
               </a:ext>
             </a:extLst>
           </p:cNvPr>
-          <p:cNvSpPr>
-            <a:spLocks noGrp="1"/>
-          </p:cNvSpPr>
-          <p:nvPr>
-            <p:ph idx="1"/>
-          </p:nvPr>
-        </p:nvSpPr>
-        <p:spPr/>
-        <p:txBody>
-          <a:bodyPr/>
-          <a:lstStyle/>
-          <a:p>
-            <a:endParaRPr lang="en-US"/>
-          </a:p>
-        </p:txBody>
-      </p:sp>
+          <p:cNvPicPr>
+            <a:picLocks noChangeAspect="1"/>
+          </p:cNvPicPr>
+          <p:nvPr/>
+        </p:nvPicPr>
+        <p:blipFill>
+          <a:blip r:embed="rId8"/>
+          <a:stretch>
+            <a:fillRect/>
+          </a:stretch>
+        </p:blipFill>
+        <p:spPr>
+          <a:xfrm>
+            <a:off x="9057017" y="4809641"/>
+            <a:ext cx="1301313" cy="1307894"/>
+          </a:xfrm>
+          <a:prstGeom prst="rect">
+            <a:avLst/>
+          </a:prstGeom>
+        </p:spPr>
+      </p:pic>
     </p:spTree>
     <p:extLst>
       <p:ext uri="{BB962C8B-B14F-4D97-AF65-F5344CB8AC3E}">
-        <p14:creationId xmlns:p14="http://schemas.microsoft.com/office/powerpoint/2010/main" val="3065772962"/>
+        <p14:creationId xmlns:p14="http://schemas.microsoft.com/office/powerpoint/2010/main" val="3906496023"/>
+      </p:ext>
+    </p:extLst>
+  </p:cSld>
+  <p:clrMapOvr>
+    <a:masterClrMapping/>
+  </p:clrMapOvr>
+</p:sld>
+</file>
+
+<file path=ppt/slides/slide40.xml><?xml version="1.0" encoding="utf-8"?>
+<p:sld xmlns:a="http://schemas.openxmlformats.org/drawingml/2006/main" xmlns:r="http://schemas.openxmlformats.org/officeDocument/2006/relationships" xmlns:p="http://schemas.openxmlformats.org/presentationml/2006/main">
+  <p:cSld>
+    <p:spTree>
+      <p:nvGrpSpPr>
+        <p:cNvPr id="1" name=""/>
+        <p:cNvGrpSpPr/>
+        <p:nvPr/>
+      </p:nvGrpSpPr>
+      <p:grpSpPr>
+        <a:xfrm>
+          <a:off x="0" y="0"/>
+          <a:ext cx="0" cy="0"/>
+          <a:chOff x="0" y="0"/>
+          <a:chExt cx="0" cy="0"/>
+        </a:xfrm>
+      </p:grpSpPr>
+      <p:sp>
+        <p:nvSpPr>
+          <p:cNvPr id="3" name="Title 1">
+            <a:extLst>
+              <a:ext uri="{FF2B5EF4-FFF2-40B4-BE49-F238E27FC236}">
+                <a16:creationId xmlns:a16="http://schemas.microsoft.com/office/drawing/2014/main" id="{848444DC-9A3E-F79E-08DD-40D585F5FFC0}"/>
+              </a:ext>
+            </a:extLst>
+          </p:cNvPr>
+          <p:cNvSpPr txBox="1">
+            <a:spLocks/>
+          </p:cNvSpPr>
+          <p:nvPr/>
+        </p:nvSpPr>
+        <p:spPr>
+          <a:xfrm>
+            <a:off x="1974485" y="389225"/>
+            <a:ext cx="8911687" cy="1280890"/>
+          </a:xfrm>
+          <a:prstGeom prst="rect">
+            <a:avLst/>
+          </a:prstGeom>
+        </p:spPr>
+        <p:txBody>
+          <a:bodyPr vert="horz" lIns="0" tIns="0" rIns="0" bIns="0" rtlCol="0" anchor="ctr">
+            <a:noAutofit/>
+          </a:bodyPr>
+          <a:lstStyle>
+            <a:lvl1pPr algn="r" defTabSz="576026" rtl="0" eaLnBrk="1" latinLnBrk="0" hangingPunct="1">
+              <a:spcBef>
+                <a:spcPct val="0"/>
+              </a:spcBef>
+              <a:buNone/>
+              <a:defRPr sz="6000" b="0" i="0" kern="1200" cap="none">
+                <a:solidFill>
+                  <a:schemeClr val="accent1"/>
+                </a:solidFill>
+                <a:latin typeface="+mj-lt"/>
+                <a:ea typeface="+mj-ea"/>
+                <a:cs typeface="Arial"/>
+              </a:defRPr>
+            </a:lvl1pPr>
+          </a:lstStyle>
+          <a:p>
+            <a:endParaRPr lang="en-US" dirty="0"/>
+          </a:p>
+        </p:txBody>
+      </p:sp>
+      <p:sp>
+        <p:nvSpPr>
+          <p:cNvPr id="4" name="TextBox 3">
+            <a:extLst>
+              <a:ext uri="{FF2B5EF4-FFF2-40B4-BE49-F238E27FC236}">
+                <a16:creationId xmlns:a16="http://schemas.microsoft.com/office/drawing/2014/main" id="{105C0753-A72F-6D76-1266-5919E9AAFDCE}"/>
+              </a:ext>
+            </a:extLst>
+          </p:cNvPr>
+          <p:cNvSpPr txBox="1"/>
+          <p:nvPr/>
+        </p:nvSpPr>
+        <p:spPr>
+          <a:xfrm>
+            <a:off x="6916861" y="1571896"/>
+            <a:ext cx="6096000" cy="369332"/>
+          </a:xfrm>
+          <a:prstGeom prst="rect">
+            <a:avLst/>
+          </a:prstGeom>
+          <a:noFill/>
+        </p:spPr>
+        <p:txBody>
+          <a:bodyPr wrap="square">
+            <a:spAutoFit/>
+          </a:bodyPr>
+          <a:lstStyle/>
+          <a:p>
+            <a:r>
+              <a:rPr lang="en-US" dirty="0"/>
+              <a:t>Thanks for having me today!</a:t>
+            </a:r>
+          </a:p>
+        </p:txBody>
+      </p:sp>
+      <p:sp>
+        <p:nvSpPr>
+          <p:cNvPr id="5" name="TextBox 4">
+            <a:extLst>
+              <a:ext uri="{FF2B5EF4-FFF2-40B4-BE49-F238E27FC236}">
+                <a16:creationId xmlns:a16="http://schemas.microsoft.com/office/drawing/2014/main" id="{15604741-BCDD-6B0B-8F06-DB6A05CD44D3}"/>
+              </a:ext>
+            </a:extLst>
+          </p:cNvPr>
+          <p:cNvSpPr txBox="1"/>
+          <p:nvPr/>
+        </p:nvSpPr>
+        <p:spPr>
+          <a:xfrm>
+            <a:off x="6876614" y="389225"/>
+            <a:ext cx="6572250" cy="369332"/>
+          </a:xfrm>
+          <a:prstGeom prst="rect">
+            <a:avLst/>
+          </a:prstGeom>
+          <a:noFill/>
+        </p:spPr>
+        <p:txBody>
+          <a:bodyPr wrap="square">
+            <a:spAutoFit/>
+          </a:bodyPr>
+          <a:lstStyle/>
+          <a:p>
+            <a:r>
+              <a:rPr lang="en-US" dirty="0"/>
+              <a:t>@blgorman</a:t>
+            </a:r>
+          </a:p>
+        </p:txBody>
+      </p:sp>
+      <p:sp>
+        <p:nvSpPr>
+          <p:cNvPr id="6" name="TextBox 5">
+            <a:extLst>
+              <a:ext uri="{FF2B5EF4-FFF2-40B4-BE49-F238E27FC236}">
+                <a16:creationId xmlns:a16="http://schemas.microsoft.com/office/drawing/2014/main" id="{369C4AAE-3882-7D7B-8A15-09263EC9C3A5}"/>
+              </a:ext>
+            </a:extLst>
+          </p:cNvPr>
+          <p:cNvSpPr txBox="1"/>
+          <p:nvPr/>
+        </p:nvSpPr>
+        <p:spPr>
+          <a:xfrm>
+            <a:off x="6916860" y="946873"/>
+            <a:ext cx="4524665" cy="369332"/>
+          </a:xfrm>
+          <a:prstGeom prst="rect">
+            <a:avLst/>
+          </a:prstGeom>
+          <a:noFill/>
+        </p:spPr>
+        <p:txBody>
+          <a:bodyPr wrap="square">
+            <a:spAutoFit/>
+          </a:bodyPr>
+          <a:lstStyle/>
+          <a:p>
+            <a:r>
+              <a:rPr lang="en-US" dirty="0"/>
+              <a:t>https://www.linkedin.com/in/brianlgorman</a:t>
+            </a:r>
+          </a:p>
+        </p:txBody>
+      </p:sp>
+      <p:pic>
+        <p:nvPicPr>
+          <p:cNvPr id="10" name="Picture 9">
+            <a:extLst>
+              <a:ext uri="{FF2B5EF4-FFF2-40B4-BE49-F238E27FC236}">
+                <a16:creationId xmlns:a16="http://schemas.microsoft.com/office/drawing/2014/main" id="{63FFAB6B-3611-D81E-7670-9AFA785A8004}"/>
+              </a:ext>
+            </a:extLst>
+          </p:cNvPr>
+          <p:cNvPicPr>
+            <a:picLocks noChangeAspect="1"/>
+          </p:cNvPicPr>
+          <p:nvPr/>
+        </p:nvPicPr>
+        <p:blipFill>
+          <a:blip r:embed="rId3"/>
+          <a:stretch>
+            <a:fillRect/>
+          </a:stretch>
+        </p:blipFill>
+        <p:spPr>
+          <a:xfrm>
+            <a:off x="445744" y="115965"/>
+            <a:ext cx="5647694" cy="3022089"/>
+          </a:xfrm>
+          <a:prstGeom prst="rect">
+            <a:avLst/>
+          </a:prstGeom>
+        </p:spPr>
+      </p:pic>
+      <p:pic>
+        <p:nvPicPr>
+          <p:cNvPr id="12" name="Picture 11">
+            <a:extLst>
+              <a:ext uri="{FF2B5EF4-FFF2-40B4-BE49-F238E27FC236}">
+                <a16:creationId xmlns:a16="http://schemas.microsoft.com/office/drawing/2014/main" id="{0424CAC2-6103-F436-FD5C-FDE5553F9CF2}"/>
+              </a:ext>
+            </a:extLst>
+          </p:cNvPr>
+          <p:cNvPicPr>
+            <a:picLocks noChangeAspect="1"/>
+          </p:cNvPicPr>
+          <p:nvPr/>
+        </p:nvPicPr>
+        <p:blipFill>
+          <a:blip r:embed="rId4"/>
+          <a:stretch>
+            <a:fillRect/>
+          </a:stretch>
+        </p:blipFill>
+        <p:spPr>
+          <a:xfrm>
+            <a:off x="0" y="3138054"/>
+            <a:ext cx="11520488" cy="3093262"/>
+          </a:xfrm>
+          <a:prstGeom prst="rect">
+            <a:avLst/>
+          </a:prstGeom>
+        </p:spPr>
+      </p:pic>
+      <p:pic>
+        <p:nvPicPr>
+          <p:cNvPr id="14" name="Picture 13">
+            <a:extLst>
+              <a:ext uri="{FF2B5EF4-FFF2-40B4-BE49-F238E27FC236}">
+                <a16:creationId xmlns:a16="http://schemas.microsoft.com/office/drawing/2014/main" id="{1B2333D3-F250-ABC0-CD90-5ED1B27F97A4}"/>
+              </a:ext>
+            </a:extLst>
+          </p:cNvPr>
+          <p:cNvPicPr>
+            <a:picLocks noChangeAspect="1"/>
+          </p:cNvPicPr>
+          <p:nvPr/>
+        </p:nvPicPr>
+        <p:blipFill>
+          <a:blip r:embed="rId5"/>
+          <a:stretch>
+            <a:fillRect/>
+          </a:stretch>
+        </p:blipFill>
+        <p:spPr>
+          <a:xfrm>
+            <a:off x="8260238" y="1941228"/>
+            <a:ext cx="3093262" cy="3093262"/>
+          </a:xfrm>
+          <a:prstGeom prst="rect">
+            <a:avLst/>
+          </a:prstGeom>
+        </p:spPr>
+      </p:pic>
+    </p:spTree>
+    <p:extLst>
+      <p:ext uri="{BB962C8B-B14F-4D97-AF65-F5344CB8AC3E}">
+        <p14:creationId xmlns:p14="http://schemas.microsoft.com/office/powerpoint/2010/main" val="3531370197"/>
       </p:ext>
     </p:extLst>
   </p:cSld>
@@ -9006,30 +10083,152 @@
       </p:grpSpPr>
       <p:sp>
         <p:nvSpPr>
-          <p:cNvPr id="2" name="Title 1"/>
-          <p:cNvSpPr>
-            <a:spLocks noGrp="1"/>
-          </p:cNvSpPr>
-          <p:nvPr>
-            <p:ph type="title"/>
-          </p:nvPr>
-        </p:nvSpPr>
-        <p:spPr/>
+          <p:cNvPr id="3" name="Content Placeholder 2"/>
+          <p:cNvSpPr>
+            <a:spLocks noGrp="1"/>
+          </p:cNvSpPr>
+          <p:nvPr>
+            <p:ph idx="1"/>
+          </p:nvPr>
+        </p:nvSpPr>
+        <p:spPr>
+          <a:xfrm>
+            <a:off x="176732" y="2032000"/>
+            <a:ext cx="11218689" cy="4087812"/>
+          </a:xfrm>
+        </p:spPr>
         <p:txBody>
           <a:bodyPr/>
           <a:lstStyle/>
           <a:p>
-            <a:r>
-              <a:rPr lang="en-US" dirty="0"/>
-              <a:t>Quick Project Overview</a:t>
-            </a:r>
-          </a:p>
-        </p:txBody>
-      </p:sp>
+            <a:pPr algn="ctr"/>
+            <a:r>
+              <a:rPr lang="en-US"/>
+              <a:t>Connect, share, &amp; learn with peers and thought leaders while celebrating all things data for a week of learning and networking opportunities.</a:t>
+            </a:r>
+          </a:p>
+          <a:p>
+            <a:pPr algn="ctr"/>
+            <a:r>
+              <a:rPr lang="en-US" b="1" dirty="0">
+                <a:cs typeface="Segoe UI"/>
+              </a:rPr>
+              <a:t>Use Code </a:t>
+            </a:r>
+            <a:r>
+              <a:rPr lang="en-US" b="1" dirty="0">
+                <a:solidFill>
+                  <a:srgbClr val="414A54"/>
+                </a:solidFill>
+                <a:ea typeface="+mn-lt"/>
+                <a:cs typeface="+mn-lt"/>
+              </a:rPr>
+              <a:t>UGRP007 for $150 off!!!</a:t>
+            </a:r>
+          </a:p>
+          <a:p>
+            <a:r>
+              <a:rPr lang="en-US"/>
+              <a:t>November 17</a:t>
+            </a:r>
+            <a:r>
+              <a:rPr lang="en-US" baseline="30000"/>
+              <a:t>th</a:t>
+            </a:r>
+            <a:r>
+              <a:rPr lang="en-US"/>
+              <a:t> Through November 21</a:t>
+            </a:r>
+            <a:r>
+              <a:rPr lang="en-US" baseline="30000"/>
+              <a:t>st</a:t>
+            </a:r>
+            <a:r>
+              <a:rPr lang="en-US"/>
+              <a:t> in Seattle, WA</a:t>
+            </a:r>
+            <a:endParaRPr lang="en-US">
+              <a:cs typeface="Segoe UI"/>
+            </a:endParaRPr>
+          </a:p>
+          <a:p>
+            <a:r>
+              <a:rPr lang="en-US" dirty="0">
+                <a:hlinkClick r:id="rId2"/>
+              </a:rPr>
+              <a:t>https://passdatacommunitysummit.com/</a:t>
+            </a:r>
+            <a:endParaRPr lang="en-US" dirty="0"/>
+          </a:p>
+          <a:p>
+            <a:endParaRPr lang="en-US"/>
+          </a:p>
+        </p:txBody>
+      </p:sp>
+      <p:pic>
+        <p:nvPicPr>
+          <p:cNvPr id="2" name="Picture 1" descr="A qr code with black squares&#10;&#10;Description automatically generated">
+            <a:extLst>
+              <a:ext uri="{FF2B5EF4-FFF2-40B4-BE49-F238E27FC236}">
+                <a16:creationId xmlns:a16="http://schemas.microsoft.com/office/drawing/2014/main" id="{8E78122A-629B-D168-7F15-31E04915AEEA}"/>
+              </a:ext>
+            </a:extLst>
+          </p:cNvPr>
+          <p:cNvPicPr>
+            <a:picLocks noChangeAspect="1"/>
+          </p:cNvPicPr>
+          <p:nvPr/>
+        </p:nvPicPr>
+        <p:blipFill>
+          <a:blip r:embed="rId3"/>
+          <a:stretch>
+            <a:fillRect/>
+          </a:stretch>
+        </p:blipFill>
+        <p:spPr>
+          <a:xfrm>
+            <a:off x="9706271" y="148449"/>
+            <a:ext cx="1566870" cy="1605076"/>
+          </a:xfrm>
+          <a:prstGeom prst="rect">
+            <a:avLst/>
+          </a:prstGeom>
+        </p:spPr>
+      </p:pic>
+      <p:pic>
+        <p:nvPicPr>
+          <p:cNvPr id="5" name="Picture 4" descr="Tickets and Prices - PASS Data Community Summit">
+            <a:extLst>
+              <a:ext uri="{FF2B5EF4-FFF2-40B4-BE49-F238E27FC236}">
+                <a16:creationId xmlns:a16="http://schemas.microsoft.com/office/drawing/2014/main" id="{5F6B4A58-8EAF-4DFD-A3ED-E5A18A828E7F}"/>
+              </a:ext>
+            </a:extLst>
+          </p:cNvPr>
+          <p:cNvPicPr>
+            <a:picLocks noChangeAspect="1"/>
+          </p:cNvPicPr>
+          <p:nvPr/>
+        </p:nvPicPr>
+        <p:blipFill>
+          <a:blip r:embed="rId4"/>
+          <a:stretch>
+            <a:fillRect/>
+          </a:stretch>
+        </p:blipFill>
+        <p:spPr>
+          <a:xfrm>
+            <a:off x="4388644" y="231926"/>
+            <a:ext cx="2743200" cy="1440180"/>
+          </a:xfrm>
+          <a:prstGeom prst="rect">
+            <a:avLst/>
+          </a:prstGeom>
+        </p:spPr>
+      </p:pic>
     </p:spTree>
     <p:extLst>
       <p:ext uri="{BB962C8B-B14F-4D97-AF65-F5344CB8AC3E}">
-        <p14:creationId xmlns:p14="http://schemas.microsoft.com/office/powerpoint/2010/main" val="148607444"/>
+        <p14:creationId xmlns:p14="http://schemas.microsoft.com/office/powerpoint/2010/main" val="2935899246"/>
       </p:ext>
     </p:extLst>
   </p:cSld>
@@ -9058,6 +10257,58 @@
       </p:grpSpPr>
       <p:sp>
         <p:nvSpPr>
+          <p:cNvPr id="2" name="Title 1"/>
+          <p:cNvSpPr>
+            <a:spLocks noGrp="1"/>
+          </p:cNvSpPr>
+          <p:nvPr>
+            <p:ph type="title"/>
+          </p:nvPr>
+        </p:nvSpPr>
+        <p:spPr/>
+        <p:txBody>
+          <a:bodyPr/>
+          <a:lstStyle/>
+          <a:p>
+            <a:r>
+              <a:rPr lang="en-US" dirty="0"/>
+              <a:t>Quick Project Overview</a:t>
+            </a:r>
+          </a:p>
+        </p:txBody>
+      </p:sp>
+    </p:spTree>
+    <p:extLst>
+      <p:ext uri="{BB962C8B-B14F-4D97-AF65-F5344CB8AC3E}">
+        <p14:creationId xmlns:p14="http://schemas.microsoft.com/office/powerpoint/2010/main" val="148607444"/>
+      </p:ext>
+    </p:extLst>
+  </p:cSld>
+  <p:clrMapOvr>
+    <a:masterClrMapping/>
+  </p:clrMapOvr>
+</p:sld>
+</file>
+
+<file path=ppt/slides/slide7.xml><?xml version="1.0" encoding="utf-8"?>
+<p:sld xmlns:a="http://schemas.openxmlformats.org/drawingml/2006/main" xmlns:r="http://schemas.openxmlformats.org/officeDocument/2006/relationships" xmlns:p="http://schemas.openxmlformats.org/presentationml/2006/main">
+  <p:cSld>
+    <p:spTree>
+      <p:nvGrpSpPr>
+        <p:cNvPr id="1" name=""/>
+        <p:cNvGrpSpPr/>
+        <p:nvPr/>
+      </p:nvGrpSpPr>
+      <p:grpSpPr>
+        <a:xfrm>
+          <a:off x="0" y="0"/>
+          <a:ext cx="0" cy="0"/>
+          <a:chOff x="0" y="0"/>
+          <a:chExt cx="0" cy="0"/>
+        </a:xfrm>
+      </p:grpSpPr>
+      <p:sp>
+        <p:nvSpPr>
           <p:cNvPr id="18" name="Title 17"/>
           <p:cNvSpPr>
             <a:spLocks noGrp="1"/>
@@ -9217,7 +10468,7 @@
 </p:sld>
 </file>
 
-<file path=ppt/slides/slide7.xml><?xml version="1.0" encoding="utf-8"?>
+<file path=ppt/slides/slide8.xml><?xml version="1.0" encoding="utf-8"?>
 <p:sld xmlns:a="http://schemas.openxmlformats.org/drawingml/2006/main" xmlns:r="http://schemas.openxmlformats.org/officeDocument/2006/relationships" xmlns:p="http://schemas.openxmlformats.org/presentationml/2006/main">
   <p:cSld>
     <p:spTree>
@@ -9281,7 +10532,7 @@
 </p:sld>
 </file>
 
-<file path=ppt/slides/slide8.xml><?xml version="1.0" encoding="utf-8"?>
+<file path=ppt/slides/slide9.xml><?xml version="1.0" encoding="utf-8"?>
 <p:sld xmlns:a="http://schemas.openxmlformats.org/drawingml/2006/main" xmlns:r="http://schemas.openxmlformats.org/officeDocument/2006/relationships" xmlns:p="http://schemas.openxmlformats.org/presentationml/2006/main">
   <p:cSld>
     <p:spTree>
@@ -9421,70 +10672,6 @@
     <p:extLst>
       <p:ext uri="{BB962C8B-B14F-4D97-AF65-F5344CB8AC3E}">
         <p14:creationId xmlns:p14="http://schemas.microsoft.com/office/powerpoint/2010/main" val="1252639018"/>
-      </p:ext>
-    </p:extLst>
-  </p:cSld>
-  <p:clrMapOvr>
-    <a:masterClrMapping/>
-  </p:clrMapOvr>
-</p:sld>
-</file>
-
-<file path=ppt/slides/slide9.xml><?xml version="1.0" encoding="utf-8"?>
-<p:sld xmlns:a="http://schemas.openxmlformats.org/drawingml/2006/main" xmlns:r="http://schemas.openxmlformats.org/officeDocument/2006/relationships" xmlns:p="http://schemas.openxmlformats.org/presentationml/2006/main">
-  <p:cSld>
-    <p:spTree>
-      <p:nvGrpSpPr>
-        <p:cNvPr id="1" name="">
-          <a:extLst>
-            <a:ext uri="{FF2B5EF4-FFF2-40B4-BE49-F238E27FC236}">
-              <a16:creationId xmlns:a16="http://schemas.microsoft.com/office/drawing/2014/main" id="{5F78C80A-18C1-7717-D72D-CD7624FC00AC}"/>
-            </a:ext>
-          </a:extLst>
-        </p:cNvPr>
-        <p:cNvGrpSpPr/>
-        <p:nvPr/>
-      </p:nvGrpSpPr>
-      <p:grpSpPr>
-        <a:xfrm>
-          <a:off x="0" y="0"/>
-          <a:ext cx="0" cy="0"/>
-          <a:chOff x="0" y="0"/>
-          <a:chExt cx="0" cy="0"/>
-        </a:xfrm>
-      </p:grpSpPr>
-      <p:sp>
-        <p:nvSpPr>
-          <p:cNvPr id="2" name="Title 1">
-            <a:extLst>
-              <a:ext uri="{FF2B5EF4-FFF2-40B4-BE49-F238E27FC236}">
-                <a16:creationId xmlns:a16="http://schemas.microsoft.com/office/drawing/2014/main" id="{E4D57CFC-B745-64D2-F017-37E9E6CA9AC5}"/>
-              </a:ext>
-            </a:extLst>
-          </p:cNvPr>
-          <p:cNvSpPr>
-            <a:spLocks noGrp="1"/>
-          </p:cNvSpPr>
-          <p:nvPr>
-            <p:ph type="title"/>
-          </p:nvPr>
-        </p:nvSpPr>
-        <p:spPr/>
-        <p:txBody>
-          <a:bodyPr/>
-          <a:lstStyle/>
-          <a:p>
-            <a:r>
-              <a:rPr lang="en-US" dirty="0"/>
-              <a:t>Interceptors</a:t>
-            </a:r>
-          </a:p>
-        </p:txBody>
-      </p:sp>
-    </p:spTree>
-    <p:extLst>
-      <p:ext uri="{BB962C8B-B14F-4D97-AF65-F5344CB8AC3E}">
-        <p14:creationId xmlns:p14="http://schemas.microsoft.com/office/powerpoint/2010/main" val="4147337205"/>
       </p:ext>
     </p:extLst>
   </p:cSld>

--- a/RealWorldEF.pptx
+++ b/RealWorldEF.pptx
@@ -5,7 +5,7 @@
     <p:sldMasterId id="2147483648" r:id="rId1"/>
   </p:sldMasterIdLst>
   <p:notesMasterIdLst>
-    <p:notesMasterId r:id="rId42"/>
+    <p:notesMasterId r:id="rId46"/>
   </p:notesMasterIdLst>
   <p:sldIdLst>
     <p:sldId id="263" r:id="rId2"/>
@@ -46,8 +46,12 @@
     <p:sldId id="294" r:id="rId37"/>
     <p:sldId id="295" r:id="rId38"/>
     <p:sldId id="299" r:id="rId39"/>
-    <p:sldId id="279" r:id="rId40"/>
-    <p:sldId id="300" r:id="rId41"/>
+    <p:sldId id="304" r:id="rId40"/>
+    <p:sldId id="305" r:id="rId41"/>
+    <p:sldId id="307" r:id="rId42"/>
+    <p:sldId id="306" r:id="rId43"/>
+    <p:sldId id="279" r:id="rId44"/>
+    <p:sldId id="300" r:id="rId45"/>
   </p:sldIdLst>
   <p:sldSz cx="11520488" cy="6480175"/>
   <p:notesSz cx="6858000" cy="9144000"/>
@@ -566,10 +570,7 @@
           <a:bodyPr/>
           <a:lstStyle/>
           <a:p>
-            <a:r>
-              <a:rPr lang="en-US"/>
-              <a:t>Link to Raffle: https://forms.office.com/r/ZMSNL0Bbpp</a:t>
-            </a:r>
+            <a:endParaRPr lang="en-US" dirty="0"/>
           </a:p>
         </p:txBody>
       </p:sp>
@@ -590,7 +591,7 @@
           <a:p>
             <a:fld id="{1A8F4386-F8E0-437E-911F-526A26FCC1EB}" type="slidenum">
               <a:rPr lang="en-US" smtClean="0"/>
-              <a:t>3</a:t>
+              <a:t>1</a:t>
             </a:fld>
             <a:endParaRPr lang="en-US"/>
           </a:p>
@@ -599,7 +600,7 @@
     </p:spTree>
     <p:extLst>
       <p:ext uri="{BB962C8B-B14F-4D97-AF65-F5344CB8AC3E}">
-        <p14:creationId xmlns:p14="http://schemas.microsoft.com/office/powerpoint/2010/main" val="3481422575"/>
+        <p14:creationId xmlns:p14="http://schemas.microsoft.com/office/powerpoint/2010/main" val="769681588"/>
       </p:ext>
     </p:extLst>
   </p:cSld>
@@ -655,7 +656,116 @@
           <a:p>
             <a:r>
               <a:rPr lang="en-US" dirty="0"/>
+              <a:t>This is not the only way to do it, just one example</a:t>
+            </a:r>
+          </a:p>
+        </p:txBody>
+      </p:sp>
+      <p:sp>
+        <p:nvSpPr>
+          <p:cNvPr id="4" name="Slide Number Placeholder 3"/>
+          <p:cNvSpPr>
+            <a:spLocks noGrp="1"/>
+          </p:cNvSpPr>
+          <p:nvPr>
+            <p:ph type="sldNum" sz="quarter" idx="5"/>
+          </p:nvPr>
+        </p:nvSpPr>
+        <p:spPr/>
+        <p:txBody>
+          <a:bodyPr/>
+          <a:lstStyle/>
+          <a:p>
+            <a:fld id="{1A8F4386-F8E0-437E-911F-526A26FCC1EB}" type="slidenum">
+              <a:rPr lang="en-US" smtClean="0"/>
+              <a:t>26</a:t>
+            </a:fld>
+            <a:endParaRPr lang="en-US"/>
+          </a:p>
+        </p:txBody>
+      </p:sp>
+    </p:spTree>
+    <p:extLst>
+      <p:ext uri="{BB962C8B-B14F-4D97-AF65-F5344CB8AC3E}">
+        <p14:creationId xmlns:p14="http://schemas.microsoft.com/office/powerpoint/2010/main" val="3723997312"/>
+      </p:ext>
+    </p:extLst>
+  </p:cSld>
+  <p:clrMapOvr>
+    <a:masterClrMapping/>
+  </p:clrMapOvr>
+</p:notes>
+</file>
+
+<file path=ppt/notesSlides/notesSlide11.xml><?xml version="1.0" encoding="utf-8"?>
+<p:notes xmlns:a="http://schemas.openxmlformats.org/drawingml/2006/main" xmlns:r="http://schemas.openxmlformats.org/officeDocument/2006/relationships" xmlns:p="http://schemas.openxmlformats.org/presentationml/2006/main">
+  <p:cSld>
+    <p:spTree>
+      <p:nvGrpSpPr>
+        <p:cNvPr id="1" name=""/>
+        <p:cNvGrpSpPr/>
+        <p:nvPr/>
+      </p:nvGrpSpPr>
+      <p:grpSpPr>
+        <a:xfrm>
+          <a:off x="0" y="0"/>
+          <a:ext cx="0" cy="0"/>
+          <a:chOff x="0" y="0"/>
+          <a:chExt cx="0" cy="0"/>
+        </a:xfrm>
+      </p:grpSpPr>
+      <p:sp>
+        <p:nvSpPr>
+          <p:cNvPr id="2" name="Slide Image Placeholder 1"/>
+          <p:cNvSpPr>
+            <a:spLocks noGrp="1" noRot="1" noChangeAspect="1"/>
+          </p:cNvSpPr>
+          <p:nvPr>
+            <p:ph type="sldImg"/>
+          </p:nvPr>
+        </p:nvSpPr>
+        <p:spPr/>
+      </p:sp>
+      <p:sp>
+        <p:nvSpPr>
+          <p:cNvPr id="3" name="Notes Placeholder 2"/>
+          <p:cNvSpPr>
+            <a:spLocks noGrp="1"/>
+          </p:cNvSpPr>
+          <p:nvPr>
+            <p:ph type="body" idx="1"/>
+          </p:nvPr>
+        </p:nvSpPr>
+        <p:spPr/>
+        <p:txBody>
+          <a:bodyPr/>
+          <a:lstStyle/>
+          <a:p>
+            <a:r>
+              <a:rPr lang="en-US" dirty="0"/>
               <a:t>This query will look much better to developers</a:t>
+            </a:r>
+          </a:p>
+          <a:p>
+            <a:endParaRPr lang="en-US" dirty="0"/>
+          </a:p>
+          <a:p>
+            <a:r>
+              <a:rPr lang="en-US" dirty="0"/>
+              <a:t>Reminder however</a:t>
+            </a:r>
+            <a:br>
+              <a:rPr lang="en-US" dirty="0"/>
+            </a:br>
+            <a:r>
+              <a:rPr lang="en-US" dirty="0"/>
+              <a:t>SQL Server 2025 will add JSON TYPE as a first class citizen</a:t>
+            </a:r>
+          </a:p>
+          <a:p>
+            <a:r>
+              <a:rPr lang="en-US" dirty="0"/>
+              <a:t>Prior to SQL Server 2025, </a:t>
             </a:r>
           </a:p>
         </p:txBody>
@@ -696,7 +806,7 @@
 </p:notes>
 </file>
 
-<file path=ppt/notesSlides/notesSlide11.xml><?xml version="1.0" encoding="utf-8"?>
+<file path=ppt/notesSlides/notesSlide12.xml><?xml version="1.0" encoding="utf-8"?>
 <p:notes xmlns:a="http://schemas.openxmlformats.org/drawingml/2006/main" xmlns:r="http://schemas.openxmlformats.org/officeDocument/2006/relationships" xmlns:p="http://schemas.openxmlformats.org/presentationml/2006/main">
   <p:cSld>
     <p:spTree>
@@ -804,7 +914,7 @@
 </p:notes>
 </file>
 
-<file path=ppt/notesSlides/notesSlide12.xml><?xml version="1.0" encoding="utf-8"?>
+<file path=ppt/notesSlides/notesSlide13.xml><?xml version="1.0" encoding="utf-8"?>
 <p:notes xmlns:a="http://schemas.openxmlformats.org/drawingml/2006/main" xmlns:r="http://schemas.openxmlformats.org/officeDocument/2006/relationships" xmlns:p="http://schemas.openxmlformats.org/presentationml/2006/main">
   <p:cSld>
     <p:spTree>
@@ -912,7 +1022,7 @@
 </p:notes>
 </file>
 
-<file path=ppt/notesSlides/notesSlide13.xml><?xml version="1.0" encoding="utf-8"?>
+<file path=ppt/notesSlides/notesSlide14.xml><?xml version="1.0" encoding="utf-8"?>
 <p:notes xmlns:a="http://schemas.openxmlformats.org/drawingml/2006/main" xmlns:r="http://schemas.openxmlformats.org/officeDocument/2006/relationships" xmlns:p="http://schemas.openxmlformats.org/presentationml/2006/main">
   <p:cSld>
     <p:spTree>
@@ -996,7 +1106,7 @@
 </p:notes>
 </file>
 
-<file path=ppt/notesSlides/notesSlide14.xml><?xml version="1.0" encoding="utf-8"?>
+<file path=ppt/notesSlides/notesSlide15.xml><?xml version="1.0" encoding="utf-8"?>
 <p:notes xmlns:a="http://schemas.openxmlformats.org/drawingml/2006/main" xmlns:r="http://schemas.openxmlformats.org/officeDocument/2006/relationships" xmlns:p="http://schemas.openxmlformats.org/presentationml/2006/main">
   <p:cSld>
     <p:spTree>
@@ -1095,90 +1205,6 @@
     <p:extLst>
       <p:ext uri="{BB962C8B-B14F-4D97-AF65-F5344CB8AC3E}">
         <p14:creationId xmlns:p14="http://schemas.microsoft.com/office/powerpoint/2010/main" val="2056636177"/>
-      </p:ext>
-    </p:extLst>
-  </p:cSld>
-  <p:clrMapOvr>
-    <a:masterClrMapping/>
-  </p:clrMapOvr>
-</p:notes>
-</file>
-
-<file path=ppt/notesSlides/notesSlide15.xml><?xml version="1.0" encoding="utf-8"?>
-<p:notes xmlns:a="http://schemas.openxmlformats.org/drawingml/2006/main" xmlns:r="http://schemas.openxmlformats.org/officeDocument/2006/relationships" xmlns:p="http://schemas.openxmlformats.org/presentationml/2006/main">
-  <p:cSld>
-    <p:spTree>
-      <p:nvGrpSpPr>
-        <p:cNvPr id="1" name=""/>
-        <p:cNvGrpSpPr/>
-        <p:nvPr/>
-      </p:nvGrpSpPr>
-      <p:grpSpPr>
-        <a:xfrm>
-          <a:off x="0" y="0"/>
-          <a:ext cx="0" cy="0"/>
-          <a:chOff x="0" y="0"/>
-          <a:chExt cx="0" cy="0"/>
-        </a:xfrm>
-      </p:grpSpPr>
-      <p:sp>
-        <p:nvSpPr>
-          <p:cNvPr id="2" name="Slide Image Placeholder 1"/>
-          <p:cNvSpPr>
-            <a:spLocks noGrp="1" noRot="1" noChangeAspect="1"/>
-          </p:cNvSpPr>
-          <p:nvPr>
-            <p:ph type="sldImg"/>
-          </p:nvPr>
-        </p:nvSpPr>
-        <p:spPr/>
-      </p:sp>
-      <p:sp>
-        <p:nvSpPr>
-          <p:cNvPr id="3" name="Notes Placeholder 2"/>
-          <p:cNvSpPr>
-            <a:spLocks noGrp="1"/>
-          </p:cNvSpPr>
-          <p:nvPr>
-            <p:ph type="body" idx="1"/>
-          </p:nvPr>
-        </p:nvSpPr>
-        <p:spPr/>
-        <p:txBody>
-          <a:bodyPr/>
-          <a:lstStyle/>
-          <a:p>
-            <a:endParaRPr lang="en-US" dirty="0"/>
-          </a:p>
-        </p:txBody>
-      </p:sp>
-      <p:sp>
-        <p:nvSpPr>
-          <p:cNvPr id="4" name="Slide Number Placeholder 3"/>
-          <p:cNvSpPr>
-            <a:spLocks noGrp="1"/>
-          </p:cNvSpPr>
-          <p:nvPr>
-            <p:ph type="sldNum" sz="quarter" idx="5"/>
-          </p:nvPr>
-        </p:nvSpPr>
-        <p:spPr/>
-        <p:txBody>
-          <a:bodyPr/>
-          <a:lstStyle/>
-          <a:p>
-            <a:fld id="{1A8F4386-F8E0-437E-911F-526A26FCC1EB}" type="slidenum">
-              <a:rPr lang="en-US" smtClean="0"/>
-              <a:t>36</a:t>
-            </a:fld>
-            <a:endParaRPr lang="en-US"/>
-          </a:p>
-        </p:txBody>
-      </p:sp>
-    </p:spTree>
-    <p:extLst>
-      <p:ext uri="{BB962C8B-B14F-4D97-AF65-F5344CB8AC3E}">
-        <p14:creationId xmlns:p14="http://schemas.microsoft.com/office/powerpoint/2010/main" val="104202716"/>
       </p:ext>
     </p:extLst>
   </p:cSld>
@@ -1232,6 +1258,90 @@
           <a:bodyPr/>
           <a:lstStyle/>
           <a:p>
+            <a:endParaRPr lang="en-US" dirty="0"/>
+          </a:p>
+        </p:txBody>
+      </p:sp>
+      <p:sp>
+        <p:nvSpPr>
+          <p:cNvPr id="4" name="Slide Number Placeholder 3"/>
+          <p:cNvSpPr>
+            <a:spLocks noGrp="1"/>
+          </p:cNvSpPr>
+          <p:nvPr>
+            <p:ph type="sldNum" sz="quarter" idx="5"/>
+          </p:nvPr>
+        </p:nvSpPr>
+        <p:spPr/>
+        <p:txBody>
+          <a:bodyPr/>
+          <a:lstStyle/>
+          <a:p>
+            <a:fld id="{1A8F4386-F8E0-437E-911F-526A26FCC1EB}" type="slidenum">
+              <a:rPr lang="en-US" smtClean="0"/>
+              <a:t>36</a:t>
+            </a:fld>
+            <a:endParaRPr lang="en-US"/>
+          </a:p>
+        </p:txBody>
+      </p:sp>
+    </p:spTree>
+    <p:extLst>
+      <p:ext uri="{BB962C8B-B14F-4D97-AF65-F5344CB8AC3E}">
+        <p14:creationId xmlns:p14="http://schemas.microsoft.com/office/powerpoint/2010/main" val="104202716"/>
+      </p:ext>
+    </p:extLst>
+  </p:cSld>
+  <p:clrMapOvr>
+    <a:masterClrMapping/>
+  </p:clrMapOvr>
+</p:notes>
+</file>
+
+<file path=ppt/notesSlides/notesSlide17.xml><?xml version="1.0" encoding="utf-8"?>
+<p:notes xmlns:a="http://schemas.openxmlformats.org/drawingml/2006/main" xmlns:r="http://schemas.openxmlformats.org/officeDocument/2006/relationships" xmlns:p="http://schemas.openxmlformats.org/presentationml/2006/main">
+  <p:cSld>
+    <p:spTree>
+      <p:nvGrpSpPr>
+        <p:cNvPr id="1" name=""/>
+        <p:cNvGrpSpPr/>
+        <p:nvPr/>
+      </p:nvGrpSpPr>
+      <p:grpSpPr>
+        <a:xfrm>
+          <a:off x="0" y="0"/>
+          <a:ext cx="0" cy="0"/>
+          <a:chOff x="0" y="0"/>
+          <a:chExt cx="0" cy="0"/>
+        </a:xfrm>
+      </p:grpSpPr>
+      <p:sp>
+        <p:nvSpPr>
+          <p:cNvPr id="2" name="Slide Image Placeholder 1"/>
+          <p:cNvSpPr>
+            <a:spLocks noGrp="1" noRot="1" noChangeAspect="1"/>
+          </p:cNvSpPr>
+          <p:nvPr>
+            <p:ph type="sldImg"/>
+          </p:nvPr>
+        </p:nvSpPr>
+        <p:spPr/>
+      </p:sp>
+      <p:sp>
+        <p:nvSpPr>
+          <p:cNvPr id="3" name="Notes Placeholder 2"/>
+          <p:cNvSpPr>
+            <a:spLocks noGrp="1"/>
+          </p:cNvSpPr>
+          <p:nvPr>
+            <p:ph type="body" idx="1"/>
+          </p:nvPr>
+        </p:nvSpPr>
+        <p:spPr/>
+        <p:txBody>
+          <a:bodyPr/>
+          <a:lstStyle/>
+          <a:p>
             <a:r>
               <a:rPr lang="en-US" dirty="0"/>
               <a:t>Note: This has 0 performance benefit as the exact same query is generated as the original query!</a:t>
@@ -1275,7 +1385,7 @@
 </p:notes>
 </file>
 
-<file path=ppt/notesSlides/notesSlide17.xml><?xml version="1.0" encoding="utf-8"?>
+<file path=ppt/notesSlides/notesSlide18.xml><?xml version="1.0" encoding="utf-8"?>
 <p:notes xmlns:a="http://schemas.openxmlformats.org/drawingml/2006/main" xmlns:r="http://schemas.openxmlformats.org/officeDocument/2006/relationships" xmlns:p="http://schemas.openxmlformats.org/presentationml/2006/main">
   <p:cSld>
     <p:spTree>
@@ -1383,7 +1493,7 @@
 </p:notes>
 </file>
 
-<file path=ppt/notesSlides/notesSlide18.xml><?xml version="1.0" encoding="utf-8"?>
+<file path=ppt/notesSlides/notesSlide19.xml><?xml version="1.0" encoding="utf-8"?>
 <p:notes xmlns:a="http://schemas.openxmlformats.org/drawingml/2006/main" xmlns:r="http://schemas.openxmlformats.org/officeDocument/2006/relationships" xmlns:p="http://schemas.openxmlformats.org/presentationml/2006/main">
   <p:cSld>
     <p:spTree>
@@ -1427,24 +1537,7 @@
           <a:bodyPr/>
           <a:lstStyle/>
           <a:p>
-            <a:r>
-              <a:rPr lang="en-US" dirty="0"/>
-              <a:t>Contact info</a:t>
-            </a:r>
-          </a:p>
-          <a:p>
-            <a:r>
-              <a:rPr lang="en-US" dirty="0"/>
-              <a:t>Slide deck </a:t>
-            </a:r>
-            <a:r>
-              <a:rPr lang="en-US"/>
-              <a:t>and repo</a:t>
-            </a:r>
-            <a:br>
-              <a:rPr lang="en-US"/>
-            </a:br>
-            <a:endParaRPr lang="en-US"/>
+            <a:endParaRPr lang="en-US" dirty="0"/>
           </a:p>
         </p:txBody>
       </p:sp>
@@ -1465,7 +1558,7 @@
           <a:p>
             <a:fld id="{1A8F4386-F8E0-437E-911F-526A26FCC1EB}" type="slidenum">
               <a:rPr lang="en-US" smtClean="0"/>
-              <a:t>40</a:t>
+              <a:t>39</a:t>
             </a:fld>
             <a:endParaRPr lang="en-US"/>
           </a:p>
@@ -1474,7 +1567,7 @@
     </p:spTree>
     <p:extLst>
       <p:ext uri="{BB962C8B-B14F-4D97-AF65-F5344CB8AC3E}">
-        <p14:creationId xmlns:p14="http://schemas.microsoft.com/office/powerpoint/2010/main" val="1416296903"/>
+        <p14:creationId xmlns:p14="http://schemas.microsoft.com/office/powerpoint/2010/main" val="1831704594"/>
       </p:ext>
     </p:extLst>
   </p:cSld>
@@ -1529,71 +1622,8 @@
           <a:lstStyle/>
           <a:p>
             <a:r>
-              <a:rPr lang="en-US" dirty="0"/>
-              <a:t>Migration strategy is ultimately up to your team.</a:t>
-            </a:r>
-            <a:br>
-              <a:rPr lang="en-US" dirty="0"/>
-            </a:br>
-            <a:r>
-              <a:rPr lang="en-US" dirty="0"/>
-              <a:t>If you are trying to achieve true production CI/CD with rollouts that don’t get stuck or require additional manual intervention, use a tool.  If you just need an easy way to do it you could make a public API via an azure function endpoint that can just run the typical migration update command</a:t>
-            </a:r>
-          </a:p>
-          <a:p>
-            <a:br>
-              <a:rPr lang="en-US" dirty="0"/>
-            </a:br>
-            <a:r>
-              <a:rPr lang="en-US" dirty="0"/>
-              <a:t>Using a GitHub action is going to be painful as GH hosted runners can’t hit the database through the built-in firewall and you can’t </a:t>
-            </a:r>
-            <a:r>
-              <a:rPr lang="en-US" dirty="0" err="1"/>
-              <a:t>guantee</a:t>
-            </a:r>
-            <a:r>
-              <a:rPr lang="en-US" dirty="0"/>
-              <a:t> their IP to poke a hole in the firewall</a:t>
-            </a:r>
-            <a:br>
-              <a:rPr lang="en-US" dirty="0"/>
-            </a:br>
-            <a:br>
-              <a:rPr lang="en-US" dirty="0"/>
-            </a:br>
-            <a:r>
-              <a:rPr lang="en-US" dirty="0"/>
-              <a:t>You could use GitHub Private runners (</a:t>
-            </a:r>
-            <a:r>
-              <a:rPr lang="en-US" dirty="0" err="1"/>
-              <a:t>github</a:t>
-            </a:r>
-            <a:r>
-              <a:rPr lang="en-US" dirty="0"/>
-              <a:t> enterprise)</a:t>
-            </a:r>
-            <a:br>
-              <a:rPr lang="en-US" dirty="0"/>
-            </a:br>
-            <a:r>
-              <a:rPr lang="en-US" dirty="0"/>
-              <a:t>Or you could try a container instance inside your network at azure or with guaranteed range of outbound Ips.  But this is also PAINFUL</a:t>
-            </a:r>
-          </a:p>
-          <a:p>
-            <a:r>
-              <a:rPr lang="en-US" dirty="0"/>
-              <a:t>You need an image for the </a:t>
-            </a:r>
-            <a:r>
-              <a:rPr lang="en-US" dirty="0" err="1"/>
-              <a:t>github</a:t>
-            </a:r>
-            <a:r>
-              <a:rPr lang="en-US" dirty="0"/>
-              <a:t> action to run on the ACI and you’ll need a token to get it, or you could try to pull from public but it’s likely throttled. You would also need to get the thing running on your container in the ACI with enough information to run migrations on your database.</a:t>
+              <a:rPr lang="en-US"/>
+              <a:t>Link to Raffle: https://forms.office.com/r/ZMSNL0Bbpp</a:t>
             </a:r>
           </a:p>
         </p:txBody>
@@ -1615,7 +1645,7 @@
           <a:p>
             <a:fld id="{1A8F4386-F8E0-437E-911F-526A26FCC1EB}" type="slidenum">
               <a:rPr lang="en-US" smtClean="0"/>
-              <a:t>9</a:t>
+              <a:t>3</a:t>
             </a:fld>
             <a:endParaRPr lang="en-US"/>
           </a:p>
@@ -1624,7 +1654,300 @@
     </p:spTree>
     <p:extLst>
       <p:ext uri="{BB962C8B-B14F-4D97-AF65-F5344CB8AC3E}">
-        <p14:creationId xmlns:p14="http://schemas.microsoft.com/office/powerpoint/2010/main" val="1445421093"/>
+        <p14:creationId xmlns:p14="http://schemas.microsoft.com/office/powerpoint/2010/main" val="3481422575"/>
+      </p:ext>
+    </p:extLst>
+  </p:cSld>
+  <p:clrMapOvr>
+    <a:masterClrMapping/>
+  </p:clrMapOvr>
+</p:notes>
+</file>
+
+<file path=ppt/notesSlides/notesSlide20.xml><?xml version="1.0" encoding="utf-8"?>
+<p:notes xmlns:a="http://schemas.openxmlformats.org/drawingml/2006/main" xmlns:r="http://schemas.openxmlformats.org/officeDocument/2006/relationships" xmlns:p="http://schemas.openxmlformats.org/presentationml/2006/main">
+  <p:cSld>
+    <p:spTree>
+      <p:nvGrpSpPr>
+        <p:cNvPr id="1" name=""/>
+        <p:cNvGrpSpPr/>
+        <p:nvPr/>
+      </p:nvGrpSpPr>
+      <p:grpSpPr>
+        <a:xfrm>
+          <a:off x="0" y="0"/>
+          <a:ext cx="0" cy="0"/>
+          <a:chOff x="0" y="0"/>
+          <a:chExt cx="0" cy="0"/>
+        </a:xfrm>
+      </p:grpSpPr>
+      <p:sp>
+        <p:nvSpPr>
+          <p:cNvPr id="2" name="Slide Image Placeholder 1"/>
+          <p:cNvSpPr>
+            <a:spLocks noGrp="1" noRot="1" noChangeAspect="1"/>
+          </p:cNvSpPr>
+          <p:nvPr>
+            <p:ph type="sldImg"/>
+          </p:nvPr>
+        </p:nvSpPr>
+        <p:spPr/>
+      </p:sp>
+      <p:sp>
+        <p:nvSpPr>
+          <p:cNvPr id="3" name="Notes Placeholder 2"/>
+          <p:cNvSpPr>
+            <a:spLocks noGrp="1"/>
+          </p:cNvSpPr>
+          <p:nvPr>
+            <p:ph type="body" idx="1"/>
+          </p:nvPr>
+        </p:nvSpPr>
+        <p:spPr/>
+        <p:txBody>
+          <a:bodyPr/>
+          <a:lstStyle/>
+          <a:p>
+            <a:endParaRPr lang="en-US" dirty="0"/>
+          </a:p>
+        </p:txBody>
+      </p:sp>
+      <p:sp>
+        <p:nvSpPr>
+          <p:cNvPr id="4" name="Slide Number Placeholder 3"/>
+          <p:cNvSpPr>
+            <a:spLocks noGrp="1"/>
+          </p:cNvSpPr>
+          <p:nvPr>
+            <p:ph type="sldNum" sz="quarter" idx="5"/>
+          </p:nvPr>
+        </p:nvSpPr>
+        <p:spPr/>
+        <p:txBody>
+          <a:bodyPr/>
+          <a:lstStyle/>
+          <a:p>
+            <a:fld id="{1A8F4386-F8E0-437E-911F-526A26FCC1EB}" type="slidenum">
+              <a:rPr lang="en-US" smtClean="0"/>
+              <a:t>41</a:t>
+            </a:fld>
+            <a:endParaRPr lang="en-US"/>
+          </a:p>
+        </p:txBody>
+      </p:sp>
+    </p:spTree>
+    <p:extLst>
+      <p:ext uri="{BB962C8B-B14F-4D97-AF65-F5344CB8AC3E}">
+        <p14:creationId xmlns:p14="http://schemas.microsoft.com/office/powerpoint/2010/main" val="674868044"/>
+      </p:ext>
+    </p:extLst>
+  </p:cSld>
+  <p:clrMapOvr>
+    <a:masterClrMapping/>
+  </p:clrMapOvr>
+</p:notes>
+</file>
+
+<file path=ppt/notesSlides/notesSlide21.xml><?xml version="1.0" encoding="utf-8"?>
+<p:notes xmlns:a="http://schemas.openxmlformats.org/drawingml/2006/main" xmlns:r="http://schemas.openxmlformats.org/officeDocument/2006/relationships" xmlns:p="http://schemas.openxmlformats.org/presentationml/2006/main">
+  <p:cSld>
+    <p:spTree>
+      <p:nvGrpSpPr>
+        <p:cNvPr id="1" name="">
+          <a:extLst>
+            <a:ext uri="{FF2B5EF4-FFF2-40B4-BE49-F238E27FC236}">
+              <a16:creationId xmlns:a16="http://schemas.microsoft.com/office/drawing/2014/main" id="{B3BE48E2-38C2-4DDA-A736-B1EDF262FBE7}"/>
+            </a:ext>
+          </a:extLst>
+        </p:cNvPr>
+        <p:cNvGrpSpPr/>
+        <p:nvPr/>
+      </p:nvGrpSpPr>
+      <p:grpSpPr>
+        <a:xfrm>
+          <a:off x="0" y="0"/>
+          <a:ext cx="0" cy="0"/>
+          <a:chOff x="0" y="0"/>
+          <a:chExt cx="0" cy="0"/>
+        </a:xfrm>
+      </p:grpSpPr>
+      <p:sp>
+        <p:nvSpPr>
+          <p:cNvPr id="2" name="Slide Image Placeholder 1">
+            <a:extLst>
+              <a:ext uri="{FF2B5EF4-FFF2-40B4-BE49-F238E27FC236}">
+                <a16:creationId xmlns:a16="http://schemas.microsoft.com/office/drawing/2014/main" id="{590BE2AB-D230-788A-79F4-4BB853F8B899}"/>
+              </a:ext>
+            </a:extLst>
+          </p:cNvPr>
+          <p:cNvSpPr>
+            <a:spLocks noGrp="1" noRot="1" noChangeAspect="1"/>
+          </p:cNvSpPr>
+          <p:nvPr>
+            <p:ph type="sldImg"/>
+          </p:nvPr>
+        </p:nvSpPr>
+        <p:spPr/>
+      </p:sp>
+      <p:sp>
+        <p:nvSpPr>
+          <p:cNvPr id="3" name="Notes Placeholder 2">
+            <a:extLst>
+              <a:ext uri="{FF2B5EF4-FFF2-40B4-BE49-F238E27FC236}">
+                <a16:creationId xmlns:a16="http://schemas.microsoft.com/office/drawing/2014/main" id="{36B26DE2-BF27-1FFE-01A6-A7BA92B61920}"/>
+              </a:ext>
+            </a:extLst>
+          </p:cNvPr>
+          <p:cNvSpPr>
+            <a:spLocks noGrp="1"/>
+          </p:cNvSpPr>
+          <p:nvPr>
+            <p:ph type="body" idx="1"/>
+          </p:nvPr>
+        </p:nvSpPr>
+        <p:spPr/>
+        <p:txBody>
+          <a:bodyPr/>
+          <a:lstStyle/>
+          <a:p>
+            <a:endParaRPr lang="en-US" dirty="0"/>
+          </a:p>
+        </p:txBody>
+      </p:sp>
+      <p:sp>
+        <p:nvSpPr>
+          <p:cNvPr id="4" name="Slide Number Placeholder 3">
+            <a:extLst>
+              <a:ext uri="{FF2B5EF4-FFF2-40B4-BE49-F238E27FC236}">
+                <a16:creationId xmlns:a16="http://schemas.microsoft.com/office/drawing/2014/main" id="{B56A54A3-8ED0-F91E-DEEC-F5F9ED176597}"/>
+              </a:ext>
+            </a:extLst>
+          </p:cNvPr>
+          <p:cNvSpPr>
+            <a:spLocks noGrp="1"/>
+          </p:cNvSpPr>
+          <p:nvPr>
+            <p:ph type="sldNum" sz="quarter" idx="5"/>
+          </p:nvPr>
+        </p:nvSpPr>
+        <p:spPr/>
+        <p:txBody>
+          <a:bodyPr/>
+          <a:lstStyle/>
+          <a:p>
+            <a:fld id="{1A8F4386-F8E0-437E-911F-526A26FCC1EB}" type="slidenum">
+              <a:rPr lang="en-US" smtClean="0"/>
+              <a:t>42</a:t>
+            </a:fld>
+            <a:endParaRPr lang="en-US"/>
+          </a:p>
+        </p:txBody>
+      </p:sp>
+    </p:spTree>
+    <p:extLst>
+      <p:ext uri="{BB962C8B-B14F-4D97-AF65-F5344CB8AC3E}">
+        <p14:creationId xmlns:p14="http://schemas.microsoft.com/office/powerpoint/2010/main" val="1651797871"/>
+      </p:ext>
+    </p:extLst>
+  </p:cSld>
+  <p:clrMapOvr>
+    <a:masterClrMapping/>
+  </p:clrMapOvr>
+</p:notes>
+</file>
+
+<file path=ppt/notesSlides/notesSlide22.xml><?xml version="1.0" encoding="utf-8"?>
+<p:notes xmlns:a="http://schemas.openxmlformats.org/drawingml/2006/main" xmlns:r="http://schemas.openxmlformats.org/officeDocument/2006/relationships" xmlns:p="http://schemas.openxmlformats.org/presentationml/2006/main">
+  <p:cSld>
+    <p:spTree>
+      <p:nvGrpSpPr>
+        <p:cNvPr id="1" name=""/>
+        <p:cNvGrpSpPr/>
+        <p:nvPr/>
+      </p:nvGrpSpPr>
+      <p:grpSpPr>
+        <a:xfrm>
+          <a:off x="0" y="0"/>
+          <a:ext cx="0" cy="0"/>
+          <a:chOff x="0" y="0"/>
+          <a:chExt cx="0" cy="0"/>
+        </a:xfrm>
+      </p:grpSpPr>
+      <p:sp>
+        <p:nvSpPr>
+          <p:cNvPr id="2" name="Slide Image Placeholder 1"/>
+          <p:cNvSpPr>
+            <a:spLocks noGrp="1" noRot="1" noChangeAspect="1"/>
+          </p:cNvSpPr>
+          <p:nvPr>
+            <p:ph type="sldImg"/>
+          </p:nvPr>
+        </p:nvSpPr>
+        <p:spPr/>
+      </p:sp>
+      <p:sp>
+        <p:nvSpPr>
+          <p:cNvPr id="3" name="Notes Placeholder 2"/>
+          <p:cNvSpPr>
+            <a:spLocks noGrp="1"/>
+          </p:cNvSpPr>
+          <p:nvPr>
+            <p:ph type="body" idx="1"/>
+          </p:nvPr>
+        </p:nvSpPr>
+        <p:spPr/>
+        <p:txBody>
+          <a:bodyPr/>
+          <a:lstStyle/>
+          <a:p>
+            <a:r>
+              <a:rPr lang="en-US" dirty="0"/>
+              <a:t>Contact info</a:t>
+            </a:r>
+          </a:p>
+          <a:p>
+            <a:r>
+              <a:rPr lang="en-US" dirty="0"/>
+              <a:t>Slide deck </a:t>
+            </a:r>
+            <a:r>
+              <a:rPr lang="en-US"/>
+              <a:t>and repo</a:t>
+            </a:r>
+            <a:br>
+              <a:rPr lang="en-US"/>
+            </a:br>
+            <a:endParaRPr lang="en-US"/>
+          </a:p>
+        </p:txBody>
+      </p:sp>
+      <p:sp>
+        <p:nvSpPr>
+          <p:cNvPr id="4" name="Slide Number Placeholder 3"/>
+          <p:cNvSpPr>
+            <a:spLocks noGrp="1"/>
+          </p:cNvSpPr>
+          <p:nvPr>
+            <p:ph type="sldNum" sz="quarter" idx="5"/>
+          </p:nvPr>
+        </p:nvSpPr>
+        <p:spPr/>
+        <p:txBody>
+          <a:bodyPr/>
+          <a:lstStyle/>
+          <a:p>
+            <a:fld id="{1A8F4386-F8E0-437E-911F-526A26FCC1EB}" type="slidenum">
+              <a:rPr lang="en-US" smtClean="0"/>
+              <a:t>44</a:t>
+            </a:fld>
+            <a:endParaRPr lang="en-US"/>
+          </a:p>
+        </p:txBody>
+      </p:sp>
+    </p:spTree>
+    <p:extLst>
+      <p:ext uri="{BB962C8B-B14F-4D97-AF65-F5344CB8AC3E}">
+        <p14:creationId xmlns:p14="http://schemas.microsoft.com/office/powerpoint/2010/main" val="1416296903"/>
       </p:ext>
     </p:extLst>
   </p:cSld>
@@ -1678,7 +2001,73 @@
           <a:bodyPr/>
           <a:lstStyle/>
           <a:p>
-            <a:endParaRPr lang="en-US" dirty="0"/>
+            <a:r>
+              <a:rPr lang="en-US" dirty="0"/>
+              <a:t>Migration strategy is ultimately up to your team.</a:t>
+            </a:r>
+            <a:br>
+              <a:rPr lang="en-US" dirty="0"/>
+            </a:br>
+            <a:r>
+              <a:rPr lang="en-US" dirty="0"/>
+              <a:t>If you are trying to achieve true production CI/CD with rollouts that don’t get stuck or require additional manual intervention, use a tool.  If you just need an easy way to do it you could make a public API via an azure function endpoint that can just run the typical migration update command</a:t>
+            </a:r>
+          </a:p>
+          <a:p>
+            <a:br>
+              <a:rPr lang="en-US" dirty="0"/>
+            </a:br>
+            <a:r>
+              <a:rPr lang="en-US" dirty="0"/>
+              <a:t>Using a GitHub action is going to be painful as GH hosted runners can’t hit the database through the built-in firewall and you can’t </a:t>
+            </a:r>
+            <a:r>
+              <a:rPr lang="en-US" dirty="0" err="1"/>
+              <a:t>guantee</a:t>
+            </a:r>
+            <a:r>
+              <a:rPr lang="en-US" dirty="0"/>
+              <a:t> their IP to poke a hole in the firewall</a:t>
+            </a:r>
+            <a:br>
+              <a:rPr lang="en-US" dirty="0"/>
+            </a:br>
+            <a:br>
+              <a:rPr lang="en-US" dirty="0"/>
+            </a:br>
+            <a:r>
+              <a:rPr lang="en-US" dirty="0"/>
+              <a:t>You could use GitHub Private runners (</a:t>
+            </a:r>
+            <a:r>
+              <a:rPr lang="en-US" dirty="0" err="1"/>
+              <a:t>github</a:t>
+            </a:r>
+            <a:r>
+              <a:rPr lang="en-US" dirty="0"/>
+              <a:t> enterprise)</a:t>
+            </a:r>
+            <a:br>
+              <a:rPr lang="en-US" dirty="0"/>
+            </a:br>
+            <a:r>
+              <a:rPr lang="en-US" dirty="0"/>
+              <a:t>Or you could try a container instance inside your network at azure or with guaranteed range of outbound Ips.  But this is also PAINFUL</a:t>
+            </a:r>
+          </a:p>
+          <a:p>
+            <a:r>
+              <a:rPr lang="en-US" dirty="0"/>
+              <a:t>You need an image for the </a:t>
+            </a:r>
+            <a:r>
+              <a:rPr lang="en-US" dirty="0" err="1"/>
+              <a:t>github</a:t>
+            </a:r>
+            <a:r>
+              <a:rPr lang="en-US" dirty="0"/>
+              <a:t> action to run on the ACI and you’ll need a token to get it, or you could try to pull from public but it’s likely throttled. You would also need to get the thing running on your container in the ACI with enough information to run migrations on your database.</a:t>
+            </a:r>
           </a:p>
         </p:txBody>
       </p:sp>
@@ -1699,7 +2088,7 @@
           <a:p>
             <a:fld id="{1A8F4386-F8E0-437E-911F-526A26FCC1EB}" type="slidenum">
               <a:rPr lang="en-US" smtClean="0"/>
-              <a:t>16</a:t>
+              <a:t>9</a:t>
             </a:fld>
             <a:endParaRPr lang="en-US"/>
           </a:p>
@@ -1708,7 +2097,7 @@
     </p:spTree>
     <p:extLst>
       <p:ext uri="{BB962C8B-B14F-4D97-AF65-F5344CB8AC3E}">
-        <p14:creationId xmlns:p14="http://schemas.microsoft.com/office/powerpoint/2010/main" val="3320068916"/>
+        <p14:creationId xmlns:p14="http://schemas.microsoft.com/office/powerpoint/2010/main" val="1445421093"/>
       </p:ext>
     </p:extLst>
   </p:cSld>
@@ -1762,61 +2151,6 @@
           <a:bodyPr/>
           <a:lstStyle/>
           <a:p>
-            <a:r>
-              <a:rPr lang="en-US" dirty="0"/>
-              <a:t>Each problem requires a loop</a:t>
-            </a:r>
-          </a:p>
-          <a:p>
-            <a:r>
-              <a:rPr lang="en-US" dirty="0"/>
-              <a:t>However, the second requires a filter</a:t>
-            </a:r>
-          </a:p>
-          <a:p>
-            <a:br>
-              <a:rPr lang="en-US" dirty="0"/>
-            </a:br>
-            <a:r>
-              <a:rPr lang="en-US" dirty="0"/>
-              <a:t>Prior to bulk update / bulk delete, either you iterate all on the client side or use a proc</a:t>
-            </a:r>
-            <a:br>
-              <a:rPr lang="en-US" dirty="0"/>
-            </a:br>
-            <a:r>
-              <a:rPr lang="en-US" dirty="0"/>
-              <a:t>With bulk-update/ bulk-delete you can do one operation</a:t>
-            </a:r>
-          </a:p>
-          <a:p>
-            <a:br>
-              <a:rPr lang="en-US" dirty="0"/>
-            </a:br>
-            <a:r>
-              <a:rPr lang="en-US" dirty="0"/>
-              <a:t>Side effects:</a:t>
-            </a:r>
-            <a:br>
-              <a:rPr lang="en-US" dirty="0"/>
-            </a:br>
-            <a:r>
-              <a:rPr lang="en-US" dirty="0"/>
-              <a:t>No </a:t>
-            </a:r>
-            <a:r>
-              <a:rPr lang="en-US" dirty="0" err="1"/>
-              <a:t>SaveChanges</a:t>
-            </a:r>
-            <a:br>
-              <a:rPr lang="en-US" dirty="0"/>
-            </a:br>
-            <a:r>
-              <a:rPr lang="en-US" dirty="0"/>
-              <a:t>No ability to intercept (No such thing as an automatic soft delete with this)</a:t>
-            </a:r>
-          </a:p>
-          <a:p>
             <a:endParaRPr lang="en-US" dirty="0"/>
           </a:p>
         </p:txBody>
@@ -1838,7 +2172,7 @@
           <a:p>
             <a:fld id="{1A8F4386-F8E0-437E-911F-526A26FCC1EB}" type="slidenum">
               <a:rPr lang="en-US" smtClean="0"/>
-              <a:t>20</a:t>
+              <a:t>16</a:t>
             </a:fld>
             <a:endParaRPr lang="en-US"/>
           </a:p>
@@ -1847,7 +2181,7 @@
     </p:spTree>
     <p:extLst>
       <p:ext uri="{BB962C8B-B14F-4D97-AF65-F5344CB8AC3E}">
-        <p14:creationId xmlns:p14="http://schemas.microsoft.com/office/powerpoint/2010/main" val="860592616"/>
+        <p14:creationId xmlns:p14="http://schemas.microsoft.com/office/powerpoint/2010/main" val="3320068916"/>
       </p:ext>
     </p:extLst>
   </p:cSld>
@@ -1903,24 +2237,60 @@
           <a:p>
             <a:r>
               <a:rPr lang="en-US" dirty="0"/>
-              <a:t>Iteration means O(n) growth rate</a:t>
-            </a:r>
+              <a:t>Each problem requires a loop</a:t>
+            </a:r>
+          </a:p>
+          <a:p>
+            <a:r>
+              <a:rPr lang="en-US" dirty="0"/>
+              <a:t>However, the second requires a filter</a:t>
+            </a:r>
+          </a:p>
+          <a:p>
             <a:br>
               <a:rPr lang="en-US" dirty="0"/>
             </a:br>
             <a:r>
               <a:rPr lang="en-US" dirty="0"/>
-              <a:t>Transaction means you might get through 1000s then fail and nothing is updated and have to do it all again</a:t>
+              <a:t>Prior to bulk update / bulk delete, either you iterate all on the client side or use a proc</a:t>
+            </a:r>
+            <a:br>
+              <a:rPr lang="en-US" dirty="0"/>
+            </a:br>
+            <a:r>
+              <a:rPr lang="en-US" dirty="0"/>
+              <a:t>With bulk-update/ bulk-delete you can do one operation</a:t>
+            </a:r>
+          </a:p>
+          <a:p>
+            <a:br>
+              <a:rPr lang="en-US" dirty="0"/>
+            </a:br>
+            <a:r>
+              <a:rPr lang="en-US" dirty="0"/>
+              <a:t>Side effects:</a:t>
+            </a:r>
+            <a:br>
+              <a:rPr lang="en-US" dirty="0"/>
+            </a:br>
+            <a:r>
+              <a:rPr lang="en-US" dirty="0"/>
+              <a:t>No </a:t>
+            </a:r>
+            <a:r>
+              <a:rPr lang="en-US" dirty="0" err="1"/>
+              <a:t>SaveChanges</a:t>
+            </a:r>
+            <a:br>
+              <a:rPr lang="en-US" dirty="0"/>
+            </a:br>
+            <a:r>
+              <a:rPr lang="en-US" dirty="0"/>
+              <a:t>No ability to intercept (No such thing as an automatic soft delete with this)</a:t>
             </a:r>
           </a:p>
           <a:p>
             <a:endParaRPr lang="en-US" dirty="0"/>
-          </a:p>
-          <a:p>
-            <a:r>
-              <a:rPr lang="en-US" dirty="0"/>
-              <a:t>Solution was likely use a PROC</a:t>
-            </a:r>
           </a:p>
         </p:txBody>
       </p:sp>
@@ -1941,7 +2311,7 @@
           <a:p>
             <a:fld id="{1A8F4386-F8E0-437E-911F-526A26FCC1EB}" type="slidenum">
               <a:rPr lang="en-US" smtClean="0"/>
-              <a:t>21</a:t>
+              <a:t>20</a:t>
             </a:fld>
             <a:endParaRPr lang="en-US"/>
           </a:p>
@@ -1950,7 +2320,7 @@
     </p:spTree>
     <p:extLst>
       <p:ext uri="{BB962C8B-B14F-4D97-AF65-F5344CB8AC3E}">
-        <p14:creationId xmlns:p14="http://schemas.microsoft.com/office/powerpoint/2010/main" val="3818299251"/>
+        <p14:creationId xmlns:p14="http://schemas.microsoft.com/office/powerpoint/2010/main" val="860592616"/>
       </p:ext>
     </p:extLst>
   </p:cSld>
@@ -2006,20 +2376,23 @@
           <a:p>
             <a:r>
               <a:rPr lang="en-US" dirty="0"/>
-              <a:t>Reminder:</a:t>
+              <a:t>Iteration means O(n) growth rate</a:t>
             </a:r>
             <a:br>
               <a:rPr lang="en-US" dirty="0"/>
             </a:br>
             <a:r>
               <a:rPr lang="en-US" dirty="0"/>
-              <a:t>There is no save changes on this operation</a:t>
-            </a:r>
-          </a:p>
-          <a:p>
-            <a:r>
-              <a:rPr lang="en-US" dirty="0"/>
-              <a:t>There is no interceptor capture of command on this data</a:t>
+              <a:t>Transaction means you might get through 1000s then fail and nothing is updated and have to do it all again</a:t>
+            </a:r>
+          </a:p>
+          <a:p>
+            <a:endParaRPr lang="en-US" dirty="0"/>
+          </a:p>
+          <a:p>
+            <a:r>
+              <a:rPr lang="en-US" dirty="0"/>
+              <a:t>Solution was likely use a PROC</a:t>
             </a:r>
           </a:p>
         </p:txBody>
@@ -2041,7 +2414,7 @@
           <a:p>
             <a:fld id="{1A8F4386-F8E0-437E-911F-526A26FCC1EB}" type="slidenum">
               <a:rPr lang="en-US" smtClean="0"/>
-              <a:t>22</a:t>
+              <a:t>21</a:t>
             </a:fld>
             <a:endParaRPr lang="en-US"/>
           </a:p>
@@ -2050,7 +2423,7 @@
     </p:spTree>
     <p:extLst>
       <p:ext uri="{BB962C8B-B14F-4D97-AF65-F5344CB8AC3E}">
-        <p14:creationId xmlns:p14="http://schemas.microsoft.com/office/powerpoint/2010/main" val="2627787229"/>
+        <p14:creationId xmlns:p14="http://schemas.microsoft.com/office/powerpoint/2010/main" val="3818299251"/>
       </p:ext>
     </p:extLst>
   </p:cSld>
@@ -2104,7 +2477,23 @@
           <a:bodyPr/>
           <a:lstStyle/>
           <a:p>
-            <a:endParaRPr lang="en-US" dirty="0"/>
+            <a:r>
+              <a:rPr lang="en-US" dirty="0"/>
+              <a:t>Reminder:</a:t>
+            </a:r>
+            <a:br>
+              <a:rPr lang="en-US" dirty="0"/>
+            </a:br>
+            <a:r>
+              <a:rPr lang="en-US" dirty="0"/>
+              <a:t>There is no save changes on this operation</a:t>
+            </a:r>
+          </a:p>
+          <a:p>
+            <a:r>
+              <a:rPr lang="en-US" dirty="0"/>
+              <a:t>There is no interceptor capture of command on this data</a:t>
+            </a:r>
           </a:p>
         </p:txBody>
       </p:sp>
@@ -2125,7 +2514,7 @@
           <a:p>
             <a:fld id="{1A8F4386-F8E0-437E-911F-526A26FCC1EB}" type="slidenum">
               <a:rPr lang="en-US" smtClean="0"/>
-              <a:t>23</a:t>
+              <a:t>22</a:t>
             </a:fld>
             <a:endParaRPr lang="en-US"/>
           </a:p>
@@ -2134,7 +2523,7 @@
     </p:spTree>
     <p:extLst>
       <p:ext uri="{BB962C8B-B14F-4D97-AF65-F5344CB8AC3E}">
-        <p14:creationId xmlns:p14="http://schemas.microsoft.com/office/powerpoint/2010/main" val="2444440591"/>
+        <p14:creationId xmlns:p14="http://schemas.microsoft.com/office/powerpoint/2010/main" val="2627787229"/>
       </p:ext>
     </p:extLst>
   </p:cSld>
@@ -2209,7 +2598,7 @@
           <a:p>
             <a:fld id="{1A8F4386-F8E0-437E-911F-526A26FCC1EB}" type="slidenum">
               <a:rPr lang="en-US" smtClean="0"/>
-              <a:t>24</a:t>
+              <a:t>23</a:t>
             </a:fld>
             <a:endParaRPr lang="en-US"/>
           </a:p>
@@ -2218,7 +2607,7 @@
     </p:spTree>
     <p:extLst>
       <p:ext uri="{BB962C8B-B14F-4D97-AF65-F5344CB8AC3E}">
-        <p14:creationId xmlns:p14="http://schemas.microsoft.com/office/powerpoint/2010/main" val="4246146959"/>
+        <p14:creationId xmlns:p14="http://schemas.microsoft.com/office/powerpoint/2010/main" val="2444440591"/>
       </p:ext>
     </p:extLst>
   </p:cSld>
@@ -2272,10 +2661,7 @@
           <a:bodyPr/>
           <a:lstStyle/>
           <a:p>
-            <a:r>
-              <a:rPr lang="en-US" dirty="0"/>
-              <a:t>This is not the only way to do it, just one example</a:t>
-            </a:r>
+            <a:endParaRPr lang="en-US" dirty="0"/>
           </a:p>
         </p:txBody>
       </p:sp>
@@ -2296,7 +2682,7 @@
           <a:p>
             <a:fld id="{1A8F4386-F8E0-437E-911F-526A26FCC1EB}" type="slidenum">
               <a:rPr lang="en-US" smtClean="0"/>
-              <a:t>26</a:t>
+              <a:t>24</a:t>
             </a:fld>
             <a:endParaRPr lang="en-US"/>
           </a:p>
@@ -2305,7 +2691,7 @@
     </p:spTree>
     <p:extLst>
       <p:ext uri="{BB962C8B-B14F-4D97-AF65-F5344CB8AC3E}">
-        <p14:creationId xmlns:p14="http://schemas.microsoft.com/office/powerpoint/2010/main" val="3723997312"/>
+        <p14:creationId xmlns:p14="http://schemas.microsoft.com/office/powerpoint/2010/main" val="4246146959"/>
       </p:ext>
     </p:extLst>
   </p:cSld>
@@ -3828,6 +4214,36 @@
           </a:p>
         </p:txBody>
       </p:sp>
+      <p:pic>
+        <p:nvPicPr>
+          <p:cNvPr id="4" name="Picture 3">
+            <a:extLst>
+              <a:ext uri="{FF2B5EF4-FFF2-40B4-BE49-F238E27FC236}">
+                <a16:creationId xmlns:a16="http://schemas.microsoft.com/office/drawing/2014/main" id="{ABB7239A-30D6-19B2-5BB5-61E27DE9D9CB}"/>
+              </a:ext>
+            </a:extLst>
+          </p:cNvPr>
+          <p:cNvPicPr>
+            <a:picLocks noChangeAspect="1"/>
+          </p:cNvPicPr>
+          <p:nvPr/>
+        </p:nvPicPr>
+        <p:blipFill>
+          <a:blip r:embed="rId3"/>
+          <a:stretch>
+            <a:fillRect/>
+          </a:stretch>
+        </p:blipFill>
+        <p:spPr>
+          <a:xfrm>
+            <a:off x="7772558" y="0"/>
+            <a:ext cx="3093262" cy="3093262"/>
+          </a:xfrm>
+          <a:prstGeom prst="rect">
+            <a:avLst/>
+          </a:prstGeom>
+        </p:spPr>
+      </p:pic>
     </p:spTree>
     <p:extLst>
       <p:ext uri="{BB962C8B-B14F-4D97-AF65-F5344CB8AC3E}">
@@ -7973,7 +8389,7 @@
           <a:p>
             <a:r>
               <a:rPr lang="en-US" dirty="0"/>
-              <a:t>N+1 Queries (Potential Lazy-Loading Problems)s</a:t>
+              <a:t>N+1 Queries (Potential Lazy-Loading Problems)</a:t>
             </a:r>
           </a:p>
         </p:txBody>
@@ -9415,13 +9831,7 @@
   <p:cSld>
     <p:spTree>
       <p:nvGrpSpPr>
-        <p:cNvPr id="1" name="">
-          <a:extLst>
-            <a:ext uri="{FF2B5EF4-FFF2-40B4-BE49-F238E27FC236}">
-              <a16:creationId xmlns:a16="http://schemas.microsoft.com/office/drawing/2014/main" id="{F9830E55-67F9-7D37-A2ED-7AD377E51898}"/>
-            </a:ext>
-          </a:extLst>
-        </p:cNvPr>
+        <p:cNvPr id="1" name=""/>
         <p:cNvGrpSpPr/>
         <p:nvPr/>
       </p:nvGrpSpPr>
@@ -9438,7 +9848,7 @@
           <p:cNvPr id="2" name="Title 1">
             <a:extLst>
               <a:ext uri="{FF2B5EF4-FFF2-40B4-BE49-F238E27FC236}">
-                <a16:creationId xmlns:a16="http://schemas.microsoft.com/office/drawing/2014/main" id="{E7BC0DA4-19DB-FE1E-BDC4-B9020102B132}"/>
+                <a16:creationId xmlns:a16="http://schemas.microsoft.com/office/drawing/2014/main" id="{20811E97-09C2-99DC-A265-7162973E6748}"/>
               </a:ext>
             </a:extLst>
           </p:cNvPr>
@@ -9449,20 +9859,66 @@
             <p:ph type="title"/>
           </p:nvPr>
         </p:nvSpPr>
-        <p:spPr>
-          <a:xfrm>
-            <a:off x="5522026" y="360363"/>
-            <a:ext cx="5638099" cy="5759449"/>
-          </a:xfrm>
-        </p:spPr>
+        <p:spPr/>
         <p:txBody>
           <a:bodyPr/>
           <a:lstStyle/>
           <a:p>
-            <a:pPr algn="l"/>
-            <a:r>
-              <a:rPr lang="en-US" dirty="0"/>
-              <a:t>Questions/War Stories</a:t>
+            <a:r>
+              <a:rPr lang="en-US" dirty="0"/>
+              <a:t>But Brian – The Query Plan!!</a:t>
+            </a:r>
+          </a:p>
+        </p:txBody>
+      </p:sp>
+      <p:sp>
+        <p:nvSpPr>
+          <p:cNvPr id="3" name="Content Placeholder 2">
+            <a:extLst>
+              <a:ext uri="{FF2B5EF4-FFF2-40B4-BE49-F238E27FC236}">
+                <a16:creationId xmlns:a16="http://schemas.microsoft.com/office/drawing/2014/main" id="{B19BA036-88AB-8C57-641F-CF005C84C4A0}"/>
+              </a:ext>
+            </a:extLst>
+          </p:cNvPr>
+          <p:cNvSpPr>
+            <a:spLocks noGrp="1"/>
+          </p:cNvSpPr>
+          <p:nvPr>
+            <p:ph idx="1"/>
+          </p:nvPr>
+        </p:nvSpPr>
+        <p:spPr/>
+        <p:txBody>
+          <a:bodyPr/>
+          <a:lstStyle/>
+          <a:p>
+            <a:r>
+              <a:rPr lang="en-US" dirty="0"/>
+              <a:t>Problem: Using LINQ doesn’t allow for the Query Plan to be reused – SO WE CAN’T USE IT</a:t>
+            </a:r>
+          </a:p>
+          <a:p>
+            <a:endParaRPr lang="en-US" dirty="0"/>
+          </a:p>
+          <a:p>
+            <a:r>
+              <a:rPr lang="en-US" dirty="0"/>
+              <a:t>SOLUTION: WRONG!(</a:t>
+            </a:r>
+            <a:r>
+              <a:rPr lang="en-US" dirty="0" err="1"/>
+              <a:t>ish</a:t>
+            </a:r>
+            <a:r>
+              <a:rPr lang="en-US" dirty="0"/>
+              <a:t>)</a:t>
+            </a:r>
+            <a:br>
+              <a:rPr lang="en-US" dirty="0"/>
+            </a:br>
+            <a:r>
+              <a:rPr lang="en-US" dirty="0"/>
+              <a:t>LINQ Now optimizes when it can: Sending parameters as part of the underlying SQL which ALLOWS FOR REUSE OF THE QUERY PLAN FROM LINQ QUERIES!!!!!!!</a:t>
             </a:r>
           </a:p>
         </p:txBody>
@@ -9470,7 +9926,7 @@
     </p:spTree>
     <p:extLst>
       <p:ext uri="{BB962C8B-B14F-4D97-AF65-F5344CB8AC3E}">
-        <p14:creationId xmlns:p14="http://schemas.microsoft.com/office/powerpoint/2010/main" val="1132259183"/>
+        <p14:creationId xmlns:p14="http://schemas.microsoft.com/office/powerpoint/2010/main" val="1316272513"/>
       </p:ext>
     </p:extLst>
   </p:cSld>
@@ -9792,6 +10248,687 @@
 </file>
 
 <file path=ppt/slides/slide40.xml><?xml version="1.0" encoding="utf-8"?>
+<p:sld xmlns:a="http://schemas.openxmlformats.org/drawingml/2006/main" xmlns:r="http://schemas.openxmlformats.org/officeDocument/2006/relationships" xmlns:p="http://schemas.openxmlformats.org/presentationml/2006/main">
+  <p:cSld>
+    <p:spTree>
+      <p:nvGrpSpPr>
+        <p:cNvPr id="1" name=""/>
+        <p:cNvGrpSpPr/>
+        <p:nvPr/>
+      </p:nvGrpSpPr>
+      <p:grpSpPr>
+        <a:xfrm>
+          <a:off x="0" y="0"/>
+          <a:ext cx="0" cy="0"/>
+          <a:chOff x="0" y="0"/>
+          <a:chExt cx="0" cy="0"/>
+        </a:xfrm>
+      </p:grpSpPr>
+      <p:sp>
+        <p:nvSpPr>
+          <p:cNvPr id="2" name="Title 1">
+            <a:extLst>
+              <a:ext uri="{FF2B5EF4-FFF2-40B4-BE49-F238E27FC236}">
+                <a16:creationId xmlns:a16="http://schemas.microsoft.com/office/drawing/2014/main" id="{43DC7603-6222-ABAF-3B1A-E55AD6C954FB}"/>
+              </a:ext>
+            </a:extLst>
+          </p:cNvPr>
+          <p:cNvSpPr>
+            <a:spLocks noGrp="1"/>
+          </p:cNvSpPr>
+          <p:nvPr>
+            <p:ph type="title"/>
+          </p:nvPr>
+        </p:nvSpPr>
+        <p:spPr/>
+        <p:txBody>
+          <a:bodyPr/>
+          <a:lstStyle/>
+          <a:p>
+            <a:r>
+              <a:rPr lang="en-US" dirty="0" err="1"/>
+              <a:t>Proove</a:t>
+            </a:r>
+            <a:r>
+              <a:rPr lang="en-US" dirty="0"/>
+              <a:t> It!</a:t>
+            </a:r>
+          </a:p>
+        </p:txBody>
+      </p:sp>
+      <p:sp>
+        <p:nvSpPr>
+          <p:cNvPr id="3" name="Content Placeholder 2">
+            <a:extLst>
+              <a:ext uri="{FF2B5EF4-FFF2-40B4-BE49-F238E27FC236}">
+                <a16:creationId xmlns:a16="http://schemas.microsoft.com/office/drawing/2014/main" id="{292FB84B-E3F5-9E96-3499-3488205935C4}"/>
+              </a:ext>
+            </a:extLst>
+          </p:cNvPr>
+          <p:cNvSpPr>
+            <a:spLocks noGrp="1"/>
+          </p:cNvSpPr>
+          <p:nvPr>
+            <p:ph idx="1"/>
+          </p:nvPr>
+        </p:nvSpPr>
+        <p:spPr/>
+        <p:txBody>
+          <a:bodyPr/>
+          <a:lstStyle/>
+          <a:p>
+            <a:r>
+              <a:rPr lang="en-US" dirty="0"/>
+              <a:t>Run a LINQ Query using CONTAINS</a:t>
+            </a:r>
+          </a:p>
+          <a:p>
+            <a:r>
+              <a:rPr lang="en-US" dirty="0"/>
+              <a:t>In the past, it would have</a:t>
+            </a:r>
+            <a:br>
+              <a:rPr lang="en-US" dirty="0"/>
+            </a:br>
+            <a:r>
+              <a:rPr lang="en-US" dirty="0"/>
+              <a:t>WHERE </a:t>
+            </a:r>
+            <a:r>
+              <a:rPr lang="en-US" dirty="0" err="1"/>
+              <a:t>someColumn</a:t>
+            </a:r>
+            <a:r>
+              <a:rPr lang="en-US" dirty="0"/>
+              <a:t> IN (1, 2, 3, 4, …)</a:t>
+            </a:r>
+          </a:p>
+          <a:p>
+            <a:br>
+              <a:rPr lang="en-US" dirty="0"/>
+            </a:br>
+            <a:r>
+              <a:rPr lang="en-US" dirty="0"/>
+              <a:t>Will now be</a:t>
+            </a:r>
+            <a:br>
+              <a:rPr lang="en-US" dirty="0"/>
+            </a:br>
+            <a:r>
+              <a:rPr lang="en-US" dirty="0" err="1"/>
+              <a:t>someColumn</a:t>
+            </a:r>
+            <a:r>
+              <a:rPr lang="en-US" dirty="0"/>
+              <a:t> LIKE @someFilter_contains ESCAPE N''\''</a:t>
+            </a:r>
+          </a:p>
+        </p:txBody>
+      </p:sp>
+    </p:spTree>
+    <p:extLst>
+      <p:ext uri="{BB962C8B-B14F-4D97-AF65-F5344CB8AC3E}">
+        <p14:creationId xmlns:p14="http://schemas.microsoft.com/office/powerpoint/2010/main" val="2566255658"/>
+      </p:ext>
+    </p:extLst>
+  </p:cSld>
+  <p:clrMapOvr>
+    <a:masterClrMapping/>
+  </p:clrMapOvr>
+</p:sld>
+</file>
+
+<file path=ppt/slides/slide41.xml><?xml version="1.0" encoding="utf-8"?>
+<p:sld xmlns:a="http://schemas.openxmlformats.org/drawingml/2006/main" xmlns:r="http://schemas.openxmlformats.org/officeDocument/2006/relationships" xmlns:p="http://schemas.openxmlformats.org/presentationml/2006/main">
+  <p:cSld>
+    <p:spTree>
+      <p:nvGrpSpPr>
+        <p:cNvPr id="1" name=""/>
+        <p:cNvGrpSpPr/>
+        <p:nvPr/>
+      </p:nvGrpSpPr>
+      <p:grpSpPr>
+        <a:xfrm>
+          <a:off x="0" y="0"/>
+          <a:ext cx="0" cy="0"/>
+          <a:chOff x="0" y="0"/>
+          <a:chExt cx="0" cy="0"/>
+        </a:xfrm>
+      </p:grpSpPr>
+      <p:sp>
+        <p:nvSpPr>
+          <p:cNvPr id="2" name="Title 1">
+            <a:extLst>
+              <a:ext uri="{FF2B5EF4-FFF2-40B4-BE49-F238E27FC236}">
+                <a16:creationId xmlns:a16="http://schemas.microsoft.com/office/drawing/2014/main" id="{62F46791-0302-24A5-DE54-C3705C83B9E0}"/>
+              </a:ext>
+            </a:extLst>
+          </p:cNvPr>
+          <p:cNvSpPr>
+            <a:spLocks noGrp="1"/>
+          </p:cNvSpPr>
+          <p:nvPr>
+            <p:ph type="title"/>
+          </p:nvPr>
+        </p:nvSpPr>
+        <p:spPr/>
+        <p:txBody>
+          <a:bodyPr/>
+          <a:lstStyle/>
+          <a:p>
+            <a:endParaRPr lang="en-US"/>
+          </a:p>
+        </p:txBody>
+      </p:sp>
+      <p:sp>
+        <p:nvSpPr>
+          <p:cNvPr id="3" name="Content Placeholder 2">
+            <a:extLst>
+              <a:ext uri="{FF2B5EF4-FFF2-40B4-BE49-F238E27FC236}">
+                <a16:creationId xmlns:a16="http://schemas.microsoft.com/office/drawing/2014/main" id="{7A34F718-8088-C5CA-0AB0-087D1E73ED45}"/>
+              </a:ext>
+            </a:extLst>
+          </p:cNvPr>
+          <p:cNvSpPr>
+            <a:spLocks noGrp="1"/>
+          </p:cNvSpPr>
+          <p:nvPr>
+            <p:ph idx="1"/>
+          </p:nvPr>
+        </p:nvSpPr>
+        <p:spPr/>
+        <p:txBody>
+          <a:bodyPr>
+            <a:normAutofit fontScale="62500" lnSpcReduction="20000"/>
+          </a:bodyPr>
+          <a:lstStyle/>
+          <a:p>
+            <a:r>
+              <a:rPr lang="en-US" dirty="0"/>
+              <a:t>exec </a:t>
+            </a:r>
+            <a:r>
+              <a:rPr lang="en-US" dirty="0" err="1"/>
+              <a:t>sp_executesql</a:t>
+            </a:r>
+            <a:r>
+              <a:rPr lang="en-US" dirty="0"/>
+              <a:t> N'SELECT [c0].[</a:t>
+            </a:r>
+            <a:r>
+              <a:rPr lang="en-US" dirty="0" err="1"/>
+              <a:t>CategoryName</a:t>
+            </a:r>
+            <a:r>
+              <a:rPr lang="en-US" dirty="0"/>
+              <a:t>], [</a:t>
+            </a:r>
+            <a:r>
+              <a:rPr lang="en-US" dirty="0" err="1"/>
+              <a:t>i</a:t>
+            </a:r>
+            <a:r>
+              <a:rPr lang="en-US" dirty="0"/>
+              <a:t>].[</a:t>
+            </a:r>
+            <a:r>
+              <a:rPr lang="en-US" dirty="0" err="1"/>
+              <a:t>ItemName</a:t>
+            </a:r>
+            <a:r>
+              <a:rPr lang="en-US" dirty="0"/>
+              <a:t>]</a:t>
+            </a:r>
+          </a:p>
+          <a:p>
+            <a:r>
+              <a:rPr lang="en-US" dirty="0"/>
+              <a:t>FROM [Items] AS [</a:t>
+            </a:r>
+            <a:r>
+              <a:rPr lang="en-US" dirty="0" err="1"/>
+              <a:t>i</a:t>
+            </a:r>
+            <a:r>
+              <a:rPr lang="en-US" dirty="0"/>
+              <a:t>]</a:t>
+            </a:r>
+          </a:p>
+          <a:p>
+            <a:r>
+              <a:rPr lang="en-US" dirty="0"/>
+              <a:t>INNER JOIN (</a:t>
+            </a:r>
+          </a:p>
+          <a:p>
+            <a:r>
+              <a:rPr lang="en-US" dirty="0"/>
+              <a:t>    SELECT [c].[Id], [c].[</a:t>
+            </a:r>
+            <a:r>
+              <a:rPr lang="en-US" dirty="0" err="1"/>
+              <a:t>CategoryName</a:t>
+            </a:r>
+            <a:r>
+              <a:rPr lang="en-US" dirty="0"/>
+              <a:t>]</a:t>
+            </a:r>
+          </a:p>
+          <a:p>
+            <a:r>
+              <a:rPr lang="en-US" dirty="0"/>
+              <a:t>    FROM [Categories] AS [c]</a:t>
+            </a:r>
+          </a:p>
+          <a:p>
+            <a:r>
+              <a:rPr lang="en-US" dirty="0"/>
+              <a:t>    WHERE [c].[</a:t>
+            </a:r>
+            <a:r>
+              <a:rPr lang="en-US" dirty="0" err="1"/>
+              <a:t>IsDeleted</a:t>
+            </a:r>
+            <a:r>
+              <a:rPr lang="en-US" dirty="0"/>
+              <a:t>] = CAST(0 AS bit) AND [c].[</a:t>
+            </a:r>
+            <a:r>
+              <a:rPr lang="en-US" dirty="0" err="1"/>
+              <a:t>IsActive</a:t>
+            </a:r>
+            <a:r>
+              <a:rPr lang="en-US" dirty="0"/>
+              <a:t>] = CAST(1 AS bit)</a:t>
+            </a:r>
+          </a:p>
+          <a:p>
+            <a:r>
+              <a:rPr lang="en-US" dirty="0"/>
+              <a:t>) AS [c0] ON [</a:t>
+            </a:r>
+            <a:r>
+              <a:rPr lang="en-US" dirty="0" err="1"/>
+              <a:t>i</a:t>
+            </a:r>
+            <a:r>
+              <a:rPr lang="en-US" dirty="0"/>
+              <a:t>].[</a:t>
+            </a:r>
+            <a:r>
+              <a:rPr lang="en-US" dirty="0" err="1"/>
+              <a:t>CategoryId</a:t>
+            </a:r>
+            <a:r>
+              <a:rPr lang="en-US" dirty="0"/>
+              <a:t>] = [c0].[Id]</a:t>
+            </a:r>
+          </a:p>
+          <a:p>
+            <a:r>
+              <a:rPr lang="en-US" dirty="0"/>
+              <a:t>WHERE [</a:t>
+            </a:r>
+            <a:r>
+              <a:rPr lang="en-US" dirty="0" err="1"/>
+              <a:t>i</a:t>
+            </a:r>
+            <a:r>
+              <a:rPr lang="en-US" dirty="0"/>
+              <a:t>].[</a:t>
+            </a:r>
+            <a:r>
+              <a:rPr lang="en-US" dirty="0" err="1"/>
+              <a:t>IsDeleted</a:t>
+            </a:r>
+            <a:r>
+              <a:rPr lang="en-US" dirty="0"/>
+              <a:t>] = CAST(0 AS bit) AND [</a:t>
+            </a:r>
+            <a:r>
+              <a:rPr lang="en-US" dirty="0" err="1"/>
+              <a:t>i</a:t>
+            </a:r>
+            <a:r>
+              <a:rPr lang="en-US" dirty="0"/>
+              <a:t>].[</a:t>
+            </a:r>
+            <a:r>
+              <a:rPr lang="en-US" dirty="0" err="1"/>
+              <a:t>IsActive</a:t>
+            </a:r>
+            <a:r>
+              <a:rPr lang="en-US" dirty="0"/>
+              <a:t>] = CAST(1 AS bit) AND [</a:t>
+            </a:r>
+            <a:r>
+              <a:rPr lang="en-US" dirty="0" err="1"/>
+              <a:t>i</a:t>
+            </a:r>
+            <a:r>
+              <a:rPr lang="en-US" dirty="0"/>
+              <a:t>].[</a:t>
+            </a:r>
+            <a:r>
+              <a:rPr lang="en-US" dirty="0" err="1"/>
+              <a:t>TenantId</a:t>
+            </a:r>
+            <a:r>
+              <a:rPr lang="en-US" dirty="0"/>
+              <a:t>] = 1 AND [</a:t>
+            </a:r>
+            <a:r>
+              <a:rPr lang="en-US" dirty="0" err="1"/>
+              <a:t>i</a:t>
+            </a:r>
+            <a:r>
+              <a:rPr lang="en-US" dirty="0"/>
+              <a:t>].[</a:t>
+            </a:r>
+            <a:r>
+              <a:rPr lang="en-US" dirty="0" err="1"/>
+              <a:t>ItemName</a:t>
+            </a:r>
+            <a:r>
+              <a:rPr lang="en-US" dirty="0"/>
+              <a:t>] LIKE </a:t>
+            </a:r>
+            <a:r>
+              <a:rPr lang="en-US" b="1" dirty="0"/>
+              <a:t>@itemFilter_contains ESCAPE N''\''</a:t>
+            </a:r>
+            <a:r>
+              <a:rPr lang="en-US" dirty="0"/>
+              <a:t> AND [c0].[</a:t>
+            </a:r>
+            <a:r>
+              <a:rPr lang="en-US" dirty="0" err="1"/>
+              <a:t>CategoryName</a:t>
+            </a:r>
+            <a:r>
+              <a:rPr lang="en-US" dirty="0"/>
+              <a:t>] </a:t>
+            </a:r>
+            <a:r>
+              <a:rPr lang="en-US" b="1" dirty="0"/>
+              <a:t>LIKE @categoryFilter_contains ESCAPE N''\''</a:t>
+            </a:r>
+          </a:p>
+          <a:p>
+            <a:r>
+              <a:rPr lang="en-US" dirty="0"/>
+              <a:t>ORDER BY [c0].[</a:t>
+            </a:r>
+            <a:r>
+              <a:rPr lang="en-US" dirty="0" err="1"/>
+              <a:t>CategoryName</a:t>
+            </a:r>
+            <a:r>
+              <a:rPr lang="en-US" dirty="0"/>
+              <a:t>], [</a:t>
+            </a:r>
+            <a:r>
+              <a:rPr lang="en-US" dirty="0" err="1"/>
+              <a:t>i</a:t>
+            </a:r>
+            <a:r>
+              <a:rPr lang="en-US" dirty="0"/>
+              <a:t>].[</a:t>
+            </a:r>
+            <a:r>
+              <a:rPr lang="en-US" dirty="0" err="1"/>
+              <a:t>ItemName</a:t>
+            </a:r>
+            <a:r>
+              <a:rPr lang="en-US" dirty="0"/>
+              <a:t>]',N'@</a:t>
+            </a:r>
+            <a:r>
+              <a:rPr lang="en-US" dirty="0" err="1"/>
+              <a:t>itemFilter_contains</a:t>
+            </a:r>
+            <a:r>
+              <a:rPr lang="en-US" dirty="0"/>
+              <a:t> </a:t>
+            </a:r>
+            <a:r>
+              <a:rPr lang="en-US" dirty="0" err="1"/>
+              <a:t>nvarchar</a:t>
+            </a:r>
+            <a:r>
+              <a:rPr lang="en-US" dirty="0"/>
+              <a:t>(100),@</a:t>
+            </a:r>
+            <a:r>
+              <a:rPr lang="en-US" dirty="0" err="1"/>
+              <a:t>categoryFilter_contains</a:t>
+            </a:r>
+            <a:r>
+              <a:rPr lang="en-US" dirty="0"/>
+              <a:t> </a:t>
+            </a:r>
+            <a:r>
+              <a:rPr lang="en-US" dirty="0" err="1"/>
+              <a:t>nvarchar</a:t>
+            </a:r>
+            <a:r>
+              <a:rPr lang="en-US" dirty="0"/>
+              <a:t>(50)',@</a:t>
+            </a:r>
+            <a:r>
+              <a:rPr lang="en-US" dirty="0" err="1"/>
+              <a:t>itemFilter_contains</a:t>
+            </a:r>
+            <a:r>
+              <a:rPr lang="en-US" dirty="0"/>
+              <a:t>=N'%s%',@</a:t>
+            </a:r>
+            <a:r>
+              <a:rPr lang="en-US" dirty="0" err="1"/>
+              <a:t>categoryFilter_contains</a:t>
+            </a:r>
+            <a:r>
+              <a:rPr lang="en-US" dirty="0"/>
+              <a:t>=</a:t>
+            </a:r>
+            <a:r>
+              <a:rPr lang="en-US" dirty="0" err="1"/>
+              <a:t>N'%Movie</a:t>
+            </a:r>
+            <a:r>
+              <a:rPr lang="en-US" dirty="0"/>
+              <a:t>%'</a:t>
+            </a:r>
+            <a:endParaRPr lang="en-US" b="1" dirty="0"/>
+          </a:p>
+        </p:txBody>
+      </p:sp>
+    </p:spTree>
+    <p:extLst>
+      <p:ext uri="{BB962C8B-B14F-4D97-AF65-F5344CB8AC3E}">
+        <p14:creationId xmlns:p14="http://schemas.microsoft.com/office/powerpoint/2010/main" val="3869106345"/>
+      </p:ext>
+    </p:extLst>
+  </p:cSld>
+  <p:clrMapOvr>
+    <a:masterClrMapping/>
+  </p:clrMapOvr>
+</p:sld>
+</file>
+
+<file path=ppt/slides/slide42.xml><?xml version="1.0" encoding="utf-8"?>
+<p:sld xmlns:a="http://schemas.openxmlformats.org/drawingml/2006/main" xmlns:r="http://schemas.openxmlformats.org/officeDocument/2006/relationships" xmlns:p="http://schemas.openxmlformats.org/presentationml/2006/main">
+  <p:cSld>
+    <p:spTree>
+      <p:nvGrpSpPr>
+        <p:cNvPr id="1" name="">
+          <a:extLst>
+            <a:ext uri="{FF2B5EF4-FFF2-40B4-BE49-F238E27FC236}">
+              <a16:creationId xmlns:a16="http://schemas.microsoft.com/office/drawing/2014/main" id="{A62D5498-39EE-BD38-4C18-3B4782223982}"/>
+            </a:ext>
+          </a:extLst>
+        </p:cNvPr>
+        <p:cNvGrpSpPr/>
+        <p:nvPr/>
+      </p:nvGrpSpPr>
+      <p:grpSpPr>
+        <a:xfrm>
+          <a:off x="0" y="0"/>
+          <a:ext cx="0" cy="0"/>
+          <a:chOff x="0" y="0"/>
+          <a:chExt cx="0" cy="0"/>
+        </a:xfrm>
+      </p:grpSpPr>
+      <p:sp>
+        <p:nvSpPr>
+          <p:cNvPr id="2" name="Title 1">
+            <a:extLst>
+              <a:ext uri="{FF2B5EF4-FFF2-40B4-BE49-F238E27FC236}">
+                <a16:creationId xmlns:a16="http://schemas.microsoft.com/office/drawing/2014/main" id="{7F31BDC2-C9FB-BF51-51C7-899AABD4A6D9}"/>
+              </a:ext>
+            </a:extLst>
+          </p:cNvPr>
+          <p:cNvSpPr>
+            <a:spLocks noGrp="1"/>
+          </p:cNvSpPr>
+          <p:nvPr>
+            <p:ph type="title"/>
+          </p:nvPr>
+        </p:nvSpPr>
+        <p:spPr>
+          <a:xfrm>
+            <a:off x="360125" y="1876743"/>
+            <a:ext cx="10800000" cy="720000"/>
+          </a:xfrm>
+        </p:spPr>
+        <p:txBody>
+          <a:bodyPr/>
+          <a:lstStyle/>
+          <a:p>
+            <a:r>
+              <a:rPr lang="en-US" dirty="0"/>
+              <a:t>Demo</a:t>
+            </a:r>
+          </a:p>
+        </p:txBody>
+      </p:sp>
+      <p:sp>
+        <p:nvSpPr>
+          <p:cNvPr id="3" name="Content Placeholder 2">
+            <a:extLst>
+              <a:ext uri="{FF2B5EF4-FFF2-40B4-BE49-F238E27FC236}">
+                <a16:creationId xmlns:a16="http://schemas.microsoft.com/office/drawing/2014/main" id="{86F40F0E-8918-45E6-2629-3BFD23111D67}"/>
+              </a:ext>
+            </a:extLst>
+          </p:cNvPr>
+          <p:cNvSpPr>
+            <a:spLocks noGrp="1"/>
+          </p:cNvSpPr>
+          <p:nvPr>
+            <p:ph idx="1"/>
+          </p:nvPr>
+        </p:nvSpPr>
+        <p:spPr>
+          <a:xfrm>
+            <a:off x="360125" y="2796539"/>
+            <a:ext cx="10800000" cy="1768793"/>
+          </a:xfrm>
+        </p:spPr>
+        <p:txBody>
+          <a:bodyPr/>
+          <a:lstStyle/>
+          <a:p>
+            <a:r>
+              <a:rPr lang="en-US" dirty="0"/>
+              <a:t>Query Plan Reuse!</a:t>
+            </a:r>
+          </a:p>
+        </p:txBody>
+      </p:sp>
+    </p:spTree>
+    <p:extLst>
+      <p:ext uri="{BB962C8B-B14F-4D97-AF65-F5344CB8AC3E}">
+        <p14:creationId xmlns:p14="http://schemas.microsoft.com/office/powerpoint/2010/main" val="2386581893"/>
+      </p:ext>
+    </p:extLst>
+  </p:cSld>
+  <p:clrMapOvr>
+    <a:masterClrMapping/>
+  </p:clrMapOvr>
+</p:sld>
+</file>
+
+<file path=ppt/slides/slide43.xml><?xml version="1.0" encoding="utf-8"?>
+<p:sld xmlns:a="http://schemas.openxmlformats.org/drawingml/2006/main" xmlns:r="http://schemas.openxmlformats.org/officeDocument/2006/relationships" xmlns:p="http://schemas.openxmlformats.org/presentationml/2006/main">
+  <p:cSld>
+    <p:spTree>
+      <p:nvGrpSpPr>
+        <p:cNvPr id="1" name="">
+          <a:extLst>
+            <a:ext uri="{FF2B5EF4-FFF2-40B4-BE49-F238E27FC236}">
+              <a16:creationId xmlns:a16="http://schemas.microsoft.com/office/drawing/2014/main" id="{F9830E55-67F9-7D37-A2ED-7AD377E51898}"/>
+            </a:ext>
+          </a:extLst>
+        </p:cNvPr>
+        <p:cNvGrpSpPr/>
+        <p:nvPr/>
+      </p:nvGrpSpPr>
+      <p:grpSpPr>
+        <a:xfrm>
+          <a:off x="0" y="0"/>
+          <a:ext cx="0" cy="0"/>
+          <a:chOff x="0" y="0"/>
+          <a:chExt cx="0" cy="0"/>
+        </a:xfrm>
+      </p:grpSpPr>
+      <p:sp>
+        <p:nvSpPr>
+          <p:cNvPr id="2" name="Title 1">
+            <a:extLst>
+              <a:ext uri="{FF2B5EF4-FFF2-40B4-BE49-F238E27FC236}">
+                <a16:creationId xmlns:a16="http://schemas.microsoft.com/office/drawing/2014/main" id="{E7BC0DA4-19DB-FE1E-BDC4-B9020102B132}"/>
+              </a:ext>
+            </a:extLst>
+          </p:cNvPr>
+          <p:cNvSpPr>
+            <a:spLocks noGrp="1"/>
+          </p:cNvSpPr>
+          <p:nvPr>
+            <p:ph type="title"/>
+          </p:nvPr>
+        </p:nvSpPr>
+        <p:spPr>
+          <a:xfrm>
+            <a:off x="5522026" y="360363"/>
+            <a:ext cx="5638099" cy="5759449"/>
+          </a:xfrm>
+        </p:spPr>
+        <p:txBody>
+          <a:bodyPr/>
+          <a:lstStyle/>
+          <a:p>
+            <a:pPr algn="l"/>
+            <a:r>
+              <a:rPr lang="en-US" dirty="0"/>
+              <a:t>Questions/War Stories</a:t>
+            </a:r>
+          </a:p>
+        </p:txBody>
+      </p:sp>
+    </p:spTree>
+    <p:extLst>
+      <p:ext uri="{BB962C8B-B14F-4D97-AF65-F5344CB8AC3E}">
+        <p14:creationId xmlns:p14="http://schemas.microsoft.com/office/powerpoint/2010/main" val="1132259183"/>
+      </p:ext>
+    </p:extLst>
+  </p:cSld>
+  <p:clrMapOvr>
+    <a:masterClrMapping/>
+  </p:clrMapOvr>
+</p:sld>
+</file>
+
+<file path=ppt/slides/slide44.xml><?xml version="1.0" encoding="utf-8"?>
 <p:sld xmlns:a="http://schemas.openxmlformats.org/drawingml/2006/main" xmlns:r="http://schemas.openxmlformats.org/officeDocument/2006/relationships" xmlns:p="http://schemas.openxmlformats.org/presentationml/2006/main">
   <p:cSld>
     <p:spTree>
